--- a/Course#10/MintClassics.pptx
+++ b/Course#10/MintClassics.pptx
@@ -21,6 +21,7 @@
     <p:sldId id="269" r:id="rId17"/>
     <p:sldId id="270" r:id="rId18"/>
     <p:sldId id="271" r:id="rId19"/>
+    <p:sldId id="272" r:id="rId20"/>
   </p:sldIdLst>
   <p:sldSz cx="10080625" cy="7559675"/>
   <p:notesSz cx="7559675" cy="10691813"/>
@@ -1063,7 +1064,7 @@
                   <a:srgbClr val="FFFFFF"/>
                 </a:solidFill>
               </a:rPr>
-              <a:t>Look into Warehouse Shipping Efficiency</a:t>
+              <a:t>Check the Warehouse Contents</a:t>
             </a:r>
           </a:p>
         </p:txBody>
@@ -1097,70 +1098,36 @@
                   <a:srgbClr val="FFFFFF"/>
                 </a:solidFill>
               </a:rPr>
-              <a:t>Orders shipped from multiple warehouses DO NOT differentiate their date of shipment from each warehouse individually, THEREFORE the aggregated totals for each will only show a difference if a given warehouse is performing differently than average.</a:t>
-            </a:r>
-          </a:p>
-        </p:txBody>
-      </p:sp>
-      <p:sp>
-        <p:nvSpPr>
-          <p:cNvPr id="6" name="TextBox 5"/>
-          <p:cNvSpPr txBox="1"/>
-          <p:nvPr/>
-        </p:nvSpPr>
-        <p:spPr>
-          <a:xfrm>
-            <a:off x="640080" y="2286000"/>
-            <a:ext cx="8778240" cy="4114800"/>
-          </a:xfrm>
-          <a:prstGeom prst="rect">
-            <a:avLst/>
-          </a:prstGeom>
-          <a:noFill/>
-        </p:spPr>
-        <p:txBody>
-          <a:bodyPr wrap="square">
-            <a:spAutoFit/>
-          </a:bodyPr>
-          <a:lstStyle/>
-          <a:p>
-            <a:pPr algn="l"/>
-            <a:r>
-              <a:rPr sz="2200">
-                <a:solidFill>
-                  <a:srgbClr val="FFFFFF"/>
-                </a:solidFill>
-              </a:rPr>
-              <a:t>- Check the amount of time each warehouse requires to ship an order.</a:t>
-            </a:r>
-          </a:p>
-          <a:p>
-            <a:pPr algn="l"/>
-            <a:r>
-              <a:rPr sz="2200">
-                <a:solidFill>
-                  <a:srgbClr val="FFFFFF"/>
-                </a:solidFill>
-              </a:rPr>
-              <a:t>- Look for shipping delays from each warehouse.</a:t>
-            </a:r>
-          </a:p>
-          <a:p>
-            <a:pPr algn="l"/>
-            <a:r>
-              <a:rPr sz="2200">
-                <a:solidFill>
-                  <a:srgbClr val="FFFFFF"/>
-                </a:solidFill>
-              </a:rPr>
-              <a:t>- Determine if shipping delays are incidental or a systemic issue.</a:t>
+              <a:t>- It can be seen that the large warehouse "B" contains only 'Classic Cars'.</a:t>
+            </a:r>
+          </a:p>
+          <a:p>
+            <a:pPr algn="l"/>
+            <a:r>
+              <a:rPr sz="2200">
+                <a:solidFill>
+                  <a:srgbClr val="FFFFFF"/>
+                </a:solidFill>
+              </a:rPr>
+              <a:t>- The warehouse which is a candidate for closure, "C", contains only 'Vintage Cars'.</a:t>
+            </a:r>
+          </a:p>
+          <a:p>
+            <a:pPr algn="l"/>
+            <a:r>
+              <a:rPr sz="2200">
+                <a:solidFill>
+                  <a:srgbClr val="FFFFFF"/>
+                </a:solidFill>
+              </a:rPr>
+              <a:t>- Merging the contents of warehouses B and C would allow for the full stock of 'Cars' to be housed in a single location.</a:t>
             </a:r>
           </a:p>
         </p:txBody>
       </p:sp>
       <p:pic>
         <p:nvPicPr>
-          <p:cNvPr id="7" name="Picture 6" descr="table_2.png"/>
+          <p:cNvPr id="6" name="Picture 5" descr="table_2.png"/>
           <p:cNvPicPr>
             <a:picLocks noChangeAspect="1"/>
           </p:cNvPicPr>
@@ -1175,31 +1142,7 @@
         <p:spPr>
           <a:xfrm>
             <a:off x="914400" y="914400"/>
-            <a:ext cx="6199632" cy="3561588"/>
-          </a:xfrm>
-          <a:prstGeom prst="rect">
-            <a:avLst/>
-          </a:prstGeom>
-        </p:spPr>
-      </p:pic>
-      <p:pic>
-        <p:nvPicPr>
-          <p:cNvPr id="8" name="Picture 7" descr="output_54_0.png"/>
-          <p:cNvPicPr>
-            <a:picLocks noChangeAspect="1"/>
-          </p:cNvPicPr>
-          <p:nvPr/>
-        </p:nvPicPr>
-        <p:blipFill>
-          <a:blip r:embed="rId3"/>
-          <a:stretch>
-            <a:fillRect/>
-          </a:stretch>
-        </p:blipFill>
-        <p:spPr>
-          <a:xfrm>
-            <a:off x="1371600" y="1371600"/>
-            <a:ext cx="10881360" cy="5394960"/>
+            <a:ext cx="6752844" cy="3561588"/>
           </a:xfrm>
           <a:prstGeom prst="rect">
             <a:avLst/>
@@ -1347,7 +1290,7 @@
                   <a:srgbClr val="FFFFFF"/>
                 </a:solidFill>
               </a:rPr>
-              <a:t>Warehouse Shipping Efficiency (cont'd)</a:t>
+              <a:t>Look into Warehouse Shipping Efficiency</a:t>
             </a:r>
           </a:p>
         </p:txBody>
@@ -1381,7 +1324,7 @@
                   <a:srgbClr val="FFFFFF"/>
                 </a:solidFill>
               </a:rPr>
-              <a:t>After splitting the shipping delays into occurrences by location, normalized to maximum orders per bin:</a:t>
+              <a:t>Orders shipped from multiple warehouses DO NOT differentiate their date of shipment from each warehouse individually, THEREFORE the aggregated totals for each will only show a difference if a given warehouse is performing differently than average.</a:t>
             </a:r>
           </a:p>
         </p:txBody>
@@ -1415,36 +1358,36 @@
                   <a:srgbClr val="FFFFFF"/>
                 </a:solidFill>
               </a:rPr>
-              <a:t>- Warehouse 'B' has proportionally more One-Day shipping delays than the other warehouses.</a:t>
-            </a:r>
-          </a:p>
-          <a:p>
-            <a:pPr algn="l"/>
-            <a:r>
-              <a:rPr sz="2200">
-                <a:solidFill>
-                  <a:srgbClr val="FFFFFF"/>
-                </a:solidFill>
-              </a:rPr>
-              <a:t>- If warehouse 'C' were to be moved into warehouse 'B' then warehouse 'B' must be able to accommodate an extra 100 orders worth of source/process/ship per day.</a:t>
-            </a:r>
-          </a:p>
-          <a:p>
-            <a:pPr algn="l"/>
-            <a:r>
-              <a:rPr sz="2200">
-                <a:solidFill>
-                  <a:srgbClr val="FFFFFF"/>
-                </a:solidFill>
-              </a:rPr>
-              <a:t>- If the One-Day and Two-Day shipping delays associated with warehouse 'B' are the result of order volume, staffing, or warehouse operations efficiency, then these potential bottlenecks should be rectified prior to moving extra inventory into warehouse 'B'.</a:t>
+              <a:t>- Check the amount of time each warehouse requires to ship an order.</a:t>
+            </a:r>
+          </a:p>
+          <a:p>
+            <a:pPr algn="l"/>
+            <a:r>
+              <a:rPr sz="2200">
+                <a:solidFill>
+                  <a:srgbClr val="FFFFFF"/>
+                </a:solidFill>
+              </a:rPr>
+              <a:t>- Look for shipping delays from each warehouse.</a:t>
+            </a:r>
+          </a:p>
+          <a:p>
+            <a:pPr algn="l"/>
+            <a:r>
+              <a:rPr sz="2200">
+                <a:solidFill>
+                  <a:srgbClr val="FFFFFF"/>
+                </a:solidFill>
+              </a:rPr>
+              <a:t>- Determine if shipping delays are incidental or a systemic issue.</a:t>
             </a:r>
           </a:p>
         </p:txBody>
       </p:sp>
       <p:pic>
         <p:nvPicPr>
-          <p:cNvPr id="7" name="Picture 6" descr="output_57_0.png"/>
+          <p:cNvPr id="7" name="Picture 6" descr="table_3.png"/>
           <p:cNvPicPr>
             <a:picLocks noChangeAspect="1"/>
           </p:cNvPicPr>
@@ -1459,7 +1402,31 @@
         <p:spPr>
           <a:xfrm>
             <a:off x="914400" y="914400"/>
-            <a:ext cx="10881360" cy="3520440"/>
+            <a:ext cx="6199632" cy="3561588"/>
+          </a:xfrm>
+          <a:prstGeom prst="rect">
+            <a:avLst/>
+          </a:prstGeom>
+        </p:spPr>
+      </p:pic>
+      <p:pic>
+        <p:nvPicPr>
+          <p:cNvPr id="8" name="Picture 7" descr="output_55_0.png"/>
+          <p:cNvPicPr>
+            <a:picLocks noChangeAspect="1"/>
+          </p:cNvPicPr>
+          <p:nvPr/>
+        </p:nvPicPr>
+        <p:blipFill>
+          <a:blip r:embed="rId3"/>
+          <a:stretch>
+            <a:fillRect/>
+          </a:stretch>
+        </p:blipFill>
+        <p:spPr>
+          <a:xfrm>
+            <a:off x="1371600" y="1371600"/>
+            <a:ext cx="10881360" cy="5394960"/>
           </a:xfrm>
           <a:prstGeom prst="rect">
             <a:avLst/>
@@ -1607,7 +1574,7 @@
                   <a:srgbClr val="FFFFFF"/>
                 </a:solidFill>
               </a:rPr>
-              <a:t>Next Steps:</a:t>
+              <a:t>Warehouse Shipping Efficiency (cont'd)</a:t>
             </a:r>
           </a:p>
         </p:txBody>
@@ -1641,7 +1608,7 @@
                   <a:srgbClr val="FFFFFF"/>
                 </a:solidFill>
               </a:rPr>
-              <a:t>Compare the actual volumes of Warehouse B and Warehouse C against the estimated model</a:t>
+              <a:t>After splitting the shipping delays into occurrences by location, normalized to maximum orders per bin:</a:t>
             </a:r>
           </a:p>
         </p:txBody>
@@ -1675,33 +1642,57 @@
                   <a:srgbClr val="FFFFFF"/>
                 </a:solidFill>
               </a:rPr>
-              <a:t>- It is extremely important to remember that the amount of space that any given portion of inventory shall occupy has been estimated here without the spacial burden of the items' packaging.</a:t>
-            </a:r>
-          </a:p>
-          <a:p>
-            <a:pPr algn="l"/>
-            <a:r>
-              <a:rPr sz="2200">
-                <a:solidFill>
-                  <a:srgbClr val="FFFFFF"/>
-                </a:solidFill>
-              </a:rPr>
-              <a:t>- It would be unsurprising to discover that the smaller scale models of current Warehouse C have proportionally more packaging than the somewhat larger models currently occupying Warehouse B.</a:t>
-            </a:r>
-          </a:p>
-          <a:p>
-            <a:pPr algn="l"/>
-            <a:r>
-              <a:rPr sz="2200">
-                <a:solidFill>
-                  <a:srgbClr val="FFFFFF"/>
-                </a:solidFill>
-              </a:rPr>
-              <a:t>- Both Warehouse B and Warehouse C will, in reality, be much larger than the generated volumes which were used to compare warehouse capacities.  Comparing the ratio of (Actual:Estimated) warehouse volume for each warehouse could possibly be used in lieu of ascertaining complete product packaging size information.</a:t>
-            </a:r>
-          </a:p>
-        </p:txBody>
-      </p:sp>
+              <a:t>- Warehouse 'B' has proportionally more One-Day shipping delays than warehouse 'C'.</a:t>
+            </a:r>
+          </a:p>
+          <a:p>
+            <a:pPr algn="l"/>
+            <a:r>
+              <a:rPr sz="2200">
+                <a:solidFill>
+                  <a:srgbClr val="FFFFFF"/>
+                </a:solidFill>
+              </a:rPr>
+              <a:t>- If warehouse 'C' were to be moved into warehouse 'B' then warehouse 'B' must be able to accommodate the extra orders each day.</a:t>
+            </a:r>
+          </a:p>
+          <a:p>
+            <a:pPr algn="l"/>
+            <a:r>
+              <a:rPr sz="2200">
+                <a:solidFill>
+                  <a:srgbClr val="FFFFFF"/>
+                </a:solidFill>
+              </a:rPr>
+              <a:t>- If the One-Day and Two-Day shipping delays associated with warehouse 'B' are the result of order volume, staffing, or warehouse operations efficiency, then these potential bottlenecks should be rectified prior to moving extra inventory into warehouse 'B'.</a:t>
+            </a:r>
+          </a:p>
+        </p:txBody>
+      </p:sp>
+      <p:pic>
+        <p:nvPicPr>
+          <p:cNvPr id="7" name="Picture 6" descr="output_58_0.png"/>
+          <p:cNvPicPr>
+            <a:picLocks noChangeAspect="1"/>
+          </p:cNvPicPr>
+          <p:nvPr/>
+        </p:nvPicPr>
+        <p:blipFill>
+          <a:blip r:embed="rId2"/>
+          <a:stretch>
+            <a:fillRect/>
+          </a:stretch>
+        </p:blipFill>
+        <p:spPr>
+          <a:xfrm>
+            <a:off x="914400" y="914400"/>
+            <a:ext cx="10881360" cy="3520440"/>
+          </a:xfrm>
+          <a:prstGeom prst="rect">
+            <a:avLst/>
+          </a:prstGeom>
+        </p:spPr>
+      </p:pic>
     </p:spTree>
   </p:cSld>
   <p:clrMapOvr>
@@ -1877,7 +1868,7 @@
                   <a:srgbClr val="FFFFFF"/>
                 </a:solidFill>
               </a:rPr>
-              <a:t>Look into the reasons why some items have incredibly low inventory stock</a:t>
+              <a:t>Compare the actual volumes of Warehouse B and Warehouse C against the estimated model</a:t>
             </a:r>
           </a:p>
         </p:txBody>
@@ -1911,29 +1902,29 @@
                   <a:srgbClr val="FFFFFF"/>
                 </a:solidFill>
               </a:rPr>
-              <a:t>- Are any of these items no longer available or difficult to acquire from the manufacturer?</a:t>
-            </a:r>
-          </a:p>
-          <a:p>
-            <a:pPr algn="l"/>
-            <a:r>
-              <a:rPr sz="2200">
-                <a:solidFill>
-                  <a:srgbClr val="FFFFFF"/>
-                </a:solidFill>
-              </a:rPr>
-              <a:t>- If so, consider dropping those products from the Mint Classics products catalogue.</a:t>
-            </a:r>
-          </a:p>
-          <a:p>
-            <a:pPr algn="l"/>
-            <a:r>
-              <a:rPr sz="2200">
-                <a:solidFill>
-                  <a:srgbClr val="FFFFFF"/>
-                </a:solidFill>
-              </a:rPr>
-              <a:t>- This method could be useful in warehouse reorganization more storage volume might be achieved from the same square footage with less individual product codes to keep organized and accessible.</a:t>
+              <a:t>- It is extremely important to remember that the amount of space that any given portion of inventory shall occupy has been estimated here without the spacial burden of the items' packaging.</a:t>
+            </a:r>
+          </a:p>
+          <a:p>
+            <a:pPr algn="l"/>
+            <a:r>
+              <a:rPr sz="2200">
+                <a:solidFill>
+                  <a:srgbClr val="FFFFFF"/>
+                </a:solidFill>
+              </a:rPr>
+              <a:t>- It would be unsurprising to discover that the smaller scale models of current Warehouse C have proportionally more packaging than the somewhat larger models currently occupying Warehouse B.</a:t>
+            </a:r>
+          </a:p>
+          <a:p>
+            <a:pPr algn="l"/>
+            <a:r>
+              <a:rPr sz="2200">
+                <a:solidFill>
+                  <a:srgbClr val="FFFFFF"/>
+                </a:solidFill>
+              </a:rPr>
+              <a:t>- Both Warehouse B and Warehouse C will, in reality, be much larger than the generated volumes which were used to compare warehouse capacities.  Comparing the ratio of (Actual:Estimated) warehouse volume for each warehouse could possibly be used in lieu of ascertaining complete product packaging size information.</a:t>
             </a:r>
           </a:p>
         </p:txBody>
@@ -2113,7 +2104,7 @@
                   <a:srgbClr val="FFFFFF"/>
                 </a:solidFill>
               </a:rPr>
-              <a:t>Consider the ability to handle the logistics of increased shipping from Warehouse B</a:t>
+              <a:t>Look into the reasons why some items have incredibly low inventory stock</a:t>
             </a:r>
           </a:p>
         </p:txBody>
@@ -2147,40 +2138,29 @@
                   <a:srgbClr val="FFFFFF"/>
                 </a:solidFill>
               </a:rPr>
-              <a:t>- At the outset of this analysis, Mint Classics expressed an interest in being able to ship products within 24 hours of receiving a purchase order.</a:t>
-            </a:r>
-          </a:p>
-          <a:p>
-            <a:pPr algn="l"/>
-            <a:r>
-              <a:rPr sz="2200">
-                <a:solidFill>
-                  <a:srgbClr val="FFFFFF"/>
-                </a:solidFill>
-              </a:rPr>
-              <a:t>- The warehouse to which the inventory of the proposed closure would be moved has a higher proportion of 2-3 day delays than the other warehouses.</a:t>
-            </a:r>
-          </a:p>
-          <a:p>
-            <a:pPr algn="l"/>
-            <a:r>
-              <a:rPr sz="2200">
-                <a:solidFill>
-                  <a:srgbClr val="FFFFFF"/>
-                </a:solidFill>
-              </a:rPr>
-              <a:t>- Ensure that warehouse staffing and logistics in Warehouse B will be capable of accommodating the estimated 100 extra line items of orders per day after amalgamation.</a:t>
-            </a:r>
-          </a:p>
-          <a:p>
-            <a:pPr algn="l"/>
-            <a:r>
-              <a:rPr sz="2200">
-                <a:solidFill>
-                  <a:srgbClr val="FFFFFF"/>
-                </a:solidFill>
-              </a:rPr>
-              <a:t>- Condense the existing inventory in Warehouse B creating a completely separate and empty space for the inventory of Warehouse C prior to shutting down Warehouse.</a:t>
+              <a:t>- Are any of these items no longer available or difficult to acquire from the manufacturer?</a:t>
+            </a:r>
+          </a:p>
+          <a:p>
+            <a:pPr algn="l"/>
+            <a:r>
+              <a:rPr sz="2200">
+                <a:solidFill>
+                  <a:srgbClr val="FFFFFF"/>
+                </a:solidFill>
+              </a:rPr>
+              <a:t>- If so, consider dropping those products from the Mint Classics products catalogue.</a:t>
+            </a:r>
+          </a:p>
+          <a:p>
+            <a:pPr algn="l"/>
+            <a:r>
+              <a:rPr sz="2200">
+                <a:solidFill>
+                  <a:srgbClr val="FFFFFF"/>
+                </a:solidFill>
+              </a:rPr>
+              <a:t>- This method could be useful in warehouse reorganization more storage volume might be achieved from the same square footage with less individual product codes to keep organized and accessible.</a:t>
             </a:r>
           </a:p>
         </p:txBody>
@@ -2326,7 +2306,97 @@
                   <a:srgbClr val="FFFFFF"/>
                 </a:solidFill>
               </a:rPr>
-              <a:t>Please feel free to come back with any other more specific questions regarding any aspect of this ongoing project.</a:t>
+              <a:t>Next Steps:</a:t>
+            </a:r>
+          </a:p>
+        </p:txBody>
+      </p:sp>
+      <p:sp>
+        <p:nvSpPr>
+          <p:cNvPr id="5" name="TextBox 4"/>
+          <p:cNvSpPr txBox="1"/>
+          <p:nvPr/>
+        </p:nvSpPr>
+        <p:spPr>
+          <a:xfrm>
+            <a:off x="640080" y="2286000"/>
+            <a:ext cx="8778240" cy="4114800"/>
+          </a:xfrm>
+          <a:prstGeom prst="rect">
+            <a:avLst/>
+          </a:prstGeom>
+          <a:noFill/>
+        </p:spPr>
+        <p:txBody>
+          <a:bodyPr wrap="square">
+            <a:spAutoFit/>
+          </a:bodyPr>
+          <a:lstStyle/>
+          <a:p>
+            <a:pPr algn="l"/>
+            <a:r>
+              <a:rPr sz="2200">
+                <a:solidFill>
+                  <a:srgbClr val="FFFFFF"/>
+                </a:solidFill>
+              </a:rPr>
+              <a:t>Consider the ability to handle the logistics of increased shipping from Warehouse B</a:t>
+            </a:r>
+          </a:p>
+        </p:txBody>
+      </p:sp>
+      <p:sp>
+        <p:nvSpPr>
+          <p:cNvPr id="6" name="TextBox 5"/>
+          <p:cNvSpPr txBox="1"/>
+          <p:nvPr/>
+        </p:nvSpPr>
+        <p:spPr>
+          <a:xfrm>
+            <a:off x="640080" y="2286000"/>
+            <a:ext cx="8778240" cy="4114800"/>
+          </a:xfrm>
+          <a:prstGeom prst="rect">
+            <a:avLst/>
+          </a:prstGeom>
+          <a:noFill/>
+        </p:spPr>
+        <p:txBody>
+          <a:bodyPr wrap="square">
+            <a:spAutoFit/>
+          </a:bodyPr>
+          <a:lstStyle/>
+          <a:p>
+            <a:pPr algn="l"/>
+            <a:r>
+              <a:rPr sz="2200">
+                <a:solidFill>
+                  <a:srgbClr val="FFFFFF"/>
+                </a:solidFill>
+              </a:rPr>
+              <a:t>- At the outset of this analysis, Mint Classics expressed an interest in being able to ship products within 24 hours of receiving a purchase order.</a:t>
+            </a:r>
+          </a:p>
+          <a:p>
+            <a:pPr algn="l"/>
+            <a:r>
+              <a:rPr sz="2200">
+                <a:solidFill>
+                  <a:srgbClr val="FFFFFF"/>
+                </a:solidFill>
+              </a:rPr>
+              <a:t>- The warehouse to which the inventory of the proposed closure would be moved has a higher proportion of 2-3 day delays than the other warehouses.</a:t>
+            </a:r>
+          </a:p>
+          <a:p>
+            <a:pPr algn="l"/>
+            <a:r>
+              <a:rPr sz="2200">
+                <a:solidFill>
+                  <a:srgbClr val="FFFFFF"/>
+                </a:solidFill>
+              </a:rPr>
+              <a:t>- Condense the existing inventory in Warehouse B creating a completely separate and empty space for the inventory of Warehouse C prior to shutting down Warehouse.</a:t>
             </a:r>
           </a:p>
         </p:txBody>
@@ -2357,6 +2427,152 @@
         </p:nvSpPr>
         <p:spPr>
           <a:xfrm>
+            <a:off x="640080" y="685800"/>
+            <a:ext cx="8778240" cy="1371600"/>
+          </a:xfrm>
+          <a:prstGeom prst="rect">
+            <a:avLst/>
+          </a:prstGeom>
+          <a:solidFill>
+            <a:srgbClr val="9B9B9B"/>
+          </a:solidFill>
+          <a:ln w="31750">
+            <a:solidFill>
+              <a:srgbClr val="9B9B9B">
+                <a:lumMod val="85000"/>
+              </a:srgbClr>
+            </a:solidFill>
+          </a:ln>
+        </p:spPr>
+        <p:style>
+          <a:lnRef idx="1">
+            <a:schemeClr val="accent1"/>
+          </a:lnRef>
+          <a:fillRef idx="3">
+            <a:schemeClr val="accent1"/>
+          </a:fillRef>
+          <a:effectRef idx="2">
+            <a:schemeClr val="accent1"/>
+          </a:effectRef>
+          <a:fontRef idx="minor">
+            <a:schemeClr val="lt1"/>
+          </a:fontRef>
+        </p:style>
+        <p:txBody>
+          <a:bodyPr rtlCol="0" anchor="ctr"/>
+          <a:lstStyle/>
+          <a:p>
+            <a:pPr algn="ctr"/>
+          </a:p>
+        </p:txBody>
+      </p:sp>
+      <p:sp>
+        <p:nvSpPr>
+          <p:cNvPr id="3" name="Rectangle 2"/>
+          <p:cNvSpPr/>
+          <p:nvPr/>
+        </p:nvSpPr>
+        <p:spPr>
+          <a:xfrm>
+            <a:off x="640080" y="2286000"/>
+            <a:ext cx="8778240" cy="4114800"/>
+          </a:xfrm>
+          <a:prstGeom prst="rect">
+            <a:avLst/>
+          </a:prstGeom>
+          <a:solidFill>
+            <a:srgbClr val="9B9B9B"/>
+          </a:solidFill>
+          <a:ln w="31750">
+            <a:solidFill>
+              <a:srgbClr val="9B9B9B">
+                <a:lumMod val="85000"/>
+              </a:srgbClr>
+            </a:solidFill>
+          </a:ln>
+        </p:spPr>
+        <p:style>
+          <a:lnRef idx="1">
+            <a:schemeClr val="accent1"/>
+          </a:lnRef>
+          <a:fillRef idx="3">
+            <a:schemeClr val="accent1"/>
+          </a:fillRef>
+          <a:effectRef idx="2">
+            <a:schemeClr val="accent1"/>
+          </a:effectRef>
+          <a:fontRef idx="minor">
+            <a:schemeClr val="lt1"/>
+          </a:fontRef>
+        </p:style>
+        <p:txBody>
+          <a:bodyPr rtlCol="0" anchor="ctr"/>
+          <a:lstStyle/>
+          <a:p>
+            <a:pPr algn="ctr"/>
+          </a:p>
+        </p:txBody>
+      </p:sp>
+      <p:sp>
+        <p:nvSpPr>
+          <p:cNvPr id="4" name="TextBox 3"/>
+          <p:cNvSpPr txBox="1"/>
+          <p:nvPr/>
+        </p:nvSpPr>
+        <p:spPr>
+          <a:xfrm>
+            <a:off x="640080" y="685800"/>
+            <a:ext cx="8778240" cy="1371600"/>
+          </a:xfrm>
+          <a:prstGeom prst="rect">
+            <a:avLst/>
+          </a:prstGeom>
+          <a:noFill/>
+        </p:spPr>
+        <p:txBody>
+          <a:bodyPr wrap="square">
+            <a:spAutoFit/>
+          </a:bodyPr>
+          <a:lstStyle/>
+          <a:p>
+            <a:pPr algn="ctr"/>
+            <a:r>
+              <a:rPr sz="4200">
+                <a:solidFill>
+                  <a:srgbClr val="FFFFFF"/>
+                </a:solidFill>
+              </a:rPr>
+              <a:t>Please feel free to come back with any other more specific questions regarding any aspect of this ongoing project.</a:t>
+            </a:r>
+          </a:p>
+        </p:txBody>
+      </p:sp>
+    </p:spTree>
+  </p:cSld>
+  <p:clrMapOvr>
+    <a:masterClrMapping/>
+  </p:clrMapOvr>
+</p:sld>
+</file>
+
+<file path=ppt/slides/slide17.xml><?xml version="1.0" encoding="utf-8"?>
+<p:sld xmlns:a="http://schemas.openxmlformats.org/drawingml/2006/main" xmlns:p="http://schemas.openxmlformats.org/presentationml/2006/main" xmlns:r="http://schemas.openxmlformats.org/officeDocument/2006/relationships">
+  <p:cSld>
+    <p:spTree>
+      <p:nvGrpSpPr>
+        <p:cNvPr id="1" name=""/>
+        <p:cNvGrpSpPr/>
+        <p:nvPr/>
+      </p:nvGrpSpPr>
+      <p:grpSpPr/>
+      <p:sp>
+        <p:nvSpPr>
+          <p:cNvPr id="2" name="Rectangle 1"/>
+          <p:cNvSpPr/>
+          <p:nvPr/>
+        </p:nvSpPr>
+        <p:spPr>
+          <a:xfrm>
             <a:off x="640080" y="822960"/>
             <a:ext cx="8778240" cy="5029200"/>
           </a:xfrm>
@@ -2627,7 +2843,7 @@
                   <a:srgbClr val="FFFFFF"/>
                 </a:solidFill>
               </a:rPr>
-              <a:t>- The cost of the stock in Warehouse A is comparatively higher than the cost of the stock stored in any of the other warehouses as demonstrated by the 'Investment Value' being 6% higher than the 'Stock Quantity'</a:t>
+              <a:t>- The cost of the stock in Warehouse B is comparatively higher than the cost of the stock stored in any of the other warehouses as demonstrated by the 'Investment Value' being 7% higher than the 'Stock Quantity'</a:t>
             </a:r>
           </a:p>
         </p:txBody>
@@ -2649,7 +2865,7 @@
         <p:spPr>
           <a:xfrm>
             <a:off x="914400" y="914400"/>
-            <a:ext cx="14648688" cy="5952744"/>
+            <a:ext cx="14657832" cy="5916168"/>
           </a:xfrm>
           <a:prstGeom prst="rect">
             <a:avLst/>
@@ -3305,36 +3521,59 @@
                   <a:srgbClr val="FFFFFF"/>
                 </a:solidFill>
               </a:rPr>
-              <a:t>- All warehouses are selling inventory with reasonable distributions.</a:t>
-            </a:r>
-          </a:p>
-          <a:p>
-            <a:pPr algn="l"/>
-            <a:r>
-              <a:rPr sz="2200">
-                <a:solidFill>
-                  <a:srgbClr val="FFFFFF"/>
-                </a:solidFill>
-              </a:rPr>
-              <a:t>- All warehouses contain some products which appear to contain insufficient stock levels based on previous sales.</a:t>
-            </a:r>
-          </a:p>
-          <a:p>
-            <a:pPr algn="l"/>
-            <a:r>
-              <a:rPr sz="2200">
-                <a:solidFill>
-                  <a:srgbClr val="FFFFFF"/>
-                </a:solidFill>
-              </a:rPr>
-              <a:t>- Depending on the reasons behind the low inventory of certain products it may be advisable to discontinue those particular products.</a:t>
+              <a:t>Notice that there have been ZERO sales for product S18_3233</a:t>
+            </a:r>
+          </a:p>
+        </p:txBody>
+      </p:sp>
+      <p:sp>
+        <p:nvSpPr>
+          <p:cNvPr id="6" name="TextBox 5"/>
+          <p:cNvSpPr txBox="1"/>
+          <p:nvPr/>
+        </p:nvSpPr>
+        <p:spPr>
+          <a:xfrm>
+            <a:off x="640080" y="2286000"/>
+            <a:ext cx="8778240" cy="4114800"/>
+          </a:xfrm>
+          <a:prstGeom prst="rect">
+            <a:avLst/>
+          </a:prstGeom>
+          <a:noFill/>
+        </p:spPr>
+        <p:txBody>
+          <a:bodyPr wrap="square">
+            <a:spAutoFit/>
+          </a:bodyPr>
+          <a:lstStyle/>
+          <a:p>
+            <a:pPr algn="l"/>
+            <a:r>
+              <a:rPr sz="2200">
+                <a:solidFill>
+                  <a:srgbClr val="FFFFFF"/>
+                </a:solidFill>
+              </a:rPr>
+              <a:t>- Product S18_3233 is a 1885 Toyota Supra by Highway 66 Mini Classics.</a:t>
+            </a:r>
+          </a:p>
+          <a:p>
+            <a:pPr algn="l"/>
+            <a:r>
+              <a:rPr sz="2200">
+                <a:solidFill>
+                  <a:srgbClr val="FFFFFF"/>
+                </a:solidFill>
+              </a:rPr>
+              <a:t>- This SKU should definately be considered for discontinuation.</a:t>
             </a:r>
           </a:p>
         </p:txBody>
       </p:sp>
       <p:pic>
         <p:nvPicPr>
-          <p:cNvPr id="6" name="Picture 5" descr="output_29_0.png"/>
+          <p:cNvPr id="7" name="Picture 6" descr="table_0.png"/>
           <p:cNvPicPr>
             <a:picLocks noChangeAspect="1"/>
           </p:cNvPicPr>
@@ -3349,7 +3588,7 @@
         <p:spPr>
           <a:xfrm>
             <a:off x="914400" y="914400"/>
-            <a:ext cx="10954512" cy="3776472"/>
+            <a:ext cx="7022592" cy="3561588"/>
           </a:xfrm>
           <a:prstGeom prst="rect">
             <a:avLst/>
@@ -3497,7 +3736,7 @@
                   <a:srgbClr val="FFFFFF"/>
                 </a:solidFill>
               </a:rPr>
-              <a:t>Check Low-Stock by Manufacturer</a:t>
+              <a:t>Sort Products by Warehouse (Cont'd)</a:t>
             </a:r>
           </a:p>
         </p:txBody>
@@ -3531,36 +3770,36 @@
                   <a:srgbClr val="FFFFFF"/>
                 </a:solidFill>
               </a:rPr>
-              <a:t>- Check for low stock by the current investment in inventory by product code.</a:t>
-            </a:r>
-          </a:p>
-          <a:p>
-            <a:pPr algn="l"/>
-            <a:r>
-              <a:rPr sz="2200">
-                <a:solidFill>
-                  <a:srgbClr val="FFFFFF"/>
-                </a:solidFill>
-              </a:rPr>
-              <a:t>- Inspect whether there is any correlation between low-stock items and any particular manufacturer.</a:t>
-            </a:r>
-          </a:p>
-          <a:p>
-            <a:pPr algn="l"/>
-            <a:r>
-              <a:rPr sz="2200">
-                <a:solidFill>
-                  <a:srgbClr val="FFFFFF"/>
-                </a:solidFill>
-              </a:rPr>
-              <a:t>- Seven out of 13 product vendors are represented in the Top10 lowest inventory query.</a:t>
+              <a:t>- All warehouses are selling inventory with reasonable distributions.</a:t>
+            </a:r>
+          </a:p>
+          <a:p>
+            <a:pPr algn="l"/>
+            <a:r>
+              <a:rPr sz="2200">
+                <a:solidFill>
+                  <a:srgbClr val="FFFFFF"/>
+                </a:solidFill>
+              </a:rPr>
+              <a:t>- All warehouses contain some products which appear to contain insufficient stock levels based on previous sales.</a:t>
+            </a:r>
+          </a:p>
+          <a:p>
+            <a:pPr algn="l"/>
+            <a:r>
+              <a:rPr sz="2200">
+                <a:solidFill>
+                  <a:srgbClr val="FFFFFF"/>
+                </a:solidFill>
+              </a:rPr>
+              <a:t>- Depending on the reasons behind the low inventory of certain products it may be advisable to discontinue those particular products.</a:t>
             </a:r>
           </a:p>
         </p:txBody>
       </p:sp>
       <p:pic>
         <p:nvPicPr>
-          <p:cNvPr id="6" name="Picture 5" descr="table_0.png"/>
+          <p:cNvPr id="6" name="Picture 5" descr="output_30_0.png"/>
           <p:cNvPicPr>
             <a:picLocks noChangeAspect="1"/>
           </p:cNvPicPr>
@@ -3575,7 +3814,7 @@
         <p:spPr>
           <a:xfrm>
             <a:off x="914400" y="914400"/>
-            <a:ext cx="6021324" cy="3561588"/>
+            <a:ext cx="10954512" cy="3776472"/>
           </a:xfrm>
           <a:prstGeom prst="rect">
             <a:avLst/>
@@ -3723,7 +3962,7 @@
                   <a:srgbClr val="FFFFFF"/>
                 </a:solidFill>
               </a:rPr>
-              <a:t>Reinspect the Overhead Graphs Sorted by Product Vendor</a:t>
+              <a:t>Check Low-Stock by Manufacturer</a:t>
             </a:r>
           </a:p>
         </p:txBody>
@@ -3757,36 +3996,36 @@
                   <a:srgbClr val="FFFFFF"/>
                 </a:solidFill>
               </a:rPr>
-              <a:t>- Clearly now, issues regarding low-stock inventory are with respect to individual products and not the fault of any single supplier.</a:t>
-            </a:r>
-          </a:p>
-          <a:p>
-            <a:pPr algn="l"/>
-            <a:r>
-              <a:rPr sz="2200">
-                <a:solidFill>
-                  <a:srgbClr val="FFFFFF"/>
-                </a:solidFill>
-              </a:rPr>
-              <a:t>- Low stock levels are not directly correlated to high sales volumes in most cases.</a:t>
-            </a:r>
-          </a:p>
-          <a:p>
-            <a:pPr algn="l"/>
-            <a:r>
-              <a:rPr sz="2200">
-                <a:solidFill>
-                  <a:srgbClr val="FFFFFF"/>
-                </a:solidFill>
-              </a:rPr>
-              <a:t>- The dataset lacks the necessary product supply information required to investigate any further at this time.</a:t>
+              <a:t>- Check for low stock by the current investment in inventory by product code.</a:t>
+            </a:r>
+          </a:p>
+          <a:p>
+            <a:pPr algn="l"/>
+            <a:r>
+              <a:rPr sz="2200">
+                <a:solidFill>
+                  <a:srgbClr val="FFFFFF"/>
+                </a:solidFill>
+              </a:rPr>
+              <a:t>- Inspect whether there is any correlation between low-stock items and any particular manufacturer.</a:t>
+            </a:r>
+          </a:p>
+          <a:p>
+            <a:pPr algn="l"/>
+            <a:r>
+              <a:rPr sz="2200">
+                <a:solidFill>
+                  <a:srgbClr val="FFFFFF"/>
+                </a:solidFill>
+              </a:rPr>
+              <a:t>- Seven out of 13 product vendors are represented in the Top10 lowest inventory query.</a:t>
             </a:r>
           </a:p>
         </p:txBody>
       </p:sp>
       <p:pic>
         <p:nvPicPr>
-          <p:cNvPr id="6" name="Picture 5" descr="output_36_0.png"/>
+          <p:cNvPr id="6" name="Picture 5" descr="table_1.png"/>
           <p:cNvPicPr>
             <a:picLocks noChangeAspect="1"/>
           </p:cNvPicPr>
@@ -3801,7 +4040,7 @@
         <p:spPr>
           <a:xfrm>
             <a:off x="914400" y="914400"/>
-            <a:ext cx="11000232" cy="5641848"/>
+            <a:ext cx="6021324" cy="3561588"/>
           </a:xfrm>
           <a:prstGeom prst="rect">
             <a:avLst/>
@@ -3949,7 +4188,7 @@
                   <a:srgbClr val="FFFFFF"/>
                 </a:solidFill>
               </a:rPr>
-              <a:t>Check Warehouse Volumes</a:t>
+              <a:t>Reinspect the Overhead Graphs Sorted by Product Vendor</a:t>
             </a:r>
           </a:p>
         </p:txBody>
@@ -3983,47 +4222,36 @@
                   <a:srgbClr val="FFFFFF"/>
                 </a:solidFill>
               </a:rPr>
-              <a:t>- Actual packaging volume information was not available.</a:t>
-            </a:r>
-          </a:p>
-          <a:p>
-            <a:pPr algn="l"/>
-            <a:r>
-              <a:rPr sz="2200">
-                <a:solidFill>
-                  <a:srgbClr val="FFFFFF"/>
-                </a:solidFill>
-              </a:rPr>
-              <a:t>- A list of the approximate product volumes has been generated based on product names and scale for the purpose of analysis.</a:t>
-            </a:r>
-          </a:p>
-          <a:p>
-            <a:pPr algn="l"/>
-            <a:r>
-              <a:rPr sz="2200">
-                <a:solidFill>
-                  <a:srgbClr val="FFFFFF"/>
-                </a:solidFill>
-              </a:rPr>
-              <a:t>- The largest warehouse, Warehouse B, shows enough space remaining to hold the stock from either Warehouse C or Warehouse D.</a:t>
-            </a:r>
-          </a:p>
-          <a:p>
-            <a:pPr algn="l"/>
-            <a:r>
-              <a:rPr sz="2200">
-                <a:solidFill>
-                  <a:srgbClr val="FFFFFF"/>
-                </a:solidFill>
-              </a:rPr>
-              <a:t>- Considering that Warehouse C is half-empty, this may a good candidate for closure.</a:t>
+              <a:t>- Clearly now, issues regarding low-stock inventory are with respect to individual products and not the fault of any single supplier.</a:t>
+            </a:r>
+          </a:p>
+          <a:p>
+            <a:pPr algn="l"/>
+            <a:r>
+              <a:rPr sz="2200">
+                <a:solidFill>
+                  <a:srgbClr val="FFFFFF"/>
+                </a:solidFill>
+              </a:rPr>
+              <a:t>- Low stock levels are not directly correlated to high sales volumes in most cases.</a:t>
+            </a:r>
+          </a:p>
+          <a:p>
+            <a:pPr algn="l"/>
+            <a:r>
+              <a:rPr sz="2200">
+                <a:solidFill>
+                  <a:srgbClr val="FFFFFF"/>
+                </a:solidFill>
+              </a:rPr>
+              <a:t>- The dataset lacks the necessary product supply information required to investigate any further at this time.</a:t>
             </a:r>
           </a:p>
         </p:txBody>
       </p:sp>
       <p:pic>
         <p:nvPicPr>
-          <p:cNvPr id="6" name="Picture 5" descr="output_43_0.png"/>
+          <p:cNvPr id="6" name="Picture 5" descr="output_37_0.png"/>
           <p:cNvPicPr>
             <a:picLocks noChangeAspect="1"/>
           </p:cNvPicPr>
@@ -4038,7 +4266,7 @@
         <p:spPr>
           <a:xfrm>
             <a:off x="914400" y="914400"/>
-            <a:ext cx="9052560" cy="4480560"/>
+            <a:ext cx="10954512" cy="5641848"/>
           </a:xfrm>
           <a:prstGeom prst="rect">
             <a:avLst/>
@@ -4186,7 +4414,7 @@
                   <a:srgbClr val="FFFFFF"/>
                 </a:solidFill>
               </a:rPr>
-              <a:t>Check the Warehouse Contents</a:t>
+              <a:t>Check Warehouse Volumes</a:t>
             </a:r>
           </a:p>
         </p:txBody>
@@ -4220,36 +4448,47 @@
                   <a:srgbClr val="FFFFFF"/>
                 </a:solidFill>
               </a:rPr>
-              <a:t>- It can be seen that the large warehouse "B" contains only 'Classic Cars'.</a:t>
-            </a:r>
-          </a:p>
-          <a:p>
-            <a:pPr algn="l"/>
-            <a:r>
-              <a:rPr sz="2200">
-                <a:solidFill>
-                  <a:srgbClr val="FFFFFF"/>
-                </a:solidFill>
-              </a:rPr>
-              <a:t>- The warehouse which is a candidate for closure, "C", contains only 'Vintage Cars'.</a:t>
-            </a:r>
-          </a:p>
-          <a:p>
-            <a:pPr algn="l"/>
-            <a:r>
-              <a:rPr sz="2200">
-                <a:solidFill>
-                  <a:srgbClr val="FFFFFF"/>
-                </a:solidFill>
-              </a:rPr>
-              <a:t>- Merging the contents of warehouses B and C would allow for the full stock of 'Cars' to be housed in a single location.</a:t>
+              <a:t>- Actual packaging volume information was not available.</a:t>
+            </a:r>
+          </a:p>
+          <a:p>
+            <a:pPr algn="l"/>
+            <a:r>
+              <a:rPr sz="2200">
+                <a:solidFill>
+                  <a:srgbClr val="FFFFFF"/>
+                </a:solidFill>
+              </a:rPr>
+              <a:t>- A list of the approximate product volumes has been generated based on product names and scale for the purpose of analysis.</a:t>
+            </a:r>
+          </a:p>
+          <a:p>
+            <a:pPr algn="l"/>
+            <a:r>
+              <a:rPr sz="2200">
+                <a:solidFill>
+                  <a:srgbClr val="FFFFFF"/>
+                </a:solidFill>
+              </a:rPr>
+              <a:t>- The largest warehouse, Warehouse B, shows enough space remaining to hold the stock from either Warehouse C or Warehouse D.</a:t>
+            </a:r>
+          </a:p>
+          <a:p>
+            <a:pPr algn="l"/>
+            <a:r>
+              <a:rPr sz="2200">
+                <a:solidFill>
+                  <a:srgbClr val="FFFFFF"/>
+                </a:solidFill>
+              </a:rPr>
+              <a:t>- Considering that Warehouse C is half-empty, this may a good candidate for closure.</a:t>
             </a:r>
           </a:p>
         </p:txBody>
       </p:sp>
       <p:pic>
         <p:nvPicPr>
-          <p:cNvPr id="6" name="Picture 5" descr="table_1.png"/>
+          <p:cNvPr id="6" name="Picture 5" descr="output_44_0.png"/>
           <p:cNvPicPr>
             <a:picLocks noChangeAspect="1"/>
           </p:cNvPicPr>
@@ -4264,7 +4503,7 @@
         <p:spPr>
           <a:xfrm>
             <a:off x="914400" y="914400"/>
-            <a:ext cx="6752844" cy="3561588"/>
+            <a:ext cx="9052560" cy="4480560"/>
           </a:xfrm>
           <a:prstGeom prst="rect">
             <a:avLst/>

--- a/Course#10/MintClassics.pptx
+++ b/Course#10/MintClassics.pptx
@@ -32,7 +32,6 @@
     <p:sldId id="279" r:id="rId27"/>
     <p:sldId id="280" r:id="rId28"/>
     <p:sldId id="281" r:id="rId29"/>
-    <p:sldId id="282" r:id="rId30"/>
   </p:sldIdLst>
   <p:sldSz cx="10080625" cy="7559675"/>
   <p:notesSz cx="7559675" cy="10691813"/>
@@ -170,7 +169,7 @@
         <p:txBody>
           <a:bodyPr/>
           <a:p>
-            <a:fld id="{AD8A186F-0832-4C21-8C79-74C970891F5E}" type="slidenum">
+            <a:fld id="{5DE032C1-56C5-4C5C-917D-583EEC98F5CB}" type="slidenum">
               <a:t>&lt;#&gt;</a:t>
             </a:fld>
           </a:p>
@@ -253,7 +252,7 @@
         <p:txBody>
           <a:bodyPr/>
           <a:p>
-            <a:fld id="{DFCB3B32-4DC1-4EE9-8BBC-A955D328C413}" type="slidenum">
+            <a:fld id="{E39399ED-9EAA-4039-BA34-3284BD897746}" type="slidenum">
               <a:t>&lt;#&gt;</a:t>
             </a:fld>
           </a:p>
@@ -333,7 +332,7 @@
         <p:spPr>
           <a:xfrm>
             <a:off x="8780400" y="6543720"/>
-            <a:ext cx="938880" cy="655560"/>
+            <a:ext cx="938520" cy="655200"/>
           </a:xfrm>
           <a:prstGeom prst="rect">
             <a:avLst/>
@@ -342,7 +341,7 @@
             <a:noFill/>
           </a:ln>
           <a:effectLst>
-            <a:outerShdw dist="80498" dir="9206096" blurRad="101520" rotWithShape="0">
+            <a:outerShdw blurRad="101520" dir="9206096" dist="80498" rotWithShape="0">
               <a:srgbClr val="333333">
                 <a:alpha val="65000"/>
               </a:srgbClr>
@@ -363,7 +362,7 @@
         <p:spPr>
           <a:xfrm>
             <a:off x="504000" y="301320"/>
-            <a:ext cx="9070920" cy="1261080"/>
+            <a:ext cx="9071640" cy="1261440"/>
           </a:xfrm>
           <a:prstGeom prst="rect">
             <a:avLst/>
@@ -412,7 +411,7 @@
         <p:spPr>
           <a:xfrm>
             <a:off x="3447360" y="6886800"/>
-            <a:ext cx="3194280" cy="520200"/>
+            <a:ext cx="3193920" cy="519840"/>
           </a:xfrm>
           <a:prstGeom prst="rect">
             <a:avLst/>
@@ -484,7 +483,7 @@
         <p:spPr>
           <a:xfrm>
             <a:off x="7227360" y="6886800"/>
-            <a:ext cx="2347560" cy="520200"/>
+            <a:ext cx="2347200" cy="519840"/>
           </a:xfrm>
           <a:prstGeom prst="rect">
             <a:avLst/>
@@ -525,7 +524,7 @@
                 <a:tab algn="l" pos="0"/>
               </a:tabLst>
             </a:pPr>
-            <a:fld id="{306C3933-A330-4635-80BF-1A518C96B099}" type="slidenum">
+            <a:fld id="{C46B6D77-78F8-487C-9A13-FC0B82BD306B}" type="slidenum">
               <a:rPr b="0" lang="en-CA" sz="1400" spc="-1" strike="noStrike">
                 <a:solidFill>
                   <a:srgbClr val="000000"/>
@@ -556,7 +555,7 @@
         <p:spPr>
           <a:xfrm>
             <a:off x="504000" y="6886800"/>
-            <a:ext cx="2347560" cy="520200"/>
+            <a:ext cx="2347200" cy="519840"/>
           </a:xfrm>
           <a:prstGeom prst="rect">
             <a:avLst/>
@@ -660,7 +659,7 @@
         <p:spPr>
           <a:xfrm>
             <a:off x="8780400" y="6543720"/>
-            <a:ext cx="938880" cy="655560"/>
+            <a:ext cx="938520" cy="655200"/>
           </a:xfrm>
           <a:prstGeom prst="rect">
             <a:avLst/>
@@ -669,7 +668,7 @@
             <a:noFill/>
           </a:ln>
           <a:effectLst>
-            <a:outerShdw dist="80498" dir="9206096" blurRad="101520" rotWithShape="0">
+            <a:outerShdw blurRad="101520" dir="9206096" dist="80498" rotWithShape="0">
               <a:srgbClr val="333333">
                 <a:alpha val="65000"/>
               </a:srgbClr>
@@ -690,7 +689,7 @@
         <p:spPr>
           <a:xfrm>
             <a:off x="3447360" y="6886800"/>
-            <a:ext cx="3194280" cy="520200"/>
+            <a:ext cx="3193920" cy="519840"/>
           </a:xfrm>
           <a:prstGeom prst="rect">
             <a:avLst/>
@@ -762,7 +761,7 @@
         <p:spPr>
           <a:xfrm>
             <a:off x="7227360" y="6886800"/>
-            <a:ext cx="2347560" cy="520200"/>
+            <a:ext cx="2347200" cy="519840"/>
           </a:xfrm>
           <a:prstGeom prst="rect">
             <a:avLst/>
@@ -803,7 +802,7 @@
                 <a:tab algn="l" pos="0"/>
               </a:tabLst>
             </a:pPr>
-            <a:fld id="{811270E5-A65D-47B5-A748-E36A11BD1D25}" type="slidenum">
+            <a:fld id="{5E17609B-C6AD-4B75-A54A-84779E04B44E}" type="slidenum">
               <a:rPr b="0" lang="en-CA" sz="1400" spc="-1" strike="noStrike">
                 <a:solidFill>
                   <a:srgbClr val="000000"/>
@@ -834,7 +833,7 @@
         <p:spPr>
           <a:xfrm>
             <a:off x="504000" y="6886800"/>
-            <a:ext cx="2347560" cy="520200"/>
+            <a:ext cx="2347200" cy="519840"/>
           </a:xfrm>
           <a:prstGeom prst="rect">
             <a:avLst/>
@@ -1190,7 +1189,7 @@
         <p:spPr>
           <a:xfrm>
             <a:off x="640080" y="685800"/>
-            <a:ext cx="8777880" cy="1371240"/>
+            <a:ext cx="8777520" cy="1370880"/>
           </a:xfrm>
           <a:prstGeom prst="rect">
             <a:avLst/>
@@ -1204,7 +1203,7 @@
             </a:solidFill>
           </a:ln>
           <a:effectLst>
-            <a:outerShdw dist="50911" dir="8100000" blurRad="101520" rotWithShape="0">
+            <a:outerShdw blurRad="101520" dir="8100000" dist="50402" rotWithShape="0">
               <a:srgbClr val="666666">
                 <a:alpha val="65000"/>
               </a:srgbClr>
@@ -1252,7 +1251,7 @@
         <p:spPr>
           <a:xfrm>
             <a:off x="640080" y="685800"/>
-            <a:ext cx="8777880" cy="1369800"/>
+            <a:ext cx="8777520" cy="1369800"/>
           </a:xfrm>
           <a:prstGeom prst="rect">
             <a:avLst/>
@@ -1262,7 +1261,7 @@
             <a:noFill/>
           </a:ln>
           <a:effectLst>
-            <a:outerShdw dist="50911" dir="8100000" blurRad="101520" rotWithShape="0">
+            <a:outerShdw blurRad="101520" dir="8100000" dist="50402" rotWithShape="0">
               <a:srgbClr val="666666">
                 <a:alpha val="65000"/>
               </a:srgbClr>
@@ -1291,6 +1290,7 @@
                   <a:srgbClr val="ffffff"/>
                 </a:solidFill>
                 <a:latin typeface="Arial"/>
+                <a:ea typeface="DejaVu Sans"/>
               </a:rPr>
               <a:t>Mint Classics Warehouse Elimination Study</a:t>
             </a:r>
@@ -1316,7 +1316,7 @@
         <p:spPr>
           <a:xfrm>
             <a:off x="1709280" y="2340000"/>
-            <a:ext cx="6750720" cy="4500000"/>
+            <a:ext cx="6750360" cy="4499640"/>
           </a:xfrm>
           <a:prstGeom prst="rect">
             <a:avLst/>
@@ -1325,7 +1325,7 @@
             <a:noFill/>
           </a:ln>
           <a:effectLst>
-            <a:outerShdw dist="80498" dir="9206096" blurRad="101520" rotWithShape="0">
+            <a:outerShdw blurRad="101520" dir="9206096" dist="80498" rotWithShape="0">
               <a:srgbClr val="333333">
                 <a:alpha val="65000"/>
               </a:srgbClr>
@@ -1372,7 +1372,7 @@
         <p:spPr>
           <a:xfrm>
             <a:off x="640080" y="685800"/>
-            <a:ext cx="8777880" cy="1371240"/>
+            <a:ext cx="8777520" cy="1370880"/>
           </a:xfrm>
           <a:prstGeom prst="rect">
             <a:avLst/>
@@ -1386,7 +1386,7 @@
             </a:solidFill>
           </a:ln>
           <a:effectLst>
-            <a:outerShdw dist="50911" dir="8100000" blurRad="101520" rotWithShape="0">
+            <a:outerShdw blurRad="101520" dir="8100000" dist="50402" rotWithShape="0">
               <a:srgbClr val="666666">
                 <a:alpha val="65000"/>
               </a:srgbClr>
@@ -1410,6 +1410,11 @@
             <a:noAutofit/>
           </a:bodyPr>
           <a:p>
+            <a:pPr>
+              <a:lnSpc>
+                <a:spcPct val="100000"/>
+              </a:lnSpc>
+            </a:pPr>
             <a:endParaRPr b="0" lang="en-CA" sz="1800" spc="-1" strike="noStrike">
               <a:solidFill>
                 <a:schemeClr val="lt1"/>
@@ -1429,7 +1434,7 @@
         <p:spPr>
           <a:xfrm>
             <a:off x="640080" y="2286000"/>
-            <a:ext cx="8777880" cy="4114440"/>
+            <a:ext cx="8777520" cy="4114080"/>
           </a:xfrm>
           <a:prstGeom prst="rect">
             <a:avLst/>
@@ -1443,7 +1448,7 @@
             </a:solidFill>
           </a:ln>
           <a:effectLst>
-            <a:outerShdw dist="50911" dir="8100000" blurRad="101520" rotWithShape="0">
+            <a:outerShdw blurRad="101520" dir="8100000" dist="50402" rotWithShape="0">
               <a:srgbClr val="666666">
                 <a:alpha val="65000"/>
               </a:srgbClr>
@@ -1467,6 +1472,11 @@
             <a:noAutofit/>
           </a:bodyPr>
           <a:p>
+            <a:pPr>
+              <a:lnSpc>
+                <a:spcPct val="100000"/>
+              </a:lnSpc>
+            </a:pPr>
             <a:endParaRPr b="0" lang="en-CA" sz="1800" spc="-1" strike="noStrike">
               <a:solidFill>
                 <a:schemeClr val="lt1"/>
@@ -1486,7 +1496,7 @@
         <p:spPr>
           <a:xfrm>
             <a:off x="654480" y="978840"/>
-            <a:ext cx="8777880" cy="729720"/>
+            <a:ext cx="8777520" cy="729720"/>
           </a:xfrm>
           <a:prstGeom prst="rect">
             <a:avLst/>
@@ -1496,7 +1506,7 @@
             <a:noFill/>
           </a:ln>
           <a:effectLst>
-            <a:outerShdw dist="50911" dir="8100000" blurRad="101520" rotWithShape="0">
+            <a:outerShdw blurRad="101520" dir="8100000" dist="50402" rotWithShape="0">
               <a:srgbClr val="666666">
                 <a:alpha val="65000"/>
               </a:srgbClr>
@@ -1525,6 +1535,7 @@
                   <a:srgbClr val="ffffff"/>
                 </a:solidFill>
                 <a:latin typeface="Arial"/>
+                <a:ea typeface="DejaVu Sans"/>
               </a:rPr>
               <a:t>Check Low-Stock by Manufacturer</a:t>
             </a:r>
@@ -1546,7 +1557,7 @@
         <p:spPr>
           <a:xfrm>
             <a:off x="640080" y="2286000"/>
-            <a:ext cx="8777880" cy="1477080"/>
+            <a:ext cx="8777520" cy="1476360"/>
           </a:xfrm>
           <a:prstGeom prst="rect">
             <a:avLst/>
@@ -1556,7 +1567,7 @@
             <a:noFill/>
           </a:ln>
           <a:effectLst>
-            <a:outerShdw dist="50911" dir="8100000" blurRad="101520" rotWithShape="0">
+            <a:outerShdw blurRad="101520" dir="8100000" dist="50402" rotWithShape="0">
               <a:srgbClr val="666666">
                 <a:alpha val="65000"/>
               </a:srgbClr>
@@ -1585,6 +1596,7 @@
                   <a:srgbClr val="ffffff"/>
                 </a:solidFill>
                 <a:latin typeface="Arial"/>
+                <a:ea typeface="DejaVu Sans"/>
               </a:rPr>
               <a:t>-</a:t>
             </a:r>
@@ -1594,61 +1606,45 @@
                   <a:srgbClr val="ffffff"/>
                 </a:solidFill>
                 <a:latin typeface="Arial"/>
+                <a:ea typeface="DejaVu Sans"/>
               </a:rPr>
-              <a:t> Check for low stock by the current investment in inventory by </a:t>
+              <a:t> Check for low stock by the current investment in inventory by product code.</a:t>
             </a:r>
+            <a:endParaRPr b="0" lang="en-CA" sz="2100" spc="-1" strike="noStrike">
+              <a:solidFill>
+                <a:srgbClr val="000000"/>
+              </a:solidFill>
+              <a:latin typeface="Arial"/>
+            </a:endParaRPr>
+          </a:p>
+          <a:p>
+            <a:pPr>
+              <a:lnSpc>
+                <a:spcPct val="100000"/>
+              </a:lnSpc>
+            </a:pPr>
+            <a:endParaRPr b="0" lang="en-CA" sz="600" spc="-1" strike="noStrike">
+              <a:solidFill>
+                <a:srgbClr val="000000"/>
+              </a:solidFill>
+              <a:latin typeface="Arial"/>
+            </a:endParaRPr>
+          </a:p>
+          <a:p>
+            <a:pPr>
+              <a:lnSpc>
+                <a:spcPct val="100000"/>
+              </a:lnSpc>
+            </a:pPr>
             <a:r>
               <a:rPr b="0" lang="en-CA" sz="2100" spc="-1" strike="noStrike">
                 <a:solidFill>
                   <a:srgbClr val="ffffff"/>
                 </a:solidFill>
                 <a:latin typeface="Arial"/>
+                <a:ea typeface="DejaVu Sans"/>
               </a:rPr>
-              <a:t>product code.</a:t>
-            </a:r>
-            <a:endParaRPr b="0" lang="en-CA" sz="2100" spc="-1" strike="noStrike">
-              <a:solidFill>
-                <a:srgbClr val="000000"/>
-              </a:solidFill>
-              <a:latin typeface="Arial"/>
-            </a:endParaRPr>
-          </a:p>
-          <a:p>
-            <a:pPr>
-              <a:lnSpc>
-                <a:spcPct val="100000"/>
-              </a:lnSpc>
-            </a:pPr>
-            <a:endParaRPr b="0" lang="en-CA" sz="600" spc="-1" strike="noStrike">
-              <a:solidFill>
-                <a:srgbClr val="000000"/>
-              </a:solidFill>
-              <a:latin typeface="Arial"/>
-            </a:endParaRPr>
-          </a:p>
-          <a:p>
-            <a:pPr>
-              <a:lnSpc>
-                <a:spcPct val="100000"/>
-              </a:lnSpc>
-            </a:pPr>
-            <a:r>
-              <a:rPr b="0" lang="en-CA" sz="2100" spc="-1" strike="noStrike">
-                <a:solidFill>
-                  <a:srgbClr val="ffffff"/>
-                </a:solidFill>
-                <a:latin typeface="Arial"/>
-              </a:rPr>
-              <a:t>- Inspect whether there is any correlation between low-stock items </a:t>
-            </a:r>
-            <a:r>
-              <a:rPr b="0" lang="en-CA" sz="2100" spc="-1" strike="noStrike">
-                <a:solidFill>
-                  <a:srgbClr val="ffffff"/>
-                </a:solidFill>
-                <a:latin typeface="Arial"/>
-              </a:rPr>
-              <a:t>and any particular manufacturer.</a:t>
+              <a:t>- Inspect whether there is any correlation between low-stock items and any particular manufacturer.</a:t>
             </a:r>
             <a:endParaRPr b="0" lang="en-CA" sz="2100" spc="-1" strike="noStrike">
               <a:solidFill>
@@ -1673,7 +1669,7 @@
         <p:spPr>
           <a:xfrm>
             <a:off x="2079000" y="3960360"/>
-            <a:ext cx="6021000" cy="2159640"/>
+            <a:ext cx="6020640" cy="2159280"/>
           </a:xfrm>
           <a:prstGeom prst="rect">
             <a:avLst/>
@@ -1682,7 +1678,7 @@
             <a:noFill/>
           </a:ln>
           <a:effectLst>
-            <a:outerShdw dist="80498" dir="9206096" blurRad="101520" rotWithShape="0">
+            <a:outerShdw blurRad="101520" dir="9206096" dist="80498" rotWithShape="0">
               <a:srgbClr val="333333">
                 <a:alpha val="65000"/>
               </a:srgbClr>
@@ -1729,7 +1725,7 @@
         <p:spPr>
           <a:xfrm>
             <a:off x="640080" y="685800"/>
-            <a:ext cx="8777880" cy="1371240"/>
+            <a:ext cx="8777520" cy="1370880"/>
           </a:xfrm>
           <a:prstGeom prst="rect">
             <a:avLst/>
@@ -1743,7 +1739,7 @@
             </a:solidFill>
           </a:ln>
           <a:effectLst>
-            <a:outerShdw dist="50911" dir="8100000" blurRad="101520" rotWithShape="0">
+            <a:outerShdw blurRad="101520" dir="8100000" dist="50402" rotWithShape="0">
               <a:srgbClr val="666666">
                 <a:alpha val="65000"/>
               </a:srgbClr>
@@ -1767,6 +1763,11 @@
             <a:noAutofit/>
           </a:bodyPr>
           <a:p>
+            <a:pPr>
+              <a:lnSpc>
+                <a:spcPct val="100000"/>
+              </a:lnSpc>
+            </a:pPr>
             <a:endParaRPr b="0" lang="en-CA" sz="1800" spc="-1" strike="noStrike">
               <a:solidFill>
                 <a:schemeClr val="lt1"/>
@@ -1786,7 +1787,7 @@
         <p:spPr>
           <a:xfrm>
             <a:off x="640080" y="2286000"/>
-            <a:ext cx="8777880" cy="4114440"/>
+            <a:ext cx="8777520" cy="4114080"/>
           </a:xfrm>
           <a:prstGeom prst="rect">
             <a:avLst/>
@@ -1800,7 +1801,7 @@
             </a:solidFill>
           </a:ln>
           <a:effectLst>
-            <a:outerShdw dist="50911" dir="8100000" blurRad="101520" rotWithShape="0">
+            <a:outerShdw blurRad="101520" dir="8100000" dist="50402" rotWithShape="0">
               <a:srgbClr val="666666">
                 <a:alpha val="65000"/>
               </a:srgbClr>
@@ -1824,6 +1825,11 @@
             <a:noAutofit/>
           </a:bodyPr>
           <a:p>
+            <a:pPr>
+              <a:lnSpc>
+                <a:spcPct val="100000"/>
+              </a:lnSpc>
+            </a:pPr>
             <a:endParaRPr b="0" lang="en-CA" sz="1800" spc="-1" strike="noStrike">
               <a:solidFill>
                 <a:schemeClr val="lt1"/>
@@ -1843,7 +1849,7 @@
         <p:spPr>
           <a:xfrm>
             <a:off x="654480" y="978840"/>
-            <a:ext cx="8777880" cy="729720"/>
+            <a:ext cx="8777520" cy="729720"/>
           </a:xfrm>
           <a:prstGeom prst="rect">
             <a:avLst/>
@@ -1853,7 +1859,7 @@
             <a:noFill/>
           </a:ln>
           <a:effectLst>
-            <a:outerShdw dist="50911" dir="8100000" blurRad="101520" rotWithShape="0">
+            <a:outerShdw blurRad="101520" dir="8100000" dist="50402" rotWithShape="0">
               <a:srgbClr val="666666">
                 <a:alpha val="65000"/>
               </a:srgbClr>
@@ -1882,6 +1888,7 @@
                   <a:srgbClr val="ffffff"/>
                 </a:solidFill>
                 <a:latin typeface="Arial"/>
+                <a:ea typeface="DejaVu Sans"/>
               </a:rPr>
               <a:t>Check Low-Stock by Manufacturer</a:t>
             </a:r>
@@ -1903,7 +1910,7 @@
         <p:spPr>
           <a:xfrm>
             <a:off x="640080" y="2286000"/>
-            <a:ext cx="8777880" cy="760680"/>
+            <a:ext cx="8777520" cy="759960"/>
           </a:xfrm>
           <a:prstGeom prst="rect">
             <a:avLst/>
@@ -1913,7 +1920,7 @@
             <a:noFill/>
           </a:ln>
           <a:effectLst>
-            <a:outerShdw dist="50911" dir="8100000" blurRad="101520" rotWithShape="0">
+            <a:outerShdw blurRad="101520" dir="8100000" dist="50402" rotWithShape="0">
               <a:srgbClr val="666666">
                 <a:alpha val="65000"/>
               </a:srgbClr>
@@ -1942,17 +1949,9 @@
                   <a:srgbClr val="ffffff"/>
                 </a:solidFill>
                 <a:latin typeface="Arial"/>
+                <a:ea typeface="DejaVu Sans"/>
               </a:rPr>
-              <a:t>- Seven out of 13 product vendors are represented in the Top10 </a:t>
-            </a:r>
-            <a:r>
-              <a:rPr b="0" lang="en-CA" sz="2200" spc="-1" strike="noStrike">
-                <a:solidFill>
-                  <a:srgbClr val="ffffff"/>
-                </a:solidFill>
-                <a:latin typeface="Arial"/>
-              </a:rPr>
-              <a:t>lowest inventory query.</a:t>
+              <a:t>- Seven out of 13 product vendors are represented in the Top10 lowest inventory query.</a:t>
             </a:r>
             <a:endParaRPr b="0" lang="en-CA" sz="2200" spc="-1" strike="noStrike">
               <a:solidFill>
@@ -1977,7 +1976,7 @@
         <p:spPr>
           <a:xfrm>
             <a:off x="2340000" y="3240000"/>
-            <a:ext cx="5400000" cy="2945160"/>
+            <a:ext cx="5399640" cy="2944800"/>
           </a:xfrm>
           <a:prstGeom prst="rect">
             <a:avLst/>
@@ -1986,7 +1985,7 @@
             <a:noFill/>
           </a:ln>
           <a:effectLst>
-            <a:outerShdw dist="80498" dir="9206096" blurRad="101520" rotWithShape="0">
+            <a:outerShdw blurRad="101520" dir="9206096" dist="80498" rotWithShape="0">
               <a:srgbClr val="333333">
                 <a:alpha val="65000"/>
               </a:srgbClr>
@@ -2033,7 +2032,7 @@
         <p:spPr>
           <a:xfrm>
             <a:off x="640080" y="685800"/>
-            <a:ext cx="8777880" cy="1371240"/>
+            <a:ext cx="8777520" cy="1370880"/>
           </a:xfrm>
           <a:prstGeom prst="rect">
             <a:avLst/>
@@ -2047,7 +2046,7 @@
             </a:solidFill>
           </a:ln>
           <a:effectLst>
-            <a:outerShdw dist="50911" dir="8100000" blurRad="101520" rotWithShape="0">
+            <a:outerShdw blurRad="101520" dir="8100000" dist="50402" rotWithShape="0">
               <a:srgbClr val="666666">
                 <a:alpha val="65000"/>
               </a:srgbClr>
@@ -2095,7 +2094,7 @@
         <p:spPr>
           <a:xfrm>
             <a:off x="640080" y="2286000"/>
-            <a:ext cx="8777880" cy="4114440"/>
+            <a:ext cx="8777520" cy="4114080"/>
           </a:xfrm>
           <a:prstGeom prst="rect">
             <a:avLst/>
@@ -2109,7 +2108,7 @@
             </a:solidFill>
           </a:ln>
           <a:effectLst>
-            <a:outerShdw dist="50911" dir="8100000" blurRad="101520" rotWithShape="0">
+            <a:outerShdw blurRad="101520" dir="8100000" dist="50402" rotWithShape="0">
               <a:srgbClr val="666666">
                 <a:alpha val="65000"/>
               </a:srgbClr>
@@ -2157,7 +2156,7 @@
         <p:spPr>
           <a:xfrm>
             <a:off x="640080" y="685800"/>
-            <a:ext cx="8777880" cy="1369800"/>
+            <a:ext cx="8777520" cy="1369800"/>
           </a:xfrm>
           <a:prstGeom prst="rect">
             <a:avLst/>
@@ -2167,7 +2166,7 @@
             <a:noFill/>
           </a:ln>
           <a:effectLst>
-            <a:outerShdw dist="50911" dir="8100000" blurRad="101520" rotWithShape="0">
+            <a:outerShdw blurRad="101520" dir="8100000" dist="50402" rotWithShape="0">
               <a:srgbClr val="666666">
                 <a:alpha val="65000"/>
               </a:srgbClr>
@@ -2196,6 +2195,7 @@
                   <a:srgbClr val="ffffff"/>
                 </a:solidFill>
                 <a:latin typeface="Arial"/>
+                <a:ea typeface="DejaVu Sans"/>
               </a:rPr>
               <a:t>Reinspect the Overhead Graphs Sorted by Product Vendor</a:t>
             </a:r>
@@ -2217,7 +2217,7 @@
         <p:spPr>
           <a:xfrm>
             <a:off x="640080" y="2286000"/>
-            <a:ext cx="8777880" cy="760680"/>
+            <a:ext cx="8777520" cy="759960"/>
           </a:xfrm>
           <a:prstGeom prst="rect">
             <a:avLst/>
@@ -2227,7 +2227,7 @@
             <a:noFill/>
           </a:ln>
           <a:effectLst>
-            <a:outerShdw dist="50911" dir="8100000" blurRad="101520" rotWithShape="0">
+            <a:outerShdw blurRad="101520" dir="8100000" dist="50402" rotWithShape="0">
               <a:srgbClr val="666666">
                 <a:alpha val="65000"/>
               </a:srgbClr>
@@ -2256,6 +2256,7 @@
                   <a:srgbClr val="ffffff"/>
                 </a:solidFill>
                 <a:latin typeface="Arial"/>
+                <a:ea typeface="DejaVu Sans"/>
               </a:rPr>
               <a:t>- Clearly now, issues regarding low-stock inventory are with respect to individual products and not the fault of any single supplier.</a:t>
             </a:r>
@@ -2281,7 +2282,7 @@
         <p:spPr>
           <a:xfrm>
             <a:off x="1980000" y="3178440"/>
-            <a:ext cx="5940000" cy="3059280"/>
+            <a:ext cx="5939640" cy="3058920"/>
           </a:xfrm>
           <a:prstGeom prst="rect">
             <a:avLst/>
@@ -2290,7 +2291,7 @@
             <a:noFill/>
           </a:ln>
           <a:effectLst>
-            <a:outerShdw dist="80498" dir="9206096" blurRad="101520" rotWithShape="0">
+            <a:outerShdw blurRad="101520" dir="9206096" dist="80498" rotWithShape="0">
               <a:srgbClr val="333333">
                 <a:alpha val="65000"/>
               </a:srgbClr>
@@ -2337,7 +2338,7 @@
         <p:spPr>
           <a:xfrm>
             <a:off x="640080" y="685800"/>
-            <a:ext cx="8777880" cy="1371240"/>
+            <a:ext cx="8777520" cy="1370880"/>
           </a:xfrm>
           <a:prstGeom prst="rect">
             <a:avLst/>
@@ -2351,7 +2352,7 @@
             </a:solidFill>
           </a:ln>
           <a:effectLst>
-            <a:outerShdw dist="50911" dir="8100000" blurRad="101520" rotWithShape="0">
+            <a:outerShdw blurRad="101520" dir="8100000" dist="50402" rotWithShape="0">
               <a:srgbClr val="666666">
                 <a:alpha val="65000"/>
               </a:srgbClr>
@@ -2375,6 +2376,11 @@
             <a:noAutofit/>
           </a:bodyPr>
           <a:p>
+            <a:pPr>
+              <a:lnSpc>
+                <a:spcPct val="100000"/>
+              </a:lnSpc>
+            </a:pPr>
             <a:endParaRPr b="0" lang="en-CA" sz="1800" spc="-1" strike="noStrike">
               <a:solidFill>
                 <a:schemeClr val="lt1"/>
@@ -2394,7 +2400,7 @@
         <p:spPr>
           <a:xfrm>
             <a:off x="640080" y="2286000"/>
-            <a:ext cx="8777880" cy="4114440"/>
+            <a:ext cx="8777520" cy="4114080"/>
           </a:xfrm>
           <a:prstGeom prst="rect">
             <a:avLst/>
@@ -2408,7 +2414,7 @@
             </a:solidFill>
           </a:ln>
           <a:effectLst>
-            <a:outerShdw dist="50911" dir="8100000" blurRad="101520" rotWithShape="0">
+            <a:outerShdw blurRad="101520" dir="8100000" dist="50402" rotWithShape="0">
               <a:srgbClr val="666666">
                 <a:alpha val="65000"/>
               </a:srgbClr>
@@ -2432,6 +2438,11 @@
             <a:noAutofit/>
           </a:bodyPr>
           <a:p>
+            <a:pPr>
+              <a:lnSpc>
+                <a:spcPct val="100000"/>
+              </a:lnSpc>
+            </a:pPr>
             <a:endParaRPr b="0" lang="en-CA" sz="1800" spc="-1" strike="noStrike">
               <a:solidFill>
                 <a:schemeClr val="lt1"/>
@@ -2451,7 +2462,7 @@
         <p:spPr>
           <a:xfrm>
             <a:off x="640080" y="685800"/>
-            <a:ext cx="8777880" cy="1369800"/>
+            <a:ext cx="8777520" cy="1369800"/>
           </a:xfrm>
           <a:prstGeom prst="rect">
             <a:avLst/>
@@ -2461,7 +2472,7 @@
             <a:noFill/>
           </a:ln>
           <a:effectLst>
-            <a:outerShdw dist="50911" dir="8100000" blurRad="101520" rotWithShape="0">
+            <a:outerShdw blurRad="101520" dir="8100000" dist="50402" rotWithShape="0">
               <a:srgbClr val="666666">
                 <a:alpha val="65000"/>
               </a:srgbClr>
@@ -2490,6 +2501,7 @@
                   <a:srgbClr val="ffffff"/>
                 </a:solidFill>
                 <a:latin typeface="Arial"/>
+                <a:ea typeface="DejaVu Sans"/>
               </a:rPr>
               <a:t>Reinspect the Overhead Graphs Sorted by Product Vendor</a:t>
             </a:r>
@@ -2511,7 +2523,7 @@
         <p:spPr>
           <a:xfrm>
             <a:off x="640080" y="2286000"/>
-            <a:ext cx="8777880" cy="1522440"/>
+            <a:ext cx="8777520" cy="1521720"/>
           </a:xfrm>
           <a:prstGeom prst="rect">
             <a:avLst/>
@@ -2521,7 +2533,7 @@
             <a:noFill/>
           </a:ln>
           <a:effectLst>
-            <a:outerShdw dist="50911" dir="8100000" blurRad="101520" rotWithShape="0">
+            <a:outerShdw blurRad="101520" dir="8100000" dist="50402" rotWithShape="0">
               <a:srgbClr val="666666">
                 <a:alpha val="65000"/>
               </a:srgbClr>
@@ -2550,6 +2562,7 @@
                   <a:srgbClr val="ffffff"/>
                 </a:solidFill>
                 <a:latin typeface="Arial"/>
+                <a:ea typeface="DejaVu Sans"/>
               </a:rPr>
               <a:t>- Low stock levels are not directly correlated to high sales volumes in most cases.</a:t>
             </a:r>
@@ -2585,6 +2598,7 @@
                   <a:srgbClr val="ffffff"/>
                 </a:solidFill>
                 <a:latin typeface="Arial"/>
+                <a:ea typeface="DejaVu Sans"/>
               </a:rPr>
               <a:t>- The dataset lacks the necessary product supply information required to investigate any further at this time.</a:t>
             </a:r>
@@ -2610,7 +2624,7 @@
         <p:spPr>
           <a:xfrm>
             <a:off x="2520000" y="3796920"/>
-            <a:ext cx="4860000" cy="2503080"/>
+            <a:ext cx="4859640" cy="2502720"/>
           </a:xfrm>
           <a:prstGeom prst="rect">
             <a:avLst/>
@@ -2619,7 +2633,7 @@
             <a:noFill/>
           </a:ln>
           <a:effectLst>
-            <a:outerShdw dist="80498" dir="9206096" blurRad="101520" rotWithShape="0">
+            <a:outerShdw blurRad="101520" dir="9206096" dist="80498" rotWithShape="0">
               <a:srgbClr val="333333">
                 <a:alpha val="65000"/>
               </a:srgbClr>
@@ -2666,7 +2680,7 @@
         <p:spPr>
           <a:xfrm>
             <a:off x="640080" y="685800"/>
-            <a:ext cx="8777880" cy="1371240"/>
+            <a:ext cx="8777520" cy="1370880"/>
           </a:xfrm>
           <a:prstGeom prst="rect">
             <a:avLst/>
@@ -2680,7 +2694,7 @@
             </a:solidFill>
           </a:ln>
           <a:effectLst>
-            <a:outerShdw dist="50911" dir="8100000" blurRad="101520" rotWithShape="0">
+            <a:outerShdw blurRad="101520" dir="8100000" dist="50402" rotWithShape="0">
               <a:srgbClr val="666666">
                 <a:alpha val="65000"/>
               </a:srgbClr>
@@ -2728,7 +2742,7 @@
         <p:spPr>
           <a:xfrm>
             <a:off x="640080" y="2286000"/>
-            <a:ext cx="8777880" cy="4114440"/>
+            <a:ext cx="8777520" cy="4114080"/>
           </a:xfrm>
           <a:prstGeom prst="rect">
             <a:avLst/>
@@ -2742,7 +2756,7 @@
             </a:solidFill>
           </a:ln>
           <a:effectLst>
-            <a:outerShdw dist="50911" dir="8100000" blurRad="101520" rotWithShape="0">
+            <a:outerShdw blurRad="101520" dir="8100000" dist="50402" rotWithShape="0">
               <a:srgbClr val="666666">
                 <a:alpha val="65000"/>
               </a:srgbClr>
@@ -2790,7 +2804,7 @@
         <p:spPr>
           <a:xfrm>
             <a:off x="640080" y="900000"/>
-            <a:ext cx="8777880" cy="821160"/>
+            <a:ext cx="8777520" cy="821160"/>
           </a:xfrm>
           <a:prstGeom prst="rect">
             <a:avLst/>
@@ -2800,7 +2814,7 @@
             <a:noFill/>
           </a:ln>
           <a:effectLst>
-            <a:outerShdw dist="50911" dir="8100000" blurRad="101520" rotWithShape="0">
+            <a:outerShdw blurRad="101520" dir="8100000" dist="50402" rotWithShape="0">
               <a:srgbClr val="666666">
                 <a:alpha val="65000"/>
               </a:srgbClr>
@@ -2829,6 +2843,7 @@
                   <a:srgbClr val="ffffff"/>
                 </a:solidFill>
                 <a:latin typeface="Arial"/>
+                <a:ea typeface="DejaVu Sans"/>
               </a:rPr>
               <a:t>Check Warehouse Volumes</a:t>
             </a:r>
@@ -2850,7 +2865,7 @@
         <p:spPr>
           <a:xfrm>
             <a:off x="640080" y="2286000"/>
-            <a:ext cx="8777880" cy="1187280"/>
+            <a:ext cx="8777520" cy="1186560"/>
           </a:xfrm>
           <a:prstGeom prst="rect">
             <a:avLst/>
@@ -2860,7 +2875,7 @@
             <a:noFill/>
           </a:ln>
           <a:effectLst>
-            <a:outerShdw dist="50911" dir="8100000" blurRad="101520" rotWithShape="0">
+            <a:outerShdw blurRad="101520" dir="8100000" dist="50402" rotWithShape="0">
               <a:srgbClr val="666666">
                 <a:alpha val="65000"/>
               </a:srgbClr>
@@ -2889,6 +2904,7 @@
                   <a:srgbClr val="ffffff"/>
                 </a:solidFill>
                 <a:latin typeface="Arial"/>
+                <a:ea typeface="DejaVu Sans"/>
               </a:rPr>
               <a:t>- Actual packaging volume information was not available.</a:t>
             </a:r>
@@ -2924,6 +2940,7 @@
                   <a:srgbClr val="ffffff"/>
                 </a:solidFill>
                 <a:latin typeface="Arial"/>
+                <a:ea typeface="DejaVu Sans"/>
               </a:rPr>
               <a:t>- A list of the approximate product volumes has been generated based on product names and scale for the purpose of analysis.</a:t>
             </a:r>
@@ -2949,7 +2966,7 @@
         <p:spPr>
           <a:xfrm>
             <a:off x="2340000" y="3596400"/>
-            <a:ext cx="5462640" cy="2703600"/>
+            <a:ext cx="5462280" cy="2703240"/>
           </a:xfrm>
           <a:prstGeom prst="rect">
             <a:avLst/>
@@ -2958,7 +2975,7 @@
             <a:noFill/>
           </a:ln>
           <a:effectLst>
-            <a:outerShdw dist="80498" dir="9206096" blurRad="101520" rotWithShape="0">
+            <a:outerShdw blurRad="101520" dir="9206096" dist="80498" rotWithShape="0">
               <a:srgbClr val="333333">
                 <a:alpha val="65000"/>
               </a:srgbClr>
@@ -3005,7 +3022,7 @@
         <p:spPr>
           <a:xfrm>
             <a:off x="640080" y="685800"/>
-            <a:ext cx="8777880" cy="1371240"/>
+            <a:ext cx="8777520" cy="1370880"/>
           </a:xfrm>
           <a:prstGeom prst="rect">
             <a:avLst/>
@@ -3019,7 +3036,7 @@
             </a:solidFill>
           </a:ln>
           <a:effectLst>
-            <a:outerShdw dist="50911" dir="8100000" blurRad="101520" rotWithShape="0">
+            <a:outerShdw blurRad="101520" dir="8100000" dist="50402" rotWithShape="0">
               <a:srgbClr val="666666">
                 <a:alpha val="65000"/>
               </a:srgbClr>
@@ -3043,6 +3060,11 @@
             <a:noAutofit/>
           </a:bodyPr>
           <a:p>
+            <a:pPr>
+              <a:lnSpc>
+                <a:spcPct val="100000"/>
+              </a:lnSpc>
+            </a:pPr>
             <a:endParaRPr b="0" lang="en-CA" sz="1800" spc="-1" strike="noStrike">
               <a:solidFill>
                 <a:schemeClr val="lt1"/>
@@ -3062,7 +3084,7 @@
         <p:spPr>
           <a:xfrm>
             <a:off x="640080" y="2286000"/>
-            <a:ext cx="8777880" cy="4114440"/>
+            <a:ext cx="8777520" cy="4114080"/>
           </a:xfrm>
           <a:prstGeom prst="rect">
             <a:avLst/>
@@ -3076,7 +3098,7 @@
             </a:solidFill>
           </a:ln>
           <a:effectLst>
-            <a:outerShdw dist="50911" dir="8100000" blurRad="101520" rotWithShape="0">
+            <a:outerShdw blurRad="101520" dir="8100000" dist="50402" rotWithShape="0">
               <a:srgbClr val="666666">
                 <a:alpha val="65000"/>
               </a:srgbClr>
@@ -3100,6 +3122,11 @@
             <a:noAutofit/>
           </a:bodyPr>
           <a:p>
+            <a:pPr>
+              <a:lnSpc>
+                <a:spcPct val="100000"/>
+              </a:lnSpc>
+            </a:pPr>
             <a:endParaRPr b="0" lang="en-CA" sz="1800" spc="-1" strike="noStrike">
               <a:solidFill>
                 <a:schemeClr val="lt1"/>
@@ -3119,7 +3146,7 @@
         <p:spPr>
           <a:xfrm>
             <a:off x="640080" y="900000"/>
-            <a:ext cx="8777880" cy="821160"/>
+            <a:ext cx="8777520" cy="821160"/>
           </a:xfrm>
           <a:prstGeom prst="rect">
             <a:avLst/>
@@ -3129,7 +3156,7 @@
             <a:noFill/>
           </a:ln>
           <a:effectLst>
-            <a:outerShdw dist="50911" dir="8100000" blurRad="101520" rotWithShape="0">
+            <a:outerShdw blurRad="101520" dir="8100000" dist="50402" rotWithShape="0">
               <a:srgbClr val="666666">
                 <a:alpha val="65000"/>
               </a:srgbClr>
@@ -3158,6 +3185,7 @@
                   <a:srgbClr val="ffffff"/>
                 </a:solidFill>
                 <a:latin typeface="Arial"/>
+                <a:ea typeface="DejaVu Sans"/>
               </a:rPr>
               <a:t>Check Warehouse Volumes</a:t>
             </a:r>
@@ -3183,7 +3211,7 @@
         <p:spPr>
           <a:xfrm>
             <a:off x="2340000" y="3596400"/>
-            <a:ext cx="5462640" cy="2703600"/>
+            <a:ext cx="5462280" cy="2703240"/>
           </a:xfrm>
           <a:prstGeom prst="rect">
             <a:avLst/>
@@ -3192,7 +3220,7 @@
             <a:noFill/>
           </a:ln>
           <a:effectLst>
-            <a:outerShdw dist="80498" dir="9206096" blurRad="101520" rotWithShape="0">
+            <a:outerShdw blurRad="101520" dir="9206096" dist="80498" rotWithShape="0">
               <a:srgbClr val="333333">
                 <a:alpha val="65000"/>
               </a:srgbClr>
@@ -3209,7 +3237,7 @@
         <p:spPr>
           <a:xfrm>
             <a:off x="604080" y="2322000"/>
-            <a:ext cx="8777880" cy="1401480"/>
+            <a:ext cx="8777520" cy="1339560"/>
           </a:xfrm>
           <a:prstGeom prst="rect">
             <a:avLst/>
@@ -3219,7 +3247,7 @@
             <a:noFill/>
           </a:ln>
           <a:effectLst>
-            <a:outerShdw dist="50911" dir="8100000" blurRad="101520" rotWithShape="0">
+            <a:outerShdw blurRad="101520" dir="8100000" dist="50402" rotWithShape="0">
               <a:srgbClr val="666666">
                 <a:alpha val="65000"/>
               </a:srgbClr>
@@ -3243,15 +3271,16 @@
               </a:lnSpc>
             </a:pPr>
             <a:r>
-              <a:rPr b="0" lang="en-CA" sz="2000" spc="-1" strike="noStrike">
+              <a:rPr b="0" lang="en-CA" sz="1900" spc="-1" strike="noStrike">
                 <a:solidFill>
                   <a:srgbClr val="ffffff"/>
                 </a:solidFill>
                 <a:latin typeface="Arial"/>
+                <a:ea typeface="DejaVu Sans"/>
               </a:rPr>
               <a:t>- The largest warehouse, Warehouse B, shows enough space remaining to hold the stock from either Warehouse C or Warehouse D.</a:t>
             </a:r>
-            <a:endParaRPr b="0" lang="en-CA" sz="2000" spc="-1" strike="noStrike">
+            <a:endParaRPr b="0" lang="en-CA" sz="1900" spc="-1" strike="noStrike">
               <a:solidFill>
                 <a:srgbClr val="000000"/>
               </a:solidFill>
@@ -3278,42 +3307,46 @@
               </a:lnSpc>
             </a:pPr>
             <a:r>
-              <a:rPr b="0" lang="en-CA" sz="2000" spc="-1" strike="noStrike">
+              <a:rPr b="0" lang="en-CA" sz="1900" spc="-1" strike="noStrike">
                 <a:solidFill>
                   <a:srgbClr val="ffffff"/>
                 </a:solidFill>
                 <a:latin typeface="Arial"/>
+                <a:ea typeface="DejaVu Sans"/>
               </a:rPr>
               <a:t>- Considering that </a:t>
             </a:r>
             <a:r>
-              <a:rPr b="1" lang="en-CA" sz="2000" spc="-1" strike="noStrike">
+              <a:rPr b="1" lang="en-CA" sz="1900" spc="-1" strike="noStrike">
                 <a:solidFill>
                   <a:srgbClr val="ffffff"/>
                 </a:solidFill>
                 <a:latin typeface="Arial"/>
+                <a:ea typeface="DejaVu Sans"/>
               </a:rPr>
               <a:t>Warehouse C</a:t>
             </a:r>
             <a:r>
-              <a:rPr b="0" lang="en-CA" sz="2000" spc="-1" strike="noStrike">
+              <a:rPr b="0" lang="en-CA" sz="1900" spc="-1" strike="noStrike">
                 <a:solidFill>
                   <a:srgbClr val="ffffff"/>
                 </a:solidFill>
                 <a:latin typeface="Arial"/>
+                <a:ea typeface="DejaVu Sans"/>
               </a:rPr>
               <a:t> is half-empty, </a:t>
             </a:r>
             <a:r>
-              <a:rPr b="1" lang="en-CA" sz="2000" spc="-1" strike="noStrike">
+              <a:rPr b="1" lang="en-CA" sz="1900" spc="-1" strike="noStrike">
                 <a:solidFill>
                   <a:srgbClr val="ffffff"/>
                 </a:solidFill>
                 <a:latin typeface="Arial"/>
+                <a:ea typeface="DejaVu Sans"/>
               </a:rPr>
-              <a:t>this may a good candidate for closure.</a:t>
+              <a:t>this may be a good candidate for closure.</a:t>
             </a:r>
-            <a:endParaRPr b="0" lang="en-CA" sz="2000" spc="-1" strike="noStrike">
+            <a:endParaRPr b="0" lang="en-CA" sz="1900" spc="-1" strike="noStrike">
               <a:solidFill>
                 <a:srgbClr val="000000"/>
               </a:solidFill>
@@ -3361,7 +3394,7 @@
         <p:spPr>
           <a:xfrm>
             <a:off x="640080" y="685800"/>
-            <a:ext cx="8777880" cy="1371240"/>
+            <a:ext cx="8777520" cy="1370880"/>
           </a:xfrm>
           <a:prstGeom prst="rect">
             <a:avLst/>
@@ -3375,7 +3408,7 @@
             </a:solidFill>
           </a:ln>
           <a:effectLst>
-            <a:outerShdw dist="50911" dir="8100000" blurRad="101520" rotWithShape="0">
+            <a:outerShdw blurRad="101520" dir="8100000" dist="50402" rotWithShape="0">
               <a:srgbClr val="666666">
                 <a:alpha val="65000"/>
               </a:srgbClr>
@@ -3423,7 +3456,7 @@
         <p:spPr>
           <a:xfrm>
             <a:off x="640080" y="2286000"/>
-            <a:ext cx="8777880" cy="4114440"/>
+            <a:ext cx="8777520" cy="4114080"/>
           </a:xfrm>
           <a:prstGeom prst="rect">
             <a:avLst/>
@@ -3437,7 +3470,7 @@
             </a:solidFill>
           </a:ln>
           <a:effectLst>
-            <a:outerShdw dist="50911" dir="8100000" blurRad="101520" rotWithShape="0">
+            <a:outerShdw blurRad="101520" dir="8100000" dist="50402" rotWithShape="0">
               <a:srgbClr val="666666">
                 <a:alpha val="65000"/>
               </a:srgbClr>
@@ -3485,7 +3518,7 @@
         <p:spPr>
           <a:xfrm>
             <a:off x="640080" y="905760"/>
-            <a:ext cx="8777880" cy="760680"/>
+            <a:ext cx="8777520" cy="759960"/>
           </a:xfrm>
           <a:prstGeom prst="rect">
             <a:avLst/>
@@ -3495,7 +3528,7 @@
             <a:noFill/>
           </a:ln>
           <a:effectLst>
-            <a:outerShdw dist="50911" dir="8100000" blurRad="101520" rotWithShape="0">
+            <a:outerShdw blurRad="101520" dir="8100000" dist="50402" rotWithShape="0">
               <a:srgbClr val="666666">
                 <a:alpha val="65000"/>
               </a:srgbClr>
@@ -3524,6 +3557,7 @@
                   <a:srgbClr val="ffffff"/>
                 </a:solidFill>
                 <a:latin typeface="Arial"/>
+                <a:ea typeface="DejaVu Sans"/>
               </a:rPr>
               <a:t>Check the Warehouse Contents</a:t>
             </a:r>
@@ -3545,7 +3579,7 @@
         <p:spPr>
           <a:xfrm>
             <a:off x="640080" y="2286000"/>
-            <a:ext cx="8777880" cy="2193480"/>
+            <a:ext cx="8777520" cy="2192760"/>
           </a:xfrm>
           <a:prstGeom prst="rect">
             <a:avLst/>
@@ -3555,7 +3589,7 @@
             <a:noFill/>
           </a:ln>
           <a:effectLst>
-            <a:outerShdw dist="50911" dir="8100000" blurRad="101520" rotWithShape="0">
+            <a:outerShdw blurRad="101520" dir="8100000" dist="50402" rotWithShape="0">
               <a:srgbClr val="666666">
                 <a:alpha val="65000"/>
               </a:srgbClr>
@@ -3584,6 +3618,7 @@
                   <a:srgbClr val="ffffff"/>
                 </a:solidFill>
                 <a:latin typeface="Arial"/>
+                <a:ea typeface="DejaVu Sans"/>
               </a:rPr>
               <a:t>- It can be seen that the large warehouse "B" contains only 'Classic Cars'.</a:t>
             </a:r>
@@ -3619,6 +3654,7 @@
                   <a:srgbClr val="ffffff"/>
                 </a:solidFill>
                 <a:latin typeface="Arial"/>
+                <a:ea typeface="DejaVu Sans"/>
               </a:rPr>
               <a:t>- The warehouse which is a candidate for closure, "C", contains only 'Vintage Cars'.</a:t>
             </a:r>
@@ -3654,6 +3690,7 @@
                   <a:srgbClr val="ffffff"/>
                 </a:solidFill>
                 <a:latin typeface="Arial"/>
+                <a:ea typeface="DejaVu Sans"/>
               </a:rPr>
               <a:t>- Merging the contents of warehouses B and C would allow for the full stock of 'Cars' to be housed in a single location.</a:t>
             </a:r>
@@ -3680,7 +3717,7 @@
         <p:spPr>
           <a:xfrm>
             <a:off x="1649160" y="4552560"/>
-            <a:ext cx="6674760" cy="1778760"/>
+            <a:ext cx="6674400" cy="1778400"/>
           </a:xfrm>
           <a:prstGeom prst="rect">
             <a:avLst/>
@@ -3689,7 +3726,7 @@
             <a:noFill/>
           </a:ln>
           <a:effectLst>
-            <a:outerShdw dist="80498" dir="9206096" blurRad="101520" rotWithShape="0">
+            <a:outerShdw blurRad="101520" dir="9206096" dist="80498" rotWithShape="0">
               <a:srgbClr val="333333">
                 <a:alpha val="65000"/>
               </a:srgbClr>
@@ -3706,7 +3743,7 @@
         <p:spPr>
           <a:xfrm>
             <a:off x="2461320" y="5113080"/>
-            <a:ext cx="3780000" cy="540000"/>
+            <a:ext cx="3779640" cy="539640"/>
           </a:xfrm>
           <a:prstGeom prst="ellipse">
             <a:avLst/>
@@ -3719,7 +3756,7 @@
             <a:round/>
           </a:ln>
           <a:effectLst>
-            <a:outerShdw dist="50911" dir="8100000" blurRad="101520" rotWithShape="0">
+            <a:outerShdw blurRad="101520" dir="8100000" dist="50402" rotWithShape="0">
               <a:srgbClr val="666666">
                 <a:alpha val="65000"/>
               </a:srgbClr>
@@ -3737,11 +3774,17 @@
             <a:noAutofit/>
           </a:bodyPr>
           <a:p>
+            <a:pPr>
+              <a:lnSpc>
+                <a:spcPct val="100000"/>
+              </a:lnSpc>
+            </a:pPr>
             <a:endParaRPr b="0" lang="en-CA" sz="1800" spc="-1" strike="noStrike">
               <a:solidFill>
                 <a:srgbClr val="000000"/>
               </a:solidFill>
               <a:latin typeface="Arial"/>
+              <a:ea typeface="DejaVu Sans"/>
             </a:endParaRPr>
           </a:p>
         </p:txBody>
@@ -3785,7 +3828,7 @@
         <p:spPr>
           <a:xfrm>
             <a:off x="640080" y="685800"/>
-            <a:ext cx="8777880" cy="1371240"/>
+            <a:ext cx="8777520" cy="1370880"/>
           </a:xfrm>
           <a:prstGeom prst="rect">
             <a:avLst/>
@@ -3799,7 +3842,7 @@
             </a:solidFill>
           </a:ln>
           <a:effectLst>
-            <a:outerShdw dist="50911" dir="8100000" blurRad="101520" rotWithShape="0">
+            <a:outerShdw blurRad="101520" dir="8100000" dist="50402" rotWithShape="0">
               <a:srgbClr val="666666">
                 <a:alpha val="65000"/>
               </a:srgbClr>
@@ -3847,7 +3890,7 @@
         <p:spPr>
           <a:xfrm>
             <a:off x="640080" y="2286000"/>
-            <a:ext cx="8777880" cy="4114440"/>
+            <a:ext cx="8777520" cy="4114080"/>
           </a:xfrm>
           <a:prstGeom prst="rect">
             <a:avLst/>
@@ -3861,7 +3904,7 @@
             </a:solidFill>
           </a:ln>
           <a:effectLst>
-            <a:outerShdw dist="50911" dir="8100000" blurRad="101520" rotWithShape="0">
+            <a:outerShdw blurRad="101520" dir="8100000" dist="50402" rotWithShape="0">
               <a:srgbClr val="666666">
                 <a:alpha val="65000"/>
               </a:srgbClr>
@@ -3909,7 +3952,7 @@
         <p:spPr>
           <a:xfrm>
             <a:off x="640080" y="685800"/>
-            <a:ext cx="8777880" cy="1369800"/>
+            <a:ext cx="8777520" cy="1369800"/>
           </a:xfrm>
           <a:prstGeom prst="rect">
             <a:avLst/>
@@ -3919,7 +3962,7 @@
             <a:noFill/>
           </a:ln>
           <a:effectLst>
-            <a:outerShdw dist="50911" dir="8100000" blurRad="101520" rotWithShape="0">
+            <a:outerShdw blurRad="101520" dir="8100000" dist="50402" rotWithShape="0">
               <a:srgbClr val="666666">
                 <a:alpha val="65000"/>
               </a:srgbClr>
@@ -3948,6 +3991,7 @@
                   <a:srgbClr val="ffffff"/>
                 </a:solidFill>
                 <a:latin typeface="Arial"/>
+                <a:ea typeface="DejaVu Sans"/>
               </a:rPr>
               <a:t>Look into Warehouse Shipping Efficiency</a:t>
             </a:r>
@@ -3969,7 +4013,7 @@
         <p:spPr>
           <a:xfrm>
             <a:off x="640080" y="2743560"/>
-            <a:ext cx="8777880" cy="3016440"/>
+            <a:ext cx="8777520" cy="3016440"/>
           </a:xfrm>
           <a:prstGeom prst="rect">
             <a:avLst/>
@@ -3979,7 +4023,7 @@
             <a:noFill/>
           </a:ln>
           <a:effectLst>
-            <a:outerShdw dist="50911" dir="8100000" blurRad="101520" rotWithShape="0">
+            <a:outerShdw blurRad="101520" dir="8100000" dist="50402" rotWithShape="0">
               <a:srgbClr val="666666">
                 <a:alpha val="65000"/>
               </a:srgbClr>
@@ -4008,6 +4052,7 @@
                   <a:srgbClr val="ffffff"/>
                 </a:solidFill>
                 <a:latin typeface="Arial"/>
+                <a:ea typeface="DejaVu Sans"/>
               </a:rPr>
               <a:t>Orders shipped from multiple warehouses DO NOT differentiate their date of shipment from each warehouse individually, THEREFORE the aggregated totals for each will only show a difference if a given warehouse is performing differently than average.</a:t>
             </a:r>
@@ -4059,7 +4104,7 @@
         <p:spPr>
           <a:xfrm>
             <a:off x="640080" y="685800"/>
-            <a:ext cx="8777880" cy="1371240"/>
+            <a:ext cx="8777520" cy="1370880"/>
           </a:xfrm>
           <a:prstGeom prst="rect">
             <a:avLst/>
@@ -4073,7 +4118,7 @@
             </a:solidFill>
           </a:ln>
           <a:effectLst>
-            <a:outerShdw dist="50911" dir="8100000" blurRad="101520" rotWithShape="0">
+            <a:outerShdw blurRad="101520" dir="8100000" dist="50402" rotWithShape="0">
               <a:srgbClr val="666666">
                 <a:alpha val="65000"/>
               </a:srgbClr>
@@ -4097,6 +4142,11 @@
             <a:noAutofit/>
           </a:bodyPr>
           <a:p>
+            <a:pPr>
+              <a:lnSpc>
+                <a:spcPct val="100000"/>
+              </a:lnSpc>
+            </a:pPr>
             <a:endParaRPr b="0" lang="en-CA" sz="1800" spc="-1" strike="noStrike">
               <a:solidFill>
                 <a:schemeClr val="lt1"/>
@@ -4116,7 +4166,7 @@
         <p:spPr>
           <a:xfrm>
             <a:off x="640080" y="2286000"/>
-            <a:ext cx="8777880" cy="4114440"/>
+            <a:ext cx="8777520" cy="4114080"/>
           </a:xfrm>
           <a:prstGeom prst="rect">
             <a:avLst/>
@@ -4130,7 +4180,7 @@
             </a:solidFill>
           </a:ln>
           <a:effectLst>
-            <a:outerShdw dist="50911" dir="8100000" blurRad="101520" rotWithShape="0">
+            <a:outerShdw blurRad="101520" dir="8100000" dist="50402" rotWithShape="0">
               <a:srgbClr val="666666">
                 <a:alpha val="65000"/>
               </a:srgbClr>
@@ -4154,6 +4204,11 @@
             <a:noAutofit/>
           </a:bodyPr>
           <a:p>
+            <a:pPr>
+              <a:lnSpc>
+                <a:spcPct val="100000"/>
+              </a:lnSpc>
+            </a:pPr>
             <a:endParaRPr b="0" lang="en-CA" sz="1800" spc="-1" strike="noStrike">
               <a:solidFill>
                 <a:schemeClr val="lt1"/>
@@ -4173,7 +4228,7 @@
         <p:spPr>
           <a:xfrm>
             <a:off x="640080" y="685800"/>
-            <a:ext cx="8777880" cy="1369800"/>
+            <a:ext cx="8777520" cy="1369800"/>
           </a:xfrm>
           <a:prstGeom prst="rect">
             <a:avLst/>
@@ -4183,7 +4238,7 @@
             <a:noFill/>
           </a:ln>
           <a:effectLst>
-            <a:outerShdw dist="50911" dir="8100000" blurRad="101520" rotWithShape="0">
+            <a:outerShdw blurRad="101520" dir="8100000" dist="50402" rotWithShape="0">
               <a:srgbClr val="666666">
                 <a:alpha val="65000"/>
               </a:srgbClr>
@@ -4212,6 +4267,7 @@
                   <a:srgbClr val="ffffff"/>
                 </a:solidFill>
                 <a:latin typeface="Arial"/>
+                <a:ea typeface="DejaVu Sans"/>
               </a:rPr>
               <a:t>Look into Warehouse Shipping Efficiency</a:t>
             </a:r>
@@ -4233,7 +4289,7 @@
         <p:spPr>
           <a:xfrm>
             <a:off x="640080" y="2349720"/>
-            <a:ext cx="8777880" cy="1188000"/>
+            <a:ext cx="8777520" cy="1187280"/>
           </a:xfrm>
           <a:prstGeom prst="rect">
             <a:avLst/>
@@ -4243,7 +4299,7 @@
             <a:noFill/>
           </a:ln>
           <a:effectLst>
-            <a:outerShdw dist="50911" dir="8100000" blurRad="101520" rotWithShape="0">
+            <a:outerShdw blurRad="101520" dir="8100000" dist="50402" rotWithShape="0">
               <a:srgbClr val="666666">
                 <a:alpha val="65000"/>
               </a:srgbClr>
@@ -4272,6 +4328,7 @@
                   <a:srgbClr val="ffffff"/>
                 </a:solidFill>
                 <a:latin typeface="Arial"/>
+                <a:ea typeface="DejaVu Sans"/>
               </a:rPr>
               <a:t>- Check the amount of time each warehouse requires to ship an order.</a:t>
             </a:r>
@@ -4307,6 +4364,7 @@
                   <a:srgbClr val="ffffff"/>
                 </a:solidFill>
                 <a:latin typeface="Arial"/>
+                <a:ea typeface="DejaVu Sans"/>
               </a:rPr>
               <a:t>- Look for shipping delays from each warehouse.</a:t>
             </a:r>
@@ -4342,6 +4400,7 @@
                   <a:srgbClr val="ffffff"/>
                 </a:solidFill>
                 <a:latin typeface="Arial"/>
+                <a:ea typeface="DejaVu Sans"/>
               </a:rPr>
               <a:t>- Determine if shipping delays are incidental or a systemic issue.</a:t>
             </a:r>
@@ -4367,7 +4426,7 @@
         <p:spPr>
           <a:xfrm>
             <a:off x="2293920" y="3537720"/>
-            <a:ext cx="5446080" cy="2700000"/>
+            <a:ext cx="5445720" cy="2699640"/>
           </a:xfrm>
           <a:prstGeom prst="rect">
             <a:avLst/>
@@ -4376,7 +4435,7 @@
             <a:noFill/>
           </a:ln>
           <a:effectLst>
-            <a:outerShdw dist="80498" dir="9206096" blurRad="101520" rotWithShape="0">
+            <a:outerShdw blurRad="101520" dir="9206096" dist="80498" rotWithShape="0">
               <a:srgbClr val="333333">
                 <a:alpha val="65000"/>
               </a:srgbClr>
@@ -4423,7 +4482,7 @@
         <p:spPr>
           <a:xfrm>
             <a:off x="640080" y="685800"/>
-            <a:ext cx="8777880" cy="1371240"/>
+            <a:ext cx="8777520" cy="1370880"/>
           </a:xfrm>
           <a:prstGeom prst="rect">
             <a:avLst/>
@@ -4437,7 +4496,7 @@
             </a:solidFill>
           </a:ln>
           <a:effectLst>
-            <a:outerShdw dist="50911" dir="8100000" blurRad="101520" rotWithShape="0">
+            <a:outerShdw blurRad="101520" dir="8100000" dist="50402" rotWithShape="0">
               <a:srgbClr val="666666">
                 <a:alpha val="65000"/>
               </a:srgbClr>
@@ -4461,6 +4520,11 @@
             <a:noAutofit/>
           </a:bodyPr>
           <a:p>
+            <a:pPr>
+              <a:lnSpc>
+                <a:spcPct val="100000"/>
+              </a:lnSpc>
+            </a:pPr>
             <a:endParaRPr b="0" lang="en-CA" sz="1800" spc="-1" strike="noStrike">
               <a:solidFill>
                 <a:schemeClr val="lt1"/>
@@ -4480,7 +4544,7 @@
         <p:spPr>
           <a:xfrm>
             <a:off x="640080" y="2286000"/>
-            <a:ext cx="8777880" cy="4114440"/>
+            <a:ext cx="8777520" cy="4114080"/>
           </a:xfrm>
           <a:prstGeom prst="rect">
             <a:avLst/>
@@ -4494,7 +4558,7 @@
             </a:solidFill>
           </a:ln>
           <a:effectLst>
-            <a:outerShdw dist="50911" dir="8100000" blurRad="101520" rotWithShape="0">
+            <a:outerShdw blurRad="101520" dir="8100000" dist="50402" rotWithShape="0">
               <a:srgbClr val="666666">
                 <a:alpha val="65000"/>
               </a:srgbClr>
@@ -4518,6 +4582,11 @@
             <a:noAutofit/>
           </a:bodyPr>
           <a:p>
+            <a:pPr>
+              <a:lnSpc>
+                <a:spcPct val="100000"/>
+              </a:lnSpc>
+            </a:pPr>
             <a:endParaRPr b="0" lang="en-CA" sz="1800" spc="-1" strike="noStrike">
               <a:solidFill>
                 <a:schemeClr val="lt1"/>
@@ -4537,7 +4606,7 @@
         <p:spPr>
           <a:xfrm>
             <a:off x="640080" y="900000"/>
-            <a:ext cx="8777880" cy="821880"/>
+            <a:ext cx="8777520" cy="821160"/>
           </a:xfrm>
           <a:prstGeom prst="rect">
             <a:avLst/>
@@ -4547,7 +4616,7 @@
             <a:noFill/>
           </a:ln>
           <a:effectLst>
-            <a:outerShdw dist="50911" dir="8100000" blurRad="101520" rotWithShape="0">
+            <a:outerShdw blurRad="101520" dir="8100000" dist="50402" rotWithShape="0">
               <a:srgbClr val="666666">
                 <a:alpha val="65000"/>
               </a:srgbClr>
@@ -4576,6 +4645,7 @@
                   <a:srgbClr val="ffffff"/>
                 </a:solidFill>
                 <a:latin typeface="Arial"/>
+                <a:ea typeface="DejaVu Sans"/>
               </a:rPr>
               <a:t>Warehouse Shipping Efficiency</a:t>
             </a:r>
@@ -4597,7 +4667,7 @@
         <p:spPr>
           <a:xfrm>
             <a:off x="720000" y="2462040"/>
-            <a:ext cx="8554320" cy="943560"/>
+            <a:ext cx="8553960" cy="943560"/>
           </a:xfrm>
           <a:prstGeom prst="rect">
             <a:avLst/>
@@ -4607,7 +4677,7 @@
             <a:noFill/>
           </a:ln>
           <a:effectLst>
-            <a:outerShdw dist="50911" dir="8100000" blurRad="101520" rotWithShape="0">
+            <a:outerShdw blurRad="101520" dir="8100000" dist="50402" rotWithShape="0">
               <a:srgbClr val="666666">
                 <a:alpha val="65000"/>
               </a:srgbClr>
@@ -4636,6 +4706,7 @@
                   <a:srgbClr val="ffffff"/>
                 </a:solidFill>
                 <a:latin typeface="Arial"/>
+                <a:ea typeface="DejaVu Sans"/>
               </a:rPr>
               <a:t>After splitting the shipping delays into occurrences by location, normalized to maximum orders per bin:</a:t>
             </a:r>
@@ -4661,7 +4732,7 @@
         <p:spPr>
           <a:xfrm>
             <a:off x="1080000" y="3656520"/>
-            <a:ext cx="7920000" cy="2562120"/>
+            <a:ext cx="7919640" cy="2561760"/>
           </a:xfrm>
           <a:prstGeom prst="rect">
             <a:avLst/>
@@ -4670,7 +4741,7 @@
             <a:noFill/>
           </a:ln>
           <a:effectLst>
-            <a:outerShdw dist="80498" dir="9206096" blurRad="101520" rotWithShape="0">
+            <a:outerShdw blurRad="101520" dir="9206096" dist="80498" rotWithShape="0">
               <a:srgbClr val="333333">
                 <a:alpha val="65000"/>
               </a:srgbClr>
@@ -4717,7 +4788,7 @@
         <p:spPr>
           <a:xfrm>
             <a:off x="640080" y="685800"/>
-            <a:ext cx="8777880" cy="1371240"/>
+            <a:ext cx="8777520" cy="1370880"/>
           </a:xfrm>
           <a:prstGeom prst="rect">
             <a:avLst/>
@@ -4731,7 +4802,7 @@
             </a:solidFill>
           </a:ln>
           <a:effectLst>
-            <a:outerShdw dist="50911" dir="8100000" blurRad="101520" rotWithShape="0">
+            <a:outerShdw blurRad="101520" dir="8100000" dist="50402" rotWithShape="0">
               <a:srgbClr val="666666">
                 <a:alpha val="65000"/>
               </a:srgbClr>
@@ -4779,7 +4850,7 @@
         <p:spPr>
           <a:xfrm>
             <a:off x="640080" y="2286000"/>
-            <a:ext cx="8777880" cy="4114440"/>
+            <a:ext cx="8777520" cy="4114080"/>
           </a:xfrm>
           <a:prstGeom prst="rect">
             <a:avLst/>
@@ -4793,7 +4864,7 @@
             </a:solidFill>
           </a:ln>
           <a:effectLst>
-            <a:outerShdw dist="50911" dir="8100000" blurRad="101520" rotWithShape="0">
+            <a:outerShdw blurRad="101520" dir="8100000" dist="50402" rotWithShape="0">
               <a:srgbClr val="666666">
                 <a:alpha val="65000"/>
               </a:srgbClr>
@@ -4841,7 +4912,7 @@
         <p:spPr>
           <a:xfrm>
             <a:off x="640080" y="685800"/>
-            <a:ext cx="8777880" cy="1369800"/>
+            <a:ext cx="8777520" cy="1369800"/>
           </a:xfrm>
           <a:prstGeom prst="rect">
             <a:avLst/>
@@ -4851,7 +4922,7 @@
             <a:noFill/>
           </a:ln>
           <a:effectLst>
-            <a:outerShdw dist="50911" dir="8100000" blurRad="101520" rotWithShape="0">
+            <a:outerShdw blurRad="101520" dir="8100000" dist="50402" rotWithShape="0">
               <a:srgbClr val="666666">
                 <a:alpha val="65000"/>
               </a:srgbClr>
@@ -4880,6 +4951,7 @@
                   <a:srgbClr val="ffffff"/>
                 </a:solidFill>
                 <a:latin typeface="Arial"/>
+                <a:ea typeface="DejaVu Sans"/>
               </a:rPr>
               <a:t>Initial inspection of stock on hand by warehouse location</a:t>
             </a:r>
@@ -4901,7 +4973,7 @@
         <p:spPr>
           <a:xfrm>
             <a:off x="698400" y="2300760"/>
-            <a:ext cx="8777880" cy="760680"/>
+            <a:ext cx="8777520" cy="759960"/>
           </a:xfrm>
           <a:prstGeom prst="rect">
             <a:avLst/>
@@ -4911,7 +4983,7 @@
             <a:noFill/>
           </a:ln>
           <a:effectLst>
-            <a:outerShdw dist="50911" dir="8100000" blurRad="101520" rotWithShape="0">
+            <a:outerShdw blurRad="101520" dir="8100000" dist="50402" rotWithShape="0">
               <a:srgbClr val="666666">
                 <a:alpha val="65000"/>
               </a:srgbClr>
@@ -4940,6 +5012,7 @@
                   <a:srgbClr val="ffffff"/>
                 </a:solidFill>
                 <a:latin typeface="Arial"/>
+                <a:ea typeface="DejaVu Sans"/>
               </a:rPr>
               <a:t>- The first thing to check is the distribution of product stock according to which warehouse location the stock is being stored.</a:t>
             </a:r>
@@ -4965,7 +5038,7 @@
         <p:spPr>
           <a:xfrm>
             <a:off x="1260000" y="3240000"/>
-            <a:ext cx="7560000" cy="3051000"/>
+            <a:ext cx="7559640" cy="3050640"/>
           </a:xfrm>
           <a:prstGeom prst="rect">
             <a:avLst/>
@@ -4974,7 +5047,7 @@
             <a:noFill/>
           </a:ln>
           <a:effectLst>
-            <a:outerShdw dist="80498" dir="9206096" blurRad="101520" rotWithShape="0">
+            <a:outerShdw blurRad="101520" dir="9206096" dist="80498" rotWithShape="0">
               <a:srgbClr val="333333">
                 <a:alpha val="65000"/>
               </a:srgbClr>
@@ -5021,7 +5094,7 @@
         <p:spPr>
           <a:xfrm>
             <a:off x="640080" y="685800"/>
-            <a:ext cx="8777880" cy="1371240"/>
+            <a:ext cx="8777520" cy="1370880"/>
           </a:xfrm>
           <a:prstGeom prst="rect">
             <a:avLst/>
@@ -5035,7 +5108,7 @@
             </a:solidFill>
           </a:ln>
           <a:effectLst>
-            <a:outerShdw dist="50911" dir="8100000" blurRad="101520" rotWithShape="0">
+            <a:outerShdw blurRad="101520" dir="8100000" dist="50402" rotWithShape="0">
               <a:srgbClr val="666666">
                 <a:alpha val="65000"/>
               </a:srgbClr>
@@ -5059,6 +5132,11 @@
             <a:noAutofit/>
           </a:bodyPr>
           <a:p>
+            <a:pPr>
+              <a:lnSpc>
+                <a:spcPct val="100000"/>
+              </a:lnSpc>
+            </a:pPr>
             <a:endParaRPr b="0" lang="en-CA" sz="1800" spc="-1" strike="noStrike">
               <a:solidFill>
                 <a:schemeClr val="lt1"/>
@@ -5078,7 +5156,7 @@
         <p:spPr>
           <a:xfrm>
             <a:off x="640080" y="2286000"/>
-            <a:ext cx="8777880" cy="4114440"/>
+            <a:ext cx="8777520" cy="4114080"/>
           </a:xfrm>
           <a:prstGeom prst="rect">
             <a:avLst/>
@@ -5092,7 +5170,7 @@
             </a:solidFill>
           </a:ln>
           <a:effectLst>
-            <a:outerShdw dist="50911" dir="8100000" blurRad="101520" rotWithShape="0">
+            <a:outerShdw blurRad="101520" dir="8100000" dist="50402" rotWithShape="0">
               <a:srgbClr val="666666">
                 <a:alpha val="65000"/>
               </a:srgbClr>
@@ -5116,6 +5194,11 @@
             <a:noAutofit/>
           </a:bodyPr>
           <a:p>
+            <a:pPr>
+              <a:lnSpc>
+                <a:spcPct val="100000"/>
+              </a:lnSpc>
+            </a:pPr>
             <a:endParaRPr b="0" lang="en-CA" sz="1800" spc="-1" strike="noStrike">
               <a:solidFill>
                 <a:schemeClr val="lt1"/>
@@ -5135,7 +5218,7 @@
         <p:spPr>
           <a:xfrm>
             <a:off x="640080" y="900000"/>
-            <a:ext cx="8777880" cy="821880"/>
+            <a:ext cx="8777520" cy="821160"/>
           </a:xfrm>
           <a:prstGeom prst="rect">
             <a:avLst/>
@@ -5145,7 +5228,7 @@
             <a:noFill/>
           </a:ln>
           <a:effectLst>
-            <a:outerShdw dist="50911" dir="8100000" blurRad="101520" rotWithShape="0">
+            <a:outerShdw blurRad="101520" dir="8100000" dist="50402" rotWithShape="0">
               <a:srgbClr val="666666">
                 <a:alpha val="65000"/>
               </a:srgbClr>
@@ -5174,6 +5257,7 @@
                   <a:srgbClr val="ffffff"/>
                 </a:solidFill>
                 <a:latin typeface="Arial"/>
+                <a:ea typeface="DejaVu Sans"/>
               </a:rPr>
               <a:t>Warehouse Shipping Efficiency</a:t>
             </a:r>
@@ -5195,7 +5279,7 @@
         <p:spPr>
           <a:xfrm>
             <a:off x="640080" y="2491200"/>
-            <a:ext cx="8777880" cy="821160"/>
+            <a:ext cx="8777520" cy="821160"/>
           </a:xfrm>
           <a:prstGeom prst="rect">
             <a:avLst/>
@@ -5205,7 +5289,7 @@
             <a:noFill/>
           </a:ln>
           <a:effectLst>
-            <a:outerShdw dist="50911" dir="8100000" blurRad="101520" rotWithShape="0">
+            <a:outerShdw blurRad="101520" dir="8100000" dist="50402" rotWithShape="0">
               <a:srgbClr val="666666">
                 <a:alpha val="65000"/>
               </a:srgbClr>
@@ -5234,6 +5318,7 @@
                   <a:srgbClr val="ffffff"/>
                 </a:solidFill>
                 <a:latin typeface="Arial"/>
+                <a:ea typeface="DejaVu Sans"/>
               </a:rPr>
               <a:t>- Warehouse 'B' has proportionally more One-Day shipping delays than warehouse 'C'.</a:t>
             </a:r>
@@ -5259,7 +5344,7 @@
         <p:spPr>
           <a:xfrm>
             <a:off x="1080000" y="3656520"/>
-            <a:ext cx="7920000" cy="2562120"/>
+            <a:ext cx="7919640" cy="2561760"/>
           </a:xfrm>
           <a:prstGeom prst="rect">
             <a:avLst/>
@@ -5268,7 +5353,7 @@
             <a:noFill/>
           </a:ln>
           <a:effectLst>
-            <a:outerShdw dist="80498" dir="9206096" blurRad="101520" rotWithShape="0">
+            <a:outerShdw blurRad="101520" dir="9206096" dist="80498" rotWithShape="0">
               <a:srgbClr val="333333">
                 <a:alpha val="65000"/>
               </a:srgbClr>
@@ -5308,14 +5393,14 @@
       </p:grpSpPr>
       <p:sp>
         <p:nvSpPr>
-          <p:cNvPr id="113" name="Rectangle 21"/>
+          <p:cNvPr id="113" name="Rectangle 23"/>
           <p:cNvSpPr/>
           <p:nvPr/>
         </p:nvSpPr>
         <p:spPr>
           <a:xfrm>
             <a:off x="640080" y="685800"/>
-            <a:ext cx="8777880" cy="1371240"/>
+            <a:ext cx="8777520" cy="1370880"/>
           </a:xfrm>
           <a:prstGeom prst="rect">
             <a:avLst/>
@@ -5329,7 +5414,7 @@
             </a:solidFill>
           </a:ln>
           <a:effectLst>
-            <a:outerShdw dist="50911" dir="8100000" blurRad="101520" rotWithShape="0">
+            <a:outerShdw blurRad="101520" dir="8100000" dist="50402" rotWithShape="0">
               <a:srgbClr val="666666">
                 <a:alpha val="65000"/>
               </a:srgbClr>
@@ -5353,6 +5438,11 @@
             <a:noAutofit/>
           </a:bodyPr>
           <a:p>
+            <a:pPr>
+              <a:lnSpc>
+                <a:spcPct val="100000"/>
+              </a:lnSpc>
+            </a:pPr>
             <a:endParaRPr b="0" lang="en-CA" sz="1800" spc="-1" strike="noStrike">
               <a:solidFill>
                 <a:schemeClr val="lt1"/>
@@ -5365,14 +5455,14 @@
       </p:sp>
       <p:sp>
         <p:nvSpPr>
-          <p:cNvPr id="114" name="Rectangle 22"/>
+          <p:cNvPr id="114" name="Rectangle 24"/>
           <p:cNvSpPr/>
           <p:nvPr/>
         </p:nvSpPr>
         <p:spPr>
           <a:xfrm>
             <a:off x="640080" y="2286000"/>
-            <a:ext cx="8777880" cy="4114440"/>
+            <a:ext cx="8777520" cy="4114080"/>
           </a:xfrm>
           <a:prstGeom prst="rect">
             <a:avLst/>
@@ -5386,7 +5476,7 @@
             </a:solidFill>
           </a:ln>
           <a:effectLst>
-            <a:outerShdw dist="50911" dir="8100000" blurRad="101520" rotWithShape="0">
+            <a:outerShdw blurRad="101520" dir="8100000" dist="50402" rotWithShape="0">
               <a:srgbClr val="666666">
                 <a:alpha val="65000"/>
               </a:srgbClr>
@@ -5410,6 +5500,11 @@
             <a:noAutofit/>
           </a:bodyPr>
           <a:p>
+            <a:pPr>
+              <a:lnSpc>
+                <a:spcPct val="100000"/>
+              </a:lnSpc>
+            </a:pPr>
             <a:endParaRPr b="0" lang="en-CA" sz="1800" spc="-1" strike="noStrike">
               <a:solidFill>
                 <a:schemeClr val="lt1"/>
@@ -5422,14 +5517,14 @@
       </p:sp>
       <p:sp>
         <p:nvSpPr>
-          <p:cNvPr id="115" name="TextBox 25"/>
+          <p:cNvPr id="115" name="TextBox 23"/>
           <p:cNvSpPr/>
           <p:nvPr/>
         </p:nvSpPr>
         <p:spPr>
           <a:xfrm>
             <a:off x="640080" y="900000"/>
-            <a:ext cx="8777880" cy="821880"/>
+            <a:ext cx="8777520" cy="821160"/>
           </a:xfrm>
           <a:prstGeom prst="rect">
             <a:avLst/>
@@ -5439,7 +5534,7 @@
             <a:noFill/>
           </a:ln>
           <a:effectLst>
-            <a:outerShdw dist="50911" dir="8100000" blurRad="101520" rotWithShape="0">
+            <a:outerShdw blurRad="101520" dir="8100000" dist="50402" rotWithShape="0">
               <a:srgbClr val="666666">
                 <a:alpha val="65000"/>
               </a:srgbClr>
@@ -5468,6 +5563,7 @@
                   <a:srgbClr val="ffffff"/>
                 </a:solidFill>
                 <a:latin typeface="Arial"/>
+                <a:ea typeface="DejaVu Sans"/>
               </a:rPr>
               <a:t>Warehouse Shipping Efficiency</a:t>
             </a:r>
@@ -5482,14 +5578,14 @@
       </p:sp>
       <p:sp>
         <p:nvSpPr>
-          <p:cNvPr id="116" name="TextBox 26"/>
-          <p:cNvSpPr/>
-          <p:nvPr/>
-        </p:nvSpPr>
-        <p:spPr>
-          <a:xfrm>
-            <a:off x="640080" y="2359440"/>
-            <a:ext cx="8777880" cy="1095840"/>
+          <p:cNvPr id="116" name="TextBox 24"/>
+          <p:cNvSpPr/>
+          <p:nvPr/>
+        </p:nvSpPr>
+        <p:spPr>
+          <a:xfrm>
+            <a:off x="640080" y="2286000"/>
+            <a:ext cx="8777520" cy="1369800"/>
           </a:xfrm>
           <a:prstGeom prst="rect">
             <a:avLst/>
@@ -5499,7 +5595,7 @@
             <a:noFill/>
           </a:ln>
           <a:effectLst>
-            <a:outerShdw dist="50911" dir="8100000" blurRad="101520" rotWithShape="0">
+            <a:outerShdw blurRad="101520" dir="8100000" dist="50402" rotWithShape="0">
               <a:srgbClr val="666666">
                 <a:alpha val="65000"/>
               </a:srgbClr>
@@ -5523,15 +5619,16 @@
               </a:lnSpc>
             </a:pPr>
             <a:r>
-              <a:rPr b="0" lang="en-CA" sz="2200" spc="-1" strike="noStrike">
+              <a:rPr b="0" lang="en-CA" sz="2100" spc="-1" strike="noStrike">
                 <a:solidFill>
                   <a:srgbClr val="ffffff"/>
                 </a:solidFill>
                 <a:latin typeface="Arial"/>
+                <a:ea typeface="DejaVu Sans"/>
               </a:rPr>
-              <a:t>- If warehouse 'C' were to be moved into warehouse 'B' then warehouse 'B' must be able to accommodate the extra orders each day.</a:t>
+              <a:t>- If the One-Day and Two-Day shipping delays associated with warehouse 'B' are the result of order volume, staffing, or warehouse operations efficiency, then these potential bottlenecks should be rectified prior to moving extra inventory into warehouse 'B'.</a:t>
             </a:r>
-            <a:endParaRPr b="0" lang="en-CA" sz="2200" spc="-1" strike="noStrike">
+            <a:endParaRPr b="0" lang="en-CA" sz="2100" spc="-1" strike="noStrike">
               <a:solidFill>
                 <a:srgbClr val="000000"/>
               </a:solidFill>
@@ -5542,7 +5639,7 @@
       </p:sp>
       <p:pic>
         <p:nvPicPr>
-          <p:cNvPr id="117" name="Picture 12" descr="output_58_0.png"/>
+          <p:cNvPr id="117" name="Picture 13" descr="output_58_0.png"/>
           <p:cNvPicPr/>
           <p:nvPr/>
         </p:nvPicPr>
@@ -5553,7 +5650,7 @@
         <p:spPr>
           <a:xfrm>
             <a:off x="1080000" y="3656520"/>
-            <a:ext cx="7920000" cy="2562120"/>
+            <a:ext cx="7919640" cy="2561760"/>
           </a:xfrm>
           <a:prstGeom prst="rect">
             <a:avLst/>
@@ -5562,7 +5659,7 @@
             <a:noFill/>
           </a:ln>
           <a:effectLst>
-            <a:outerShdw dist="80498" dir="9206096" blurRad="101520" rotWithShape="0">
+            <a:outerShdw blurRad="101520" dir="9206096" dist="80498" rotWithShape="0">
               <a:srgbClr val="333333">
                 <a:alpha val="65000"/>
               </a:srgbClr>
@@ -5602,14 +5699,14 @@
       </p:grpSpPr>
       <p:sp>
         <p:nvSpPr>
-          <p:cNvPr id="118" name="Rectangle 23"/>
+          <p:cNvPr id="118" name="Rectangle 1"/>
           <p:cNvSpPr/>
           <p:nvPr/>
         </p:nvSpPr>
         <p:spPr>
           <a:xfrm>
             <a:off x="640080" y="685800"/>
-            <a:ext cx="8777880" cy="1371240"/>
+            <a:ext cx="8777520" cy="1370880"/>
           </a:xfrm>
           <a:prstGeom prst="rect">
             <a:avLst/>
@@ -5623,7 +5720,7 @@
             </a:solidFill>
           </a:ln>
           <a:effectLst>
-            <a:outerShdw dist="50911" dir="8100000" blurRad="101520" rotWithShape="0">
+            <a:outerShdw blurRad="101520" dir="8100000" dist="50402" rotWithShape="0">
               <a:srgbClr val="666666">
                 <a:alpha val="65000"/>
               </a:srgbClr>
@@ -5647,6 +5744,11 @@
             <a:noAutofit/>
           </a:bodyPr>
           <a:p>
+            <a:pPr algn="ctr">
+              <a:lnSpc>
+                <a:spcPct val="100000"/>
+              </a:lnSpc>
+            </a:pPr>
             <a:endParaRPr b="0" lang="en-CA" sz="1800" spc="-1" strike="noStrike">
               <a:solidFill>
                 <a:schemeClr val="lt1"/>
@@ -5659,14 +5761,14 @@
       </p:sp>
       <p:sp>
         <p:nvSpPr>
-          <p:cNvPr id="119" name="Rectangle 24"/>
+          <p:cNvPr id="119" name="Rectangle 2"/>
           <p:cNvSpPr/>
           <p:nvPr/>
         </p:nvSpPr>
         <p:spPr>
           <a:xfrm>
             <a:off x="640080" y="2286000"/>
-            <a:ext cx="8777880" cy="4114440"/>
+            <a:ext cx="8777520" cy="4114080"/>
           </a:xfrm>
           <a:prstGeom prst="rect">
             <a:avLst/>
@@ -5680,7 +5782,7 @@
             </a:solidFill>
           </a:ln>
           <a:effectLst>
-            <a:outerShdw dist="50911" dir="8100000" blurRad="101520" rotWithShape="0">
+            <a:outerShdw blurRad="101520" dir="8100000" dist="50402" rotWithShape="0">
               <a:srgbClr val="666666">
                 <a:alpha val="65000"/>
               </a:srgbClr>
@@ -5704,6 +5806,11 @@
             <a:noAutofit/>
           </a:bodyPr>
           <a:p>
+            <a:pPr algn="ctr">
+              <a:lnSpc>
+                <a:spcPct val="100000"/>
+              </a:lnSpc>
+            </a:pPr>
             <a:endParaRPr b="0" lang="en-CA" sz="1800" spc="-1" strike="noStrike">
               <a:solidFill>
                 <a:schemeClr val="lt1"/>
@@ -5716,14 +5823,14 @@
       </p:sp>
       <p:sp>
         <p:nvSpPr>
-          <p:cNvPr id="120" name="TextBox 23"/>
-          <p:cNvSpPr/>
-          <p:nvPr/>
-        </p:nvSpPr>
-        <p:spPr>
-          <a:xfrm>
-            <a:off x="640080" y="900000"/>
-            <a:ext cx="8777880" cy="821880"/>
+          <p:cNvPr id="120" name="TextBox 3"/>
+          <p:cNvSpPr/>
+          <p:nvPr/>
+        </p:nvSpPr>
+        <p:spPr>
+          <a:xfrm>
+            <a:off x="640080" y="887400"/>
+            <a:ext cx="8777520" cy="912600"/>
           </a:xfrm>
           <a:prstGeom prst="rect">
             <a:avLst/>
@@ -5733,7 +5840,7 @@
             <a:noFill/>
           </a:ln>
           <a:effectLst>
-            <a:outerShdw dist="50911" dir="8100000" blurRad="101520" rotWithShape="0">
+            <a:outerShdw blurRad="101520" dir="8100000" dist="50402" rotWithShape="0">
               <a:srgbClr val="666666">
                 <a:alpha val="65000"/>
               </a:srgbClr>
@@ -5757,33 +5864,34 @@
               </a:lnSpc>
             </a:pPr>
             <a:r>
-              <a:rPr b="0" lang="en-CA" sz="4800" spc="-1" strike="noStrike">
+              <a:rPr b="0" lang="en-CA" sz="5400" spc="-1" strike="noStrike">
                 <a:solidFill>
                   <a:srgbClr val="ffffff"/>
                 </a:solidFill>
                 <a:latin typeface="Arial"/>
+                <a:ea typeface="DejaVu Sans"/>
               </a:rPr>
-              <a:t>Warehouse Shipping Efficiency</a:t>
+              <a:t>Next Steps:</a:t>
             </a:r>
-            <a:endParaRPr b="0" lang="en-CA" sz="4800" spc="-1" strike="noStrike">
-              <a:solidFill>
-                <a:srgbClr val="000000"/>
-              </a:solidFill>
-              <a:latin typeface="Arial"/>
-            </a:endParaRPr>
-          </a:p>
-        </p:txBody>
-      </p:sp>
-      <p:sp>
-        <p:nvSpPr>
-          <p:cNvPr id="121" name="TextBox 24"/>
+            <a:endParaRPr b="0" lang="en-CA" sz="5400" spc="-1" strike="noStrike">
+              <a:solidFill>
+                <a:srgbClr val="000000"/>
+              </a:solidFill>
+              <a:latin typeface="Arial"/>
+            </a:endParaRPr>
+          </a:p>
+        </p:txBody>
+      </p:sp>
+      <p:sp>
+        <p:nvSpPr>
+          <p:cNvPr id="121" name="TextBox 4"/>
           <p:cNvSpPr/>
           <p:nvPr/>
         </p:nvSpPr>
         <p:spPr>
           <a:xfrm>
             <a:off x="640080" y="2286000"/>
-            <a:ext cx="8777880" cy="1370520"/>
+            <a:ext cx="8777520" cy="759960"/>
           </a:xfrm>
           <a:prstGeom prst="rect">
             <a:avLst/>
@@ -5793,7 +5901,7 @@
             <a:noFill/>
           </a:ln>
           <a:effectLst>
-            <a:outerShdw dist="50911" dir="8100000" blurRad="101520" rotWithShape="0">
+            <a:outerShdw blurRad="101520" dir="8100000" dist="50402" rotWithShape="0">
               <a:srgbClr val="666666">
                 <a:alpha val="65000"/>
               </a:srgbClr>
@@ -5817,53 +5925,157 @@
               </a:lnSpc>
             </a:pPr>
             <a:r>
-              <a:rPr b="0" lang="en-CA" sz="2100" spc="-1" strike="noStrike">
+              <a:rPr b="0" lang="en-CA" sz="2200" spc="-1" strike="noStrike">
                 <a:solidFill>
                   <a:srgbClr val="ffffff"/>
                 </a:solidFill>
                 <a:latin typeface="Arial"/>
+                <a:ea typeface="DejaVu Sans"/>
               </a:rPr>
-              <a:t>- If the One-Day and Two-Day shipping delays associated with warehouse 'B' are the result of order volume, staffing, or warehouse operations efficiency, then these potential bottlenecks should be rectified prior to moving extra inventory into warehouse 'B'.</a:t>
+              <a:t>Compare the actual volumes of Warehouse B and Warehouse C against the estimated model</a:t>
             </a:r>
-            <a:endParaRPr b="0" lang="en-CA" sz="2100" spc="-1" strike="noStrike">
-              <a:solidFill>
-                <a:srgbClr val="000000"/>
-              </a:solidFill>
-              <a:latin typeface="Arial"/>
-            </a:endParaRPr>
-          </a:p>
-        </p:txBody>
-      </p:sp>
-      <p:pic>
-        <p:nvPicPr>
-          <p:cNvPr id="122" name="Picture 13" descr="output_58_0.png"/>
-          <p:cNvPicPr/>
-          <p:nvPr/>
-        </p:nvPicPr>
-        <p:blipFill>
-          <a:blip r:embed="rId1"/>
-          <a:stretch/>
-        </p:blipFill>
-        <p:spPr>
-          <a:xfrm>
-            <a:off x="1080000" y="3656520"/>
-            <a:ext cx="7920000" cy="2562120"/>
-          </a:xfrm>
-          <a:prstGeom prst="rect">
-            <a:avLst/>
-          </a:prstGeom>
+            <a:endParaRPr b="0" lang="en-CA" sz="2200" spc="-1" strike="noStrike">
+              <a:solidFill>
+                <a:srgbClr val="000000"/>
+              </a:solidFill>
+              <a:latin typeface="Arial"/>
+            </a:endParaRPr>
+          </a:p>
+        </p:txBody>
+      </p:sp>
+      <p:sp>
+        <p:nvSpPr>
+          <p:cNvPr id="122" name="TextBox 5"/>
+          <p:cNvSpPr/>
+          <p:nvPr/>
+        </p:nvSpPr>
+        <p:spPr>
+          <a:xfrm>
+            <a:off x="860040" y="3063600"/>
+            <a:ext cx="8417520" cy="3290040"/>
+          </a:xfrm>
+          <a:prstGeom prst="rect">
+            <a:avLst/>
+          </a:prstGeom>
+          <a:noFill/>
           <a:ln w="0">
             <a:noFill/>
           </a:ln>
           <a:effectLst>
-            <a:outerShdw dist="80498" dir="9206096" blurRad="101520" rotWithShape="0">
-              <a:srgbClr val="333333">
-                <a:alpha val="65000"/>
-              </a:srgbClr>
-            </a:outerShdw>
-          </a:effectLst>
-        </p:spPr>
-      </p:pic>
+            <a:outerShdw blurRad="101520" dir="8100000" dist="50402" rotWithShape="0">
+              <a:srgbClr val="666666">
+                <a:alpha val="65000"/>
+              </a:srgbClr>
+            </a:outerShdw>
+          </a:effectLst>
+        </p:spPr>
+        <p:style>
+          <a:lnRef idx="0"/>
+          <a:fillRef idx="0"/>
+          <a:effectRef idx="0"/>
+          <a:fontRef idx="minor"/>
+        </p:style>
+        <p:txBody>
+          <a:bodyPr lIns="90000" rIns="90000" tIns="45000" bIns="45000" anchor="t">
+            <a:spAutoFit/>
+          </a:bodyPr>
+          <a:p>
+            <a:pPr algn="just">
+              <a:lnSpc>
+                <a:spcPct val="100000"/>
+              </a:lnSpc>
+            </a:pPr>
+            <a:r>
+              <a:rPr b="0" lang="en-CA" sz="1800" spc="-1" strike="noStrike">
+                <a:solidFill>
+                  <a:srgbClr val="ffffff"/>
+                </a:solidFill>
+                <a:latin typeface="Arial"/>
+                <a:ea typeface="DejaVu Sans"/>
+              </a:rPr>
+              <a:t>- It is extremely important to remember that the amount of space that any given portion of inventory shall occupy has been estimated here without the spacial burden of the items' packaging.</a:t>
+            </a:r>
+            <a:endParaRPr b="0" lang="en-CA" sz="1800" spc="-1" strike="noStrike">
+              <a:solidFill>
+                <a:srgbClr val="000000"/>
+              </a:solidFill>
+              <a:latin typeface="Arial"/>
+            </a:endParaRPr>
+          </a:p>
+          <a:p>
+            <a:pPr algn="just">
+              <a:lnSpc>
+                <a:spcPct val="100000"/>
+              </a:lnSpc>
+            </a:pPr>
+            <a:endParaRPr b="0" lang="en-CA" sz="600" spc="-1" strike="noStrike">
+              <a:solidFill>
+                <a:srgbClr val="000000"/>
+              </a:solidFill>
+              <a:latin typeface="Arial"/>
+            </a:endParaRPr>
+          </a:p>
+          <a:p>
+            <a:pPr algn="just">
+              <a:lnSpc>
+                <a:spcPct val="100000"/>
+              </a:lnSpc>
+            </a:pPr>
+            <a:r>
+              <a:rPr b="0" lang="en-CA" sz="1800" spc="-1" strike="noStrike">
+                <a:solidFill>
+                  <a:srgbClr val="ffffff"/>
+                </a:solidFill>
+                <a:latin typeface="Arial"/>
+                <a:ea typeface="DejaVu Sans"/>
+              </a:rPr>
+              <a:t>- It would be unsurprising to discover that the smaller scale models of current Warehouse C have proportionally more packaging than the somewhat larger models currently occupying Warehouse B.</a:t>
+            </a:r>
+            <a:endParaRPr b="0" lang="en-CA" sz="1800" spc="-1" strike="noStrike">
+              <a:solidFill>
+                <a:srgbClr val="000000"/>
+              </a:solidFill>
+              <a:latin typeface="Arial"/>
+            </a:endParaRPr>
+          </a:p>
+          <a:p>
+            <a:pPr algn="just">
+              <a:lnSpc>
+                <a:spcPct val="100000"/>
+              </a:lnSpc>
+            </a:pPr>
+            <a:endParaRPr b="0" lang="en-CA" sz="600" spc="-1" strike="noStrike">
+              <a:solidFill>
+                <a:srgbClr val="000000"/>
+              </a:solidFill>
+              <a:latin typeface="Arial"/>
+            </a:endParaRPr>
+          </a:p>
+          <a:p>
+            <a:pPr algn="just">
+              <a:lnSpc>
+                <a:spcPct val="100000"/>
+              </a:lnSpc>
+            </a:pPr>
+            <a:r>
+              <a:rPr b="0" lang="en-CA" sz="1800" spc="-1" strike="noStrike">
+                <a:solidFill>
+                  <a:srgbClr val="ffffff"/>
+                </a:solidFill>
+                <a:latin typeface="Arial"/>
+                <a:ea typeface="DejaVu Sans"/>
+              </a:rPr>
+              <a:t>- Both Warehouse B and Warehouse C will, in reality, be much larger than the generated volumes which were used to compare warehouse capacities.  Comparing the ratio of (Actual:Estimated) warehouse volume for each warehouse could possibly be used in lieu of ascertaining complete product packaging size information.</a:t>
+            </a:r>
+            <a:endParaRPr b="0" lang="en-CA" sz="1800" spc="-1" strike="noStrike">
+              <a:solidFill>
+                <a:srgbClr val="000000"/>
+              </a:solidFill>
+              <a:latin typeface="Arial"/>
+            </a:endParaRPr>
+          </a:p>
+        </p:txBody>
+      </p:sp>
     </p:spTree>
   </p:cSld>
   <mc:AlternateContent>
@@ -5903,7 +6115,7 @@
         <p:spPr>
           <a:xfrm>
             <a:off x="640080" y="685800"/>
-            <a:ext cx="8777880" cy="1371240"/>
+            <a:ext cx="8777520" cy="1370880"/>
           </a:xfrm>
           <a:prstGeom prst="rect">
             <a:avLst/>
@@ -5917,7 +6129,7 @@
             </a:solidFill>
           </a:ln>
           <a:effectLst>
-            <a:outerShdw dist="50911" dir="8100000" blurRad="101520" rotWithShape="0">
+            <a:outerShdw blurRad="101520" dir="8100000" dist="50402" rotWithShape="0">
               <a:srgbClr val="666666">
                 <a:alpha val="65000"/>
               </a:srgbClr>
@@ -5965,7 +6177,7 @@
         <p:spPr>
           <a:xfrm>
             <a:off x="640080" y="2286000"/>
-            <a:ext cx="8777880" cy="4114440"/>
+            <a:ext cx="8777520" cy="4114080"/>
           </a:xfrm>
           <a:prstGeom prst="rect">
             <a:avLst/>
@@ -5979,7 +6191,7 @@
             </a:solidFill>
           </a:ln>
           <a:effectLst>
-            <a:outerShdw dist="50911" dir="8100000" blurRad="101520" rotWithShape="0">
+            <a:outerShdw blurRad="101520" dir="8100000" dist="50402" rotWithShape="0">
               <a:srgbClr val="666666">
                 <a:alpha val="65000"/>
               </a:srgbClr>
@@ -6027,7 +6239,7 @@
         <p:spPr>
           <a:xfrm>
             <a:off x="640080" y="887400"/>
-            <a:ext cx="8777880" cy="912600"/>
+            <a:ext cx="8777520" cy="912600"/>
           </a:xfrm>
           <a:prstGeom prst="rect">
             <a:avLst/>
@@ -6037,7 +6249,7 @@
             <a:noFill/>
           </a:ln>
           <a:effectLst>
-            <a:outerShdw dist="50911" dir="8100000" blurRad="101520" rotWithShape="0">
+            <a:outerShdw blurRad="101520" dir="8100000" dist="50402" rotWithShape="0">
               <a:srgbClr val="666666">
                 <a:alpha val="65000"/>
               </a:srgbClr>
@@ -6066,6 +6278,7 @@
                   <a:srgbClr val="ffffff"/>
                 </a:solidFill>
                 <a:latin typeface="Arial"/>
+                <a:ea typeface="DejaVu Sans"/>
               </a:rPr>
               <a:t>Next Steps:</a:t>
             </a:r>
@@ -6087,7 +6300,7 @@
         <p:spPr>
           <a:xfrm>
             <a:off x="640080" y="2286000"/>
-            <a:ext cx="8777880" cy="759960"/>
+            <a:ext cx="8777520" cy="759960"/>
           </a:xfrm>
           <a:prstGeom prst="rect">
             <a:avLst/>
@@ -6097,7 +6310,7 @@
             <a:noFill/>
           </a:ln>
           <a:effectLst>
-            <a:outerShdw dist="50911" dir="8100000" blurRad="101520" rotWithShape="0">
+            <a:outerShdw blurRad="101520" dir="8100000" dist="50402" rotWithShape="0">
               <a:srgbClr val="666666">
                 <a:alpha val="65000"/>
               </a:srgbClr>
@@ -6126,8 +6339,9 @@
                   <a:srgbClr val="ffffff"/>
                 </a:solidFill>
                 <a:latin typeface="Arial"/>
+                <a:ea typeface="DejaVu Sans"/>
               </a:rPr>
-              <a:t>Compare the actual volumes of Warehouse B and Warehouse C against the estimated model</a:t>
+              <a:t>Look into the reasons why some items have incredibly low inventory stock</a:t>
             </a:r>
             <a:endParaRPr b="0" lang="en-CA" sz="2200" spc="-1" strike="noStrike">
               <a:solidFill>
@@ -6146,8 +6360,8 @@
         </p:nvSpPr>
         <p:spPr>
           <a:xfrm>
-            <a:off x="860040" y="3063600"/>
-            <a:ext cx="8417880" cy="3290040"/>
+            <a:off x="1050840" y="3176640"/>
+            <a:ext cx="8337600" cy="2512800"/>
           </a:xfrm>
           <a:prstGeom prst="rect">
             <a:avLst/>
@@ -6157,7 +6371,7 @@
             <a:noFill/>
           </a:ln>
           <a:effectLst>
-            <a:outerShdw dist="50911" dir="8100000" blurRad="101520" rotWithShape="0">
+            <a:outerShdw blurRad="101520" dir="8100000" dist="50402" rotWithShape="0">
               <a:srgbClr val="666666">
                 <a:alpha val="65000"/>
               </a:srgbClr>
@@ -6175,29 +6389,30 @@
             <a:spAutoFit/>
           </a:bodyPr>
           <a:p>
-            <a:pPr algn="just">
+            <a:pPr>
               <a:lnSpc>
                 <a:spcPct val="100000"/>
               </a:lnSpc>
             </a:pPr>
             <a:r>
-              <a:rPr b="0" lang="en-CA" sz="1800" spc="-1" strike="noStrike">
+              <a:rPr b="0" lang="en-CA" sz="2100" spc="-1" strike="noStrike">
                 <a:solidFill>
                   <a:srgbClr val="ffffff"/>
                 </a:solidFill>
                 <a:latin typeface="Arial"/>
+                <a:ea typeface="DejaVu Sans"/>
               </a:rPr>
-              <a:t>- It is extremely important to remember that the amount of space that any given portion of inventory shall occupy has been estimated here without the spacial burden of the items' packaging.</a:t>
+              <a:t>- Are any of these items no longer available or difficult to acquire from the manufacturer?</a:t>
             </a:r>
-            <a:endParaRPr b="0" lang="en-CA" sz="1800" spc="-1" strike="noStrike">
-              <a:solidFill>
-                <a:srgbClr val="000000"/>
-              </a:solidFill>
-              <a:latin typeface="Arial"/>
-            </a:endParaRPr>
-          </a:p>
-          <a:p>
-            <a:pPr algn="just">
+            <a:endParaRPr b="0" lang="en-CA" sz="2100" spc="-1" strike="noStrike">
+              <a:solidFill>
+                <a:srgbClr val="000000"/>
+              </a:solidFill>
+              <a:latin typeface="Arial"/>
+            </a:endParaRPr>
+          </a:p>
+          <a:p>
+            <a:pPr>
               <a:lnSpc>
                 <a:spcPct val="100000"/>
               </a:lnSpc>
@@ -6210,29 +6425,30 @@
             </a:endParaRPr>
           </a:p>
           <a:p>
-            <a:pPr algn="just">
+            <a:pPr>
               <a:lnSpc>
                 <a:spcPct val="100000"/>
               </a:lnSpc>
             </a:pPr>
             <a:r>
-              <a:rPr b="0" lang="en-CA" sz="1800" spc="-1" strike="noStrike">
+              <a:rPr b="0" lang="en-CA" sz="2100" spc="-1" strike="noStrike">
                 <a:solidFill>
                   <a:srgbClr val="ffffff"/>
                 </a:solidFill>
                 <a:latin typeface="Arial"/>
+                <a:ea typeface="DejaVu Sans"/>
               </a:rPr>
-              <a:t>- It would be unsurprising to discover that the smaller scale models of current Warehouse C have proportionally more packaging than the somewhat larger models currently occupying Warehouse B.</a:t>
+              <a:t>- If so, consider dropping those products from the Mint Classics products catalogue.</a:t>
             </a:r>
-            <a:endParaRPr b="0" lang="en-CA" sz="1800" spc="-1" strike="noStrike">
-              <a:solidFill>
-                <a:srgbClr val="000000"/>
-              </a:solidFill>
-              <a:latin typeface="Arial"/>
-            </a:endParaRPr>
-          </a:p>
-          <a:p>
-            <a:pPr algn="just">
+            <a:endParaRPr b="0" lang="en-CA" sz="2100" spc="-1" strike="noStrike">
+              <a:solidFill>
+                <a:srgbClr val="000000"/>
+              </a:solidFill>
+              <a:latin typeface="Arial"/>
+            </a:endParaRPr>
+          </a:p>
+          <a:p>
+            <a:pPr>
               <a:lnSpc>
                 <a:spcPct val="100000"/>
               </a:lnSpc>
@@ -6245,21 +6461,22 @@
             </a:endParaRPr>
           </a:p>
           <a:p>
-            <a:pPr algn="just">
+            <a:pPr>
               <a:lnSpc>
                 <a:spcPct val="100000"/>
               </a:lnSpc>
             </a:pPr>
             <a:r>
-              <a:rPr b="0" lang="en-CA" sz="1800" spc="-1" strike="noStrike">
+              <a:rPr b="0" lang="en-CA" sz="2100" spc="-1" strike="noStrike">
                 <a:solidFill>
                   <a:srgbClr val="ffffff"/>
                 </a:solidFill>
                 <a:latin typeface="Arial"/>
+                <a:ea typeface="DejaVu Sans"/>
               </a:rPr>
-              <a:t>- Both Warehouse B and Warehouse C will, in reality, be much larger than the generated volumes which were used to compare warehouse capacities.  Comparing the ratio of (Actual:Estimated) warehouse volume for each warehouse could possibly be used in lieu of ascertaining complete product packaging size information.</a:t>
+              <a:t>- This method could be useful in warehouse reorganization. More storage volume might be achieved from the same square footage with less individual product codes to keep organized and accessible.</a:t>
             </a:r>
-            <a:endParaRPr b="0" lang="en-CA" sz="1800" spc="-1" strike="noStrike">
+            <a:endParaRPr b="0" lang="en-CA" sz="2100" spc="-1" strike="noStrike">
               <a:solidFill>
                 <a:srgbClr val="000000"/>
               </a:solidFill>
@@ -6300,14 +6517,14 @@
       </p:grpSpPr>
       <p:sp>
         <p:nvSpPr>
-          <p:cNvPr id="128" name="Rectangle 1"/>
+          <p:cNvPr id="128" name="Rectangle 26"/>
           <p:cNvSpPr/>
           <p:nvPr/>
         </p:nvSpPr>
         <p:spPr>
           <a:xfrm>
             <a:off x="640080" y="685800"/>
-            <a:ext cx="8777880" cy="1371240"/>
+            <a:ext cx="8777520" cy="1370880"/>
           </a:xfrm>
           <a:prstGeom prst="rect">
             <a:avLst/>
@@ -6321,7 +6538,7 @@
             </a:solidFill>
           </a:ln>
           <a:effectLst>
-            <a:outerShdw dist="50911" dir="8100000" blurRad="101520" rotWithShape="0">
+            <a:outerShdw blurRad="101520" dir="8100000" dist="50402" rotWithShape="0">
               <a:srgbClr val="666666">
                 <a:alpha val="65000"/>
               </a:srgbClr>
@@ -6345,7 +6562,7 @@
             <a:noAutofit/>
           </a:bodyPr>
           <a:p>
-            <a:pPr algn="ctr">
+            <a:pPr>
               <a:lnSpc>
                 <a:spcPct val="100000"/>
               </a:lnSpc>
@@ -6362,14 +6579,14 @@
       </p:sp>
       <p:sp>
         <p:nvSpPr>
-          <p:cNvPr id="129" name="Rectangle 2"/>
+          <p:cNvPr id="129" name="Rectangle 27"/>
           <p:cNvSpPr/>
           <p:nvPr/>
         </p:nvSpPr>
         <p:spPr>
           <a:xfrm>
             <a:off x="640080" y="2286000"/>
-            <a:ext cx="8777880" cy="4114440"/>
+            <a:ext cx="8777520" cy="4114080"/>
           </a:xfrm>
           <a:prstGeom prst="rect">
             <a:avLst/>
@@ -6383,7 +6600,7 @@
             </a:solidFill>
           </a:ln>
           <a:effectLst>
-            <a:outerShdw dist="50911" dir="8100000" blurRad="101520" rotWithShape="0">
+            <a:outerShdw blurRad="101520" dir="8100000" dist="50402" rotWithShape="0">
               <a:srgbClr val="666666">
                 <a:alpha val="65000"/>
               </a:srgbClr>
@@ -6407,7 +6624,7 @@
             <a:noAutofit/>
           </a:bodyPr>
           <a:p>
-            <a:pPr algn="ctr">
+            <a:pPr>
               <a:lnSpc>
                 <a:spcPct val="100000"/>
               </a:lnSpc>
@@ -6424,14 +6641,14 @@
       </p:sp>
       <p:sp>
         <p:nvSpPr>
-          <p:cNvPr id="130" name="TextBox 3"/>
+          <p:cNvPr id="130" name="TextBox 29"/>
           <p:cNvSpPr/>
           <p:nvPr/>
         </p:nvSpPr>
         <p:spPr>
           <a:xfrm>
             <a:off x="640080" y="887400"/>
-            <a:ext cx="8777880" cy="912600"/>
+            <a:ext cx="8777520" cy="912600"/>
           </a:xfrm>
           <a:prstGeom prst="rect">
             <a:avLst/>
@@ -6441,7 +6658,7 @@
             <a:noFill/>
           </a:ln>
           <a:effectLst>
-            <a:outerShdw dist="50911" dir="8100000" blurRad="101520" rotWithShape="0">
+            <a:outerShdw blurRad="101520" dir="8100000" dist="50402" rotWithShape="0">
               <a:srgbClr val="666666">
                 <a:alpha val="65000"/>
               </a:srgbClr>
@@ -6470,6 +6687,7 @@
                   <a:srgbClr val="ffffff"/>
                 </a:solidFill>
                 <a:latin typeface="Arial"/>
+                <a:ea typeface="DejaVu Sans"/>
               </a:rPr>
               <a:t>Next Steps:</a:t>
             </a:r>
@@ -6484,14 +6702,14 @@
       </p:sp>
       <p:sp>
         <p:nvSpPr>
-          <p:cNvPr id="131" name="TextBox 4"/>
-          <p:cNvSpPr/>
-          <p:nvPr/>
-        </p:nvSpPr>
-        <p:spPr>
-          <a:xfrm>
-            <a:off x="640080" y="2286000"/>
-            <a:ext cx="8777880" cy="759960"/>
+          <p:cNvPr id="131" name="TextBox 30"/>
+          <p:cNvSpPr/>
+          <p:nvPr/>
+        </p:nvSpPr>
+        <p:spPr>
+          <a:xfrm>
+            <a:off x="604080" y="2322000"/>
+            <a:ext cx="8777520" cy="759960"/>
           </a:xfrm>
           <a:prstGeom prst="rect">
             <a:avLst/>
@@ -6501,7 +6719,7 @@
             <a:noFill/>
           </a:ln>
           <a:effectLst>
-            <a:outerShdw dist="50911" dir="8100000" blurRad="101520" rotWithShape="0">
+            <a:outerShdw blurRad="101520" dir="8100000" dist="50402" rotWithShape="0">
               <a:srgbClr val="666666">
                 <a:alpha val="65000"/>
               </a:srgbClr>
@@ -6530,8 +6748,9 @@
                   <a:srgbClr val="ffffff"/>
                 </a:solidFill>
                 <a:latin typeface="Arial"/>
+                <a:ea typeface="DejaVu Sans"/>
               </a:rPr>
-              <a:t>Look into the reasons why some items have incredibly low inventory stock</a:t>
+              <a:t>Consider the ability to handle the logistics of increased shipping from Warehouse B</a:t>
             </a:r>
             <a:endParaRPr b="0" lang="en-CA" sz="2200" spc="-1" strike="noStrike">
               <a:solidFill>
@@ -6544,14 +6763,14 @@
       </p:sp>
       <p:sp>
         <p:nvSpPr>
-          <p:cNvPr id="132" name="TextBox 5"/>
-          <p:cNvSpPr/>
-          <p:nvPr/>
-        </p:nvSpPr>
-        <p:spPr>
-          <a:xfrm>
-            <a:off x="1050840" y="3176640"/>
-            <a:ext cx="8337960" cy="2513520"/>
+          <p:cNvPr id="132" name="TextBox 31"/>
+          <p:cNvSpPr/>
+          <p:nvPr/>
+        </p:nvSpPr>
+        <p:spPr>
+          <a:xfrm>
+            <a:off x="1044000" y="3139200"/>
+            <a:ext cx="8099640" cy="3016800"/>
           </a:xfrm>
           <a:prstGeom prst="rect">
             <a:avLst/>
@@ -6561,7 +6780,7 @@
             <a:noFill/>
           </a:ln>
           <a:effectLst>
-            <a:outerShdw dist="50911" dir="8100000" blurRad="101520" rotWithShape="0">
+            <a:outerShdw blurRad="101520" dir="8100000" dist="50402" rotWithShape="0">
               <a:srgbClr val="666666">
                 <a:alpha val="65000"/>
               </a:srgbClr>
@@ -6579,29 +6798,30 @@
             <a:spAutoFit/>
           </a:bodyPr>
           <a:p>
-            <a:pPr>
+            <a:pPr algn="just">
               <a:lnSpc>
                 <a:spcPct val="100000"/>
               </a:lnSpc>
             </a:pPr>
             <a:r>
-              <a:rPr b="0" lang="en-CA" sz="2100" spc="-1" strike="noStrike">
+              <a:rPr b="0" lang="en-CA" sz="2000" spc="-1" strike="noStrike">
                 <a:solidFill>
                   <a:srgbClr val="ffffff"/>
                 </a:solidFill>
                 <a:latin typeface="Arial"/>
+                <a:ea typeface="DejaVu Sans"/>
               </a:rPr>
-              <a:t>- Are any of these items no longer available or difficult to acquire from the manufacturer?</a:t>
+              <a:t>- At the outset of this analysis, Mint Classics expressed an interest in being able to ship products within 24 hours of receiving a purchase order.</a:t>
             </a:r>
-            <a:endParaRPr b="0" lang="en-CA" sz="2100" spc="-1" strike="noStrike">
-              <a:solidFill>
-                <a:srgbClr val="000000"/>
-              </a:solidFill>
-              <a:latin typeface="Arial"/>
-            </a:endParaRPr>
-          </a:p>
-          <a:p>
-            <a:pPr>
+            <a:endParaRPr b="0" lang="en-CA" sz="2000" spc="-1" strike="noStrike">
+              <a:solidFill>
+                <a:srgbClr val="000000"/>
+              </a:solidFill>
+              <a:latin typeface="Arial"/>
+            </a:endParaRPr>
+          </a:p>
+          <a:p>
+            <a:pPr algn="just">
               <a:lnSpc>
                 <a:spcPct val="100000"/>
               </a:lnSpc>
@@ -6614,29 +6834,30 @@
             </a:endParaRPr>
           </a:p>
           <a:p>
-            <a:pPr>
+            <a:pPr algn="just">
               <a:lnSpc>
                 <a:spcPct val="100000"/>
               </a:lnSpc>
             </a:pPr>
             <a:r>
-              <a:rPr b="0" lang="en-CA" sz="2100" spc="-1" strike="noStrike">
+              <a:rPr b="0" lang="en-CA" sz="2000" spc="-1" strike="noStrike">
                 <a:solidFill>
                   <a:srgbClr val="ffffff"/>
                 </a:solidFill>
                 <a:latin typeface="Arial"/>
+                <a:ea typeface="DejaVu Sans"/>
               </a:rPr>
-              <a:t>- If so, consider dropping those products from the Mint Classics products catalogue.</a:t>
+              <a:t>- The warehouse to which the inventory of the proposed closure would be moved has a higher proportion of 2-3 day delays than the other warehouses.</a:t>
             </a:r>
-            <a:endParaRPr b="0" lang="en-CA" sz="2100" spc="-1" strike="noStrike">
-              <a:solidFill>
-                <a:srgbClr val="000000"/>
-              </a:solidFill>
-              <a:latin typeface="Arial"/>
-            </a:endParaRPr>
-          </a:p>
-          <a:p>
-            <a:pPr>
+            <a:endParaRPr b="0" lang="en-CA" sz="2000" spc="-1" strike="noStrike">
+              <a:solidFill>
+                <a:srgbClr val="000000"/>
+              </a:solidFill>
+              <a:latin typeface="Arial"/>
+            </a:endParaRPr>
+          </a:p>
+          <a:p>
+            <a:pPr algn="just">
               <a:lnSpc>
                 <a:spcPct val="100000"/>
               </a:lnSpc>
@@ -6649,21 +6870,22 @@
             </a:endParaRPr>
           </a:p>
           <a:p>
-            <a:pPr>
+            <a:pPr algn="just">
               <a:lnSpc>
                 <a:spcPct val="100000"/>
               </a:lnSpc>
             </a:pPr>
             <a:r>
-              <a:rPr b="0" lang="en-CA" sz="2100" spc="-1" strike="noStrike">
+              <a:rPr b="0" lang="en-CA" sz="2000" spc="-1" strike="noStrike">
                 <a:solidFill>
                   <a:srgbClr val="ffffff"/>
                 </a:solidFill>
                 <a:latin typeface="Arial"/>
+                <a:ea typeface="DejaVu Sans"/>
               </a:rPr>
-              <a:t>- This method could be useful in warehouse reorganization more storage volume might be achieved from the same square footage with less individual product codes to keep organized and accessible.</a:t>
+              <a:t>- Condense the existing inventory in Warehouse B creating a completely separate and empty space for the inventory of Warehouse C prior to shutting down Warehouse C.</a:t>
             </a:r>
-            <a:endParaRPr b="0" lang="en-CA" sz="2100" spc="-1" strike="noStrike">
+            <a:endParaRPr b="0" lang="en-CA" sz="2000" spc="-1" strike="noStrike">
               <a:solidFill>
                 <a:srgbClr val="000000"/>
               </a:solidFill>
@@ -6704,14 +6926,14 @@
       </p:grpSpPr>
       <p:sp>
         <p:nvSpPr>
-          <p:cNvPr id="133" name="Rectangle 26"/>
-          <p:cNvSpPr/>
-          <p:nvPr/>
-        </p:nvSpPr>
-        <p:spPr>
-          <a:xfrm>
-            <a:off x="640080" y="685800"/>
-            <a:ext cx="8777880" cy="1371240"/>
+          <p:cNvPr id="133" name="Rectangle 1"/>
+          <p:cNvSpPr/>
+          <p:nvPr/>
+        </p:nvSpPr>
+        <p:spPr>
+          <a:xfrm>
+            <a:off x="640080" y="822960"/>
+            <a:ext cx="8777520" cy="5028480"/>
           </a:xfrm>
           <a:prstGeom prst="rect">
             <a:avLst/>
@@ -6725,7 +6947,7 @@
             </a:solidFill>
           </a:ln>
           <a:effectLst>
-            <a:outerShdw dist="50911" dir="8100000" blurRad="101520" rotWithShape="0">
+            <a:outerShdw blurRad="101520" dir="8100000" dist="50402" rotWithShape="0">
               <a:srgbClr val="666666">
                 <a:alpha val="65000"/>
               </a:srgbClr>
@@ -6749,6 +6971,11 @@
             <a:noAutofit/>
           </a:bodyPr>
           <a:p>
+            <a:pPr algn="ctr">
+              <a:lnSpc>
+                <a:spcPct val="100000"/>
+              </a:lnSpc>
+            </a:pPr>
             <a:endParaRPr b="0" lang="en-CA" sz="1800" spc="-1" strike="noStrike">
               <a:solidFill>
                 <a:schemeClr val="lt1"/>
@@ -6761,71 +6988,14 @@
       </p:sp>
       <p:sp>
         <p:nvSpPr>
-          <p:cNvPr id="134" name="Rectangle 27"/>
-          <p:cNvSpPr/>
-          <p:nvPr/>
-        </p:nvSpPr>
-        <p:spPr>
-          <a:xfrm>
-            <a:off x="640080" y="2286000"/>
-            <a:ext cx="8777880" cy="4114440"/>
-          </a:xfrm>
-          <a:prstGeom prst="rect">
-            <a:avLst/>
-          </a:prstGeom>
-          <a:solidFill>
-            <a:srgbClr val="9b9b9b"/>
-          </a:solidFill>
-          <a:ln w="31750">
-            <a:solidFill>
-              <a:srgbClr val="848484"/>
-            </a:solidFill>
-          </a:ln>
-          <a:effectLst>
-            <a:outerShdw dist="50911" dir="8100000" blurRad="101520" rotWithShape="0">
-              <a:srgbClr val="666666">
-                <a:alpha val="65000"/>
-              </a:srgbClr>
-            </a:outerShdw>
-          </a:effectLst>
-        </p:spPr>
-        <p:style>
-          <a:lnRef idx="1">
-            <a:schemeClr val="accent1"/>
-          </a:lnRef>
-          <a:fillRef idx="3">
-            <a:schemeClr val="accent1"/>
-          </a:fillRef>
-          <a:effectRef idx="2">
-            <a:schemeClr val="accent1"/>
-          </a:effectRef>
-          <a:fontRef idx="minor"/>
-        </p:style>
-        <p:txBody>
-          <a:bodyPr lIns="90000" rIns="90000" tIns="45000" bIns="45000" anchor="ctr">
-            <a:noAutofit/>
-          </a:bodyPr>
-          <a:p>
-            <a:endParaRPr b="0" lang="en-CA" sz="1800" spc="-1" strike="noStrike">
-              <a:solidFill>
-                <a:schemeClr val="lt1"/>
-              </a:solidFill>
-              <a:latin typeface="Arial"/>
-              <a:ea typeface="DejaVu Sans"/>
-            </a:endParaRPr>
-          </a:p>
-        </p:txBody>
-      </p:sp>
-      <p:sp>
-        <p:nvSpPr>
-          <p:cNvPr id="135" name="TextBox 29"/>
-          <p:cNvSpPr/>
-          <p:nvPr/>
-        </p:nvSpPr>
-        <p:spPr>
-          <a:xfrm>
-            <a:off x="640080" y="887400"/>
-            <a:ext cx="8777880" cy="912600"/>
+          <p:cNvPr id="134" name="TextBox 22"/>
+          <p:cNvSpPr/>
+          <p:nvPr/>
+        </p:nvSpPr>
+        <p:spPr>
+          <a:xfrm>
+            <a:off x="540000" y="1670040"/>
+            <a:ext cx="8777520" cy="2649960"/>
           </a:xfrm>
           <a:prstGeom prst="rect">
             <a:avLst/>
@@ -6835,7 +7005,7 @@
             <a:noFill/>
           </a:ln>
           <a:effectLst>
-            <a:outerShdw dist="50911" dir="8100000" blurRad="101520" rotWithShape="0">
+            <a:outerShdw blurRad="101520" dir="8100000" dist="50402" rotWithShape="0">
               <a:srgbClr val="666666">
                 <a:alpha val="65000"/>
               </a:srgbClr>
@@ -6859,205 +7029,16 @@
               </a:lnSpc>
             </a:pPr>
             <a:r>
-              <a:rPr b="0" lang="en-CA" sz="5400" spc="-1" strike="noStrike">
+              <a:rPr b="0" lang="en-CA" sz="4200" spc="-1" strike="noStrike">
                 <a:solidFill>
                   <a:srgbClr val="ffffff"/>
                 </a:solidFill>
                 <a:latin typeface="Arial"/>
+                <a:ea typeface="DejaVu Sans"/>
               </a:rPr>
-              <a:t>Next Steps:</a:t>
+              <a:t>Please feel free to come back with any other more specific questions regarding any aspect of this ongoing project.</a:t>
             </a:r>
-            <a:endParaRPr b="0" lang="en-CA" sz="5400" spc="-1" strike="noStrike">
-              <a:solidFill>
-                <a:srgbClr val="000000"/>
-              </a:solidFill>
-              <a:latin typeface="Arial"/>
-            </a:endParaRPr>
-          </a:p>
-        </p:txBody>
-      </p:sp>
-      <p:sp>
-        <p:nvSpPr>
-          <p:cNvPr id="136" name="TextBox 30"/>
-          <p:cNvSpPr/>
-          <p:nvPr/>
-        </p:nvSpPr>
-        <p:spPr>
-          <a:xfrm>
-            <a:off x="604080" y="2322000"/>
-            <a:ext cx="8777880" cy="759960"/>
-          </a:xfrm>
-          <a:prstGeom prst="rect">
-            <a:avLst/>
-          </a:prstGeom>
-          <a:noFill/>
-          <a:ln w="0">
-            <a:noFill/>
-          </a:ln>
-          <a:effectLst>
-            <a:outerShdw dist="50911" dir="8100000" blurRad="101520" rotWithShape="0">
-              <a:srgbClr val="666666">
-                <a:alpha val="65000"/>
-              </a:srgbClr>
-            </a:outerShdw>
-          </a:effectLst>
-        </p:spPr>
-        <p:style>
-          <a:lnRef idx="0"/>
-          <a:fillRef idx="0"/>
-          <a:effectRef idx="0"/>
-          <a:fontRef idx="minor"/>
-        </p:style>
-        <p:txBody>
-          <a:bodyPr lIns="90000" rIns="90000" tIns="45000" bIns="45000" anchor="t">
-            <a:spAutoFit/>
-          </a:bodyPr>
-          <a:p>
-            <a:pPr>
-              <a:lnSpc>
-                <a:spcPct val="100000"/>
-              </a:lnSpc>
-            </a:pPr>
-            <a:r>
-              <a:rPr b="0" lang="en-CA" sz="2200" spc="-1" strike="noStrike">
-                <a:solidFill>
-                  <a:srgbClr val="ffffff"/>
-                </a:solidFill>
-                <a:latin typeface="Arial"/>
-              </a:rPr>
-              <a:t>Consider the ability to handle the logistics of increased shipping from Warehouse B</a:t>
-            </a:r>
-            <a:endParaRPr b="0" lang="en-CA" sz="2200" spc="-1" strike="noStrike">
-              <a:solidFill>
-                <a:srgbClr val="000000"/>
-              </a:solidFill>
-              <a:latin typeface="Arial"/>
-            </a:endParaRPr>
-          </a:p>
-        </p:txBody>
-      </p:sp>
-      <p:sp>
-        <p:nvSpPr>
-          <p:cNvPr id="137" name="TextBox 31"/>
-          <p:cNvSpPr/>
-          <p:nvPr/>
-        </p:nvSpPr>
-        <p:spPr>
-          <a:xfrm>
-            <a:off x="1044000" y="3139200"/>
-            <a:ext cx="8100000" cy="3016800"/>
-          </a:xfrm>
-          <a:prstGeom prst="rect">
-            <a:avLst/>
-          </a:prstGeom>
-          <a:noFill/>
-          <a:ln w="0">
-            <a:noFill/>
-          </a:ln>
-          <a:effectLst>
-            <a:outerShdw dist="50911" dir="8100000" blurRad="101520" rotWithShape="0">
-              <a:srgbClr val="666666">
-                <a:alpha val="65000"/>
-              </a:srgbClr>
-            </a:outerShdw>
-          </a:effectLst>
-        </p:spPr>
-        <p:style>
-          <a:lnRef idx="0"/>
-          <a:fillRef idx="0"/>
-          <a:effectRef idx="0"/>
-          <a:fontRef idx="minor"/>
-        </p:style>
-        <p:txBody>
-          <a:bodyPr lIns="90000" rIns="90000" tIns="45000" bIns="45000" anchor="t">
-            <a:spAutoFit/>
-          </a:bodyPr>
-          <a:p>
-            <a:pPr algn="just">
-              <a:lnSpc>
-                <a:spcPct val="100000"/>
-              </a:lnSpc>
-            </a:pPr>
-            <a:r>
-              <a:rPr b="0" lang="en-CA" sz="2000" spc="-1" strike="noStrike">
-                <a:solidFill>
-                  <a:srgbClr val="ffffff"/>
-                </a:solidFill>
-                <a:latin typeface="Arial"/>
-              </a:rPr>
-              <a:t>- At the outset of this analysis, Mint Classics expressed an interest in being able to ship products within 24 hours of receiving a purchase order.</a:t>
-            </a:r>
-            <a:endParaRPr b="0" lang="en-CA" sz="2000" spc="-1" strike="noStrike">
-              <a:solidFill>
-                <a:srgbClr val="000000"/>
-              </a:solidFill>
-              <a:latin typeface="Arial"/>
-            </a:endParaRPr>
-          </a:p>
-          <a:p>
-            <a:pPr algn="just">
-              <a:lnSpc>
-                <a:spcPct val="100000"/>
-              </a:lnSpc>
-            </a:pPr>
-            <a:endParaRPr b="0" lang="en-CA" sz="600" spc="-1" strike="noStrike">
-              <a:solidFill>
-                <a:srgbClr val="000000"/>
-              </a:solidFill>
-              <a:latin typeface="Arial"/>
-            </a:endParaRPr>
-          </a:p>
-          <a:p>
-            <a:pPr algn="just">
-              <a:lnSpc>
-                <a:spcPct val="100000"/>
-              </a:lnSpc>
-            </a:pPr>
-            <a:r>
-              <a:rPr b="0" lang="en-CA" sz="2000" spc="-1" strike="noStrike">
-                <a:solidFill>
-                  <a:srgbClr val="ffffff"/>
-                </a:solidFill>
-                <a:latin typeface="Arial"/>
-              </a:rPr>
-              <a:t>- The warehouse to which the inventory of the proposed closure would be moved has a higher proportion of 2-3 day delays than the other warehouses.</a:t>
-            </a:r>
-            <a:endParaRPr b="0" lang="en-CA" sz="2000" spc="-1" strike="noStrike">
-              <a:solidFill>
-                <a:srgbClr val="000000"/>
-              </a:solidFill>
-              <a:latin typeface="Arial"/>
-            </a:endParaRPr>
-          </a:p>
-          <a:p>
-            <a:pPr algn="just">
-              <a:lnSpc>
-                <a:spcPct val="100000"/>
-              </a:lnSpc>
-            </a:pPr>
-            <a:endParaRPr b="0" lang="en-CA" sz="600" spc="-1" strike="noStrike">
-              <a:solidFill>
-                <a:srgbClr val="000000"/>
-              </a:solidFill>
-              <a:latin typeface="Arial"/>
-            </a:endParaRPr>
-          </a:p>
-          <a:p>
-            <a:pPr algn="just">
-              <a:lnSpc>
-                <a:spcPct val="100000"/>
-              </a:lnSpc>
-            </a:pPr>
-            <a:r>
-              <a:rPr b="0" lang="en-CA" sz="2000" spc="-1" strike="noStrike">
-                <a:solidFill>
-                  <a:srgbClr val="ffffff"/>
-                </a:solidFill>
-                <a:latin typeface="Arial"/>
-              </a:rPr>
-              <a:t>- Condense the existing inventory in Warehouse B creating a completely separate and empty space for the inventory of Warehouse C prior to shutting down Warehouse.</a:t>
-            </a:r>
-            <a:endParaRPr b="0" lang="en-CA" sz="2000" spc="-1" strike="noStrike">
+            <a:endParaRPr b="0" lang="en-CA" sz="4200" spc="-1" strike="noStrike">
               <a:solidFill>
                 <a:srgbClr val="000000"/>
               </a:solidFill>
@@ -7098,14 +7079,14 @@
       </p:grpSpPr>
       <p:sp>
         <p:nvSpPr>
-          <p:cNvPr id="138" name="Rectangle 1"/>
+          <p:cNvPr id="135" name="Rectangle 19"/>
           <p:cNvSpPr/>
           <p:nvPr/>
         </p:nvSpPr>
         <p:spPr>
           <a:xfrm>
             <a:off x="640080" y="822960"/>
-            <a:ext cx="8777880" cy="5028840"/>
+            <a:ext cx="8777520" cy="5028480"/>
           </a:xfrm>
           <a:prstGeom prst="rect">
             <a:avLst/>
@@ -7119,7 +7100,7 @@
             </a:solidFill>
           </a:ln>
           <a:effectLst>
-            <a:outerShdw dist="50911" dir="8100000" blurRad="101520" rotWithShape="0">
+            <a:outerShdw blurRad="101520" dir="8100000" dist="50402" rotWithShape="0">
               <a:srgbClr val="666666">
                 <a:alpha val="65000"/>
               </a:srgbClr>
@@ -7143,7 +7124,7 @@
             <a:noAutofit/>
           </a:bodyPr>
           <a:p>
-            <a:pPr algn="ctr">
+            <a:pPr>
               <a:lnSpc>
                 <a:spcPct val="100000"/>
               </a:lnSpc>
@@ -7160,14 +7141,14 @@
       </p:sp>
       <p:sp>
         <p:nvSpPr>
-          <p:cNvPr id="139" name="TextBox 22"/>
-          <p:cNvSpPr/>
-          <p:nvPr/>
-        </p:nvSpPr>
-        <p:spPr>
-          <a:xfrm>
-            <a:off x="540000" y="1670040"/>
-            <a:ext cx="8777880" cy="2649960"/>
+          <p:cNvPr id="136" name="TextBox 21"/>
+          <p:cNvSpPr/>
+          <p:nvPr/>
+        </p:nvSpPr>
+        <p:spPr>
+          <a:xfrm>
+            <a:off x="640080" y="2192760"/>
+            <a:ext cx="8777520" cy="1918440"/>
           </a:xfrm>
           <a:prstGeom prst="rect">
             <a:avLst/>
@@ -7177,154 +7158,7 @@
             <a:noFill/>
           </a:ln>
           <a:effectLst>
-            <a:outerShdw dist="50911" dir="8100000" blurRad="101520" rotWithShape="0">
-              <a:srgbClr val="666666">
-                <a:alpha val="65000"/>
-              </a:srgbClr>
-            </a:outerShdw>
-          </a:effectLst>
-        </p:spPr>
-        <p:style>
-          <a:lnRef idx="0"/>
-          <a:fillRef idx="0"/>
-          <a:effectRef idx="0"/>
-          <a:fontRef idx="minor"/>
-        </p:style>
-        <p:txBody>
-          <a:bodyPr lIns="90000" rIns="90000" tIns="45000" bIns="45000" anchor="t">
-            <a:spAutoFit/>
-          </a:bodyPr>
-          <a:p>
-            <a:pPr algn="ctr">
-              <a:lnSpc>
-                <a:spcPct val="100000"/>
-              </a:lnSpc>
-            </a:pPr>
-            <a:r>
-              <a:rPr b="0" lang="en-CA" sz="4200" spc="-1" strike="noStrike">
-                <a:solidFill>
-                  <a:srgbClr val="ffffff"/>
-                </a:solidFill>
-                <a:latin typeface="Arial"/>
-              </a:rPr>
-              <a:t>Please feel free to come back with any other more specific questions regarding any aspect of this ongoing project.</a:t>
-            </a:r>
-            <a:endParaRPr b="0" lang="en-CA" sz="4200" spc="-1" strike="noStrike">
-              <a:solidFill>
-                <a:srgbClr val="000000"/>
-              </a:solidFill>
-              <a:latin typeface="Arial"/>
-            </a:endParaRPr>
-          </a:p>
-        </p:txBody>
-      </p:sp>
-    </p:spTree>
-  </p:cSld>
-  <mc:AlternateContent>
-    <mc:Choice Requires="p14">
-      <p:transition spd="slow" p14:dur="2000"/>
-    </mc:Choice>
-    <mc:Fallback>
-      <p:transition spd="slow"/>
-    </mc:Fallback>
-  </mc:AlternateContent>
-</p:sld>
-</file>
-
-<file path=ppt/slides/slide27.xml><?xml version="1.0" encoding="utf-8"?>
-<p:sld xmlns:a="http://schemas.openxmlformats.org/drawingml/2006/main" xmlns:p="http://schemas.openxmlformats.org/presentationml/2006/main" xmlns:r="http://schemas.openxmlformats.org/officeDocument/2006/relationships" xmlns:p14="http://schemas.microsoft.com/office/powerpoint/2010/main" xmlns:p15="http://schemas.microsoft.com/office/powerpoint/2012/main" xmlns:mc="http://schemas.openxmlformats.org/markup-compatibility/2006">
-  <p:cSld>
-    <p:spTree>
-      <p:nvGrpSpPr>
-        <p:cNvPr id="1" name=""/>
-        <p:cNvGrpSpPr/>
-        <p:nvPr/>
-      </p:nvGrpSpPr>
-      <p:grpSpPr>
-        <a:xfrm>
-          <a:off x="0" y="0"/>
-          <a:ext cx="0" cy="0"/>
-          <a:chOff x="0" y="0"/>
-          <a:chExt cx="0" cy="0"/>
-        </a:xfrm>
-      </p:grpSpPr>
-      <p:sp>
-        <p:nvSpPr>
-          <p:cNvPr id="140" name="Rectangle 19"/>
-          <p:cNvSpPr/>
-          <p:nvPr/>
-        </p:nvSpPr>
-        <p:spPr>
-          <a:xfrm>
-            <a:off x="640080" y="822960"/>
-            <a:ext cx="8777880" cy="5028840"/>
-          </a:xfrm>
-          <a:prstGeom prst="rect">
-            <a:avLst/>
-          </a:prstGeom>
-          <a:solidFill>
-            <a:srgbClr val="9b9b9b"/>
-          </a:solidFill>
-          <a:ln w="31750">
-            <a:solidFill>
-              <a:srgbClr val="848484"/>
-            </a:solidFill>
-          </a:ln>
-          <a:effectLst>
-            <a:outerShdw dist="50911" dir="8100000" blurRad="101520" rotWithShape="0">
-              <a:srgbClr val="666666">
-                <a:alpha val="65000"/>
-              </a:srgbClr>
-            </a:outerShdw>
-          </a:effectLst>
-        </p:spPr>
-        <p:style>
-          <a:lnRef idx="1">
-            <a:schemeClr val="accent1"/>
-          </a:lnRef>
-          <a:fillRef idx="3">
-            <a:schemeClr val="accent1"/>
-          </a:fillRef>
-          <a:effectRef idx="2">
-            <a:schemeClr val="accent1"/>
-          </a:effectRef>
-          <a:fontRef idx="minor"/>
-        </p:style>
-        <p:txBody>
-          <a:bodyPr lIns="90000" rIns="90000" tIns="45000" bIns="45000" anchor="ctr">
-            <a:noAutofit/>
-          </a:bodyPr>
-          <a:p>
-            <a:endParaRPr b="0" lang="en-CA" sz="1800" spc="-1" strike="noStrike">
-              <a:solidFill>
-                <a:schemeClr val="lt1"/>
-              </a:solidFill>
-              <a:latin typeface="Arial"/>
-              <a:ea typeface="DejaVu Sans"/>
-            </a:endParaRPr>
-          </a:p>
-        </p:txBody>
-      </p:sp>
-      <p:sp>
-        <p:nvSpPr>
-          <p:cNvPr id="141" name="TextBox 21"/>
-          <p:cNvSpPr/>
-          <p:nvPr/>
-        </p:nvSpPr>
-        <p:spPr>
-          <a:xfrm>
-            <a:off x="640080" y="2192760"/>
-            <a:ext cx="8777880" cy="1918440"/>
-          </a:xfrm>
-          <a:prstGeom prst="rect">
-            <a:avLst/>
-          </a:prstGeom>
-          <a:noFill/>
-          <a:ln w="0">
-            <a:noFill/>
-          </a:ln>
-          <a:effectLst>
-            <a:outerShdw dist="50911" dir="8100000" blurRad="101520" rotWithShape="0">
+            <a:outerShdw blurRad="101520" dir="8100000" dist="50402" rotWithShape="0">
               <a:srgbClr val="666666">
                 <a:alpha val="65000"/>
               </a:srgbClr>
@@ -7353,17 +7187,9 @@
                   <a:srgbClr val="ffffff"/>
                 </a:solidFill>
                 <a:latin typeface="Arial"/>
+                <a:ea typeface="DejaVu Sans"/>
               </a:rPr>
-              <a:t>Thank You for choosing </a:t>
-            </a:r>
-            <a:r>
-              <a:rPr b="0" lang="en-CA" sz="6000" spc="-1" strike="noStrike">
-                <a:solidFill>
-                  <a:srgbClr val="ffffff"/>
-                </a:solidFill>
-                <a:latin typeface="Arial"/>
-              </a:rPr>
-              <a:t>BCPM Custom Analytics!</a:t>
+              <a:t>Thank You for choosing BCPM Custom Analytics!</a:t>
             </a:r>
             <a:endParaRPr b="0" lang="en-CA" sz="6000" spc="-1" strike="noStrike">
               <a:solidFill>
@@ -7413,7 +7239,7 @@
         <p:spPr>
           <a:xfrm>
             <a:off x="640080" y="685800"/>
-            <a:ext cx="8777880" cy="1371240"/>
+            <a:ext cx="8777520" cy="1370880"/>
           </a:xfrm>
           <a:prstGeom prst="rect">
             <a:avLst/>
@@ -7427,7 +7253,7 @@
             </a:solidFill>
           </a:ln>
           <a:effectLst>
-            <a:outerShdw dist="50911" dir="8100000" blurRad="101520" rotWithShape="0">
+            <a:outerShdw blurRad="101520" dir="8100000" dist="50402" rotWithShape="0">
               <a:srgbClr val="666666">
                 <a:alpha val="65000"/>
               </a:srgbClr>
@@ -7451,6 +7277,11 @@
             <a:noAutofit/>
           </a:bodyPr>
           <a:p>
+            <a:pPr>
+              <a:lnSpc>
+                <a:spcPct val="100000"/>
+              </a:lnSpc>
+            </a:pPr>
             <a:endParaRPr b="0" lang="en-CA" sz="1800" spc="-1" strike="noStrike">
               <a:solidFill>
                 <a:schemeClr val="lt1"/>
@@ -7470,7 +7301,7 @@
         <p:spPr>
           <a:xfrm>
             <a:off x="640080" y="2286000"/>
-            <a:ext cx="8777880" cy="4114440"/>
+            <a:ext cx="8777520" cy="4114080"/>
           </a:xfrm>
           <a:prstGeom prst="rect">
             <a:avLst/>
@@ -7484,7 +7315,7 @@
             </a:solidFill>
           </a:ln>
           <a:effectLst>
-            <a:outerShdw dist="50911" dir="8100000" blurRad="101520" rotWithShape="0">
+            <a:outerShdw blurRad="101520" dir="8100000" dist="50402" rotWithShape="0">
               <a:srgbClr val="666666">
                 <a:alpha val="65000"/>
               </a:srgbClr>
@@ -7508,6 +7339,11 @@
             <a:noAutofit/>
           </a:bodyPr>
           <a:p>
+            <a:pPr>
+              <a:lnSpc>
+                <a:spcPct val="100000"/>
+              </a:lnSpc>
+            </a:pPr>
             <a:endParaRPr b="0" lang="en-CA" sz="1800" spc="-1" strike="noStrike">
               <a:solidFill>
                 <a:schemeClr val="lt1"/>
@@ -7527,7 +7363,7 @@
         <p:spPr>
           <a:xfrm>
             <a:off x="640080" y="685800"/>
-            <a:ext cx="8777880" cy="1369800"/>
+            <a:ext cx="8777520" cy="1369800"/>
           </a:xfrm>
           <a:prstGeom prst="rect">
             <a:avLst/>
@@ -7537,7 +7373,7 @@
             <a:noFill/>
           </a:ln>
           <a:effectLst>
-            <a:outerShdw dist="50911" dir="8100000" blurRad="101520" rotWithShape="0">
+            <a:outerShdw blurRad="101520" dir="8100000" dist="50402" rotWithShape="0">
               <a:srgbClr val="666666">
                 <a:alpha val="65000"/>
               </a:srgbClr>
@@ -7566,6 +7402,7 @@
                   <a:srgbClr val="ffffff"/>
                 </a:solidFill>
                 <a:latin typeface="Arial"/>
+                <a:ea typeface="DejaVu Sans"/>
               </a:rPr>
               <a:t>Initial inspection of stock on hand by warehouse location</a:t>
             </a:r>
@@ -7587,7 +7424,7 @@
         <p:spPr>
           <a:xfrm>
             <a:off x="640080" y="2286000"/>
-            <a:ext cx="8777880" cy="1857600"/>
+            <a:ext cx="8777520" cy="1856880"/>
           </a:xfrm>
           <a:prstGeom prst="rect">
             <a:avLst/>
@@ -7597,7 +7434,7 @@
             <a:noFill/>
           </a:ln>
           <a:effectLst>
-            <a:outerShdw dist="50911" dir="8100000" blurRad="101520" rotWithShape="0">
+            <a:outerShdw blurRad="101520" dir="8100000" dist="50402" rotWithShape="0">
               <a:srgbClr val="666666">
                 <a:alpha val="65000"/>
               </a:srgbClr>
@@ -7626,8 +7463,9 @@
                   <a:srgbClr val="ffffff"/>
                 </a:solidFill>
                 <a:latin typeface="Arial"/>
+                <a:ea typeface="DejaVu Sans"/>
               </a:rPr>
-              <a:t>- The majority of product stock is stored in Warehouse B.</a:t>
+              <a:t>- The largest share of product stock is stored in Warehouse B.</a:t>
             </a:r>
             <a:endParaRPr b="0" lang="en-CA" sz="2200" spc="-1" strike="noStrike">
               <a:solidFill>
@@ -7661,8 +7499,9 @@
                   <a:srgbClr val="ffffff"/>
                 </a:solidFill>
                 <a:latin typeface="Arial"/>
+                <a:ea typeface="DejaVu Sans"/>
               </a:rPr>
-              <a:t>- The cost of the stock in Warehouse B is comparatively higher than the cost of the stock stored in any of the other warehouses as demonstrated by the 'Investment Value' being 7% higher than the 'Stock Quantity'</a:t>
+              <a:t>- The cost of the stock in Warehouse B is comparatively higher than the cost of the stock stored in any of the other warehouses as demonstrated by the 'Investment Value' being roughly 7% higher than the 'Stock Quantity'</a:t>
             </a:r>
             <a:endParaRPr b="0" lang="en-CA" sz="2200" spc="-1" strike="noStrike">
               <a:solidFill>
@@ -7686,7 +7525,7 @@
         <p:spPr>
           <a:xfrm>
             <a:off x="2428200" y="4216320"/>
-            <a:ext cx="5131800" cy="2071440"/>
+            <a:ext cx="5131440" cy="2071080"/>
           </a:xfrm>
           <a:prstGeom prst="rect">
             <a:avLst/>
@@ -7695,7 +7534,7 @@
             <a:noFill/>
           </a:ln>
           <a:effectLst>
-            <a:outerShdw dist="80498" dir="9206096" blurRad="101520" rotWithShape="0">
+            <a:outerShdw blurRad="101520" dir="9206096" dist="80498" rotWithShape="0">
               <a:srgbClr val="333333">
                 <a:alpha val="65000"/>
               </a:srgbClr>
@@ -7742,7 +7581,7 @@
         <p:spPr>
           <a:xfrm>
             <a:off x="640080" y="685800"/>
-            <a:ext cx="8777880" cy="1371240"/>
+            <a:ext cx="8777520" cy="1370880"/>
           </a:xfrm>
           <a:prstGeom prst="rect">
             <a:avLst/>
@@ -7756,7 +7595,7 @@
             </a:solidFill>
           </a:ln>
           <a:effectLst>
-            <a:outerShdw dist="50911" dir="8100000" blurRad="101520" rotWithShape="0">
+            <a:outerShdw blurRad="101520" dir="8100000" dist="50402" rotWithShape="0">
               <a:srgbClr val="666666">
                 <a:alpha val="65000"/>
               </a:srgbClr>
@@ -7804,7 +7643,7 @@
         <p:spPr>
           <a:xfrm>
             <a:off x="640080" y="2286000"/>
-            <a:ext cx="8777880" cy="4114440"/>
+            <a:ext cx="8777520" cy="4114080"/>
           </a:xfrm>
           <a:prstGeom prst="rect">
             <a:avLst/>
@@ -7818,7 +7657,7 @@
             </a:solidFill>
           </a:ln>
           <a:effectLst>
-            <a:outerShdw dist="50911" dir="8100000" blurRad="101520" rotWithShape="0">
+            <a:outerShdw blurRad="101520" dir="8100000" dist="50402" rotWithShape="0">
               <a:srgbClr val="666666">
                 <a:alpha val="65000"/>
               </a:srgbClr>
@@ -7866,7 +7705,7 @@
         <p:spPr>
           <a:xfrm>
             <a:off x="595800" y="920160"/>
-            <a:ext cx="8777880" cy="912600"/>
+            <a:ext cx="8777520" cy="912600"/>
           </a:xfrm>
           <a:prstGeom prst="rect">
             <a:avLst/>
@@ -7876,7 +7715,7 @@
             <a:noFill/>
           </a:ln>
           <a:effectLst>
-            <a:outerShdw dist="50911" dir="8100000" blurRad="101520" rotWithShape="0">
+            <a:outerShdw blurRad="101520" dir="8100000" dist="50402" rotWithShape="0">
               <a:srgbClr val="666666">
                 <a:alpha val="65000"/>
               </a:srgbClr>
@@ -7905,6 +7744,7 @@
                   <a:srgbClr val="ffffff"/>
                 </a:solidFill>
                 <a:latin typeface="Arial"/>
+                <a:ea typeface="DejaVu Sans"/>
               </a:rPr>
               <a:t>Check Customer Locations</a:t>
             </a:r>
@@ -7926,7 +7766,7 @@
         <p:spPr>
           <a:xfrm>
             <a:off x="640080" y="2286000"/>
-            <a:ext cx="8777880" cy="852120"/>
+            <a:ext cx="8777520" cy="851400"/>
           </a:xfrm>
           <a:prstGeom prst="rect">
             <a:avLst/>
@@ -7936,7 +7776,7 @@
             <a:noFill/>
           </a:ln>
           <a:effectLst>
-            <a:outerShdw dist="50911" dir="8100000" blurRad="101520" rotWithShape="0">
+            <a:outerShdw blurRad="101520" dir="8100000" dist="50402" rotWithShape="0">
               <a:srgbClr val="666666">
                 <a:alpha val="65000"/>
               </a:srgbClr>
@@ -7965,8 +7805,9 @@
                   <a:srgbClr val="ffffff"/>
                 </a:solidFill>
                 <a:latin typeface="Arial"/>
+                <a:ea typeface="DejaVu Sans"/>
               </a:rPr>
-              <a:t>- Where does each warehouse ship it's products?</a:t>
+              <a:t>- Where does each warehouse ship its products?</a:t>
             </a:r>
             <a:endParaRPr b="0" lang="en-CA" sz="2200" spc="-1" strike="noStrike">
               <a:solidFill>
@@ -8000,8 +7841,9 @@
                   <a:srgbClr val="ffffff"/>
                 </a:solidFill>
                 <a:latin typeface="Arial"/>
+                <a:ea typeface="DejaVu Sans"/>
               </a:rPr>
-              <a:t>- Does each warehouse service it's own geographic location?</a:t>
+              <a:t>- Does each warehouse service its own geographic location?</a:t>
             </a:r>
             <a:endParaRPr b="0" lang="en-CA" sz="2200" spc="-1" strike="noStrike">
               <a:solidFill>
@@ -8025,7 +7867,7 @@
         <p:spPr>
           <a:xfrm>
             <a:off x="1410840" y="3225600"/>
-            <a:ext cx="7196400" cy="3060000"/>
+            <a:ext cx="7196040" cy="3059640"/>
           </a:xfrm>
           <a:prstGeom prst="rect">
             <a:avLst/>
@@ -8034,7 +7876,7 @@
             <a:noFill/>
           </a:ln>
           <a:effectLst>
-            <a:outerShdw dist="80498" dir="9206096" blurRad="101520" rotWithShape="0">
+            <a:outerShdw blurRad="101520" dir="9206096" dist="80498" rotWithShape="0">
               <a:srgbClr val="333333">
                 <a:alpha val="65000"/>
               </a:srgbClr>
@@ -8081,7 +7923,7 @@
         <p:spPr>
           <a:xfrm>
             <a:off x="640080" y="685800"/>
-            <a:ext cx="8777880" cy="1371240"/>
+            <a:ext cx="8777520" cy="1370880"/>
           </a:xfrm>
           <a:prstGeom prst="rect">
             <a:avLst/>
@@ -8095,7 +7937,7 @@
             </a:solidFill>
           </a:ln>
           <a:effectLst>
-            <a:outerShdw dist="50911" dir="8100000" blurRad="101520" rotWithShape="0">
+            <a:outerShdw blurRad="101520" dir="8100000" dist="50402" rotWithShape="0">
               <a:srgbClr val="666666">
                 <a:alpha val="65000"/>
               </a:srgbClr>
@@ -8119,6 +7961,11 @@
             <a:noAutofit/>
           </a:bodyPr>
           <a:p>
+            <a:pPr>
+              <a:lnSpc>
+                <a:spcPct val="100000"/>
+              </a:lnSpc>
+            </a:pPr>
             <a:endParaRPr b="0" lang="en-CA" sz="1800" spc="-1" strike="noStrike">
               <a:solidFill>
                 <a:schemeClr val="lt1"/>
@@ -8138,7 +7985,7 @@
         <p:spPr>
           <a:xfrm>
             <a:off x="640080" y="2286000"/>
-            <a:ext cx="8777880" cy="4114440"/>
+            <a:ext cx="8777520" cy="4114080"/>
           </a:xfrm>
           <a:prstGeom prst="rect">
             <a:avLst/>
@@ -8152,7 +7999,7 @@
             </a:solidFill>
           </a:ln>
           <a:effectLst>
-            <a:outerShdw dist="50911" dir="8100000" blurRad="101520" rotWithShape="0">
+            <a:outerShdw blurRad="101520" dir="8100000" dist="50402" rotWithShape="0">
               <a:srgbClr val="666666">
                 <a:alpha val="65000"/>
               </a:srgbClr>
@@ -8176,6 +8023,11 @@
             <a:noAutofit/>
           </a:bodyPr>
           <a:p>
+            <a:pPr>
+              <a:lnSpc>
+                <a:spcPct val="100000"/>
+              </a:lnSpc>
+            </a:pPr>
             <a:endParaRPr b="0" lang="en-CA" sz="1800" spc="-1" strike="noStrike">
               <a:solidFill>
                 <a:schemeClr val="lt1"/>
@@ -8195,7 +8047,7 @@
         <p:spPr>
           <a:xfrm>
             <a:off x="595800" y="920160"/>
-            <a:ext cx="8777880" cy="912600"/>
+            <a:ext cx="8777520" cy="912600"/>
           </a:xfrm>
           <a:prstGeom prst="rect">
             <a:avLst/>
@@ -8205,7 +8057,7 @@
             <a:noFill/>
           </a:ln>
           <a:effectLst>
-            <a:outerShdw dist="50911" dir="8100000" blurRad="101520" rotWithShape="0">
+            <a:outerShdw blurRad="101520" dir="8100000" dist="50402" rotWithShape="0">
               <a:srgbClr val="666666">
                 <a:alpha val="65000"/>
               </a:srgbClr>
@@ -8234,6 +8086,7 @@
                   <a:srgbClr val="ffffff"/>
                 </a:solidFill>
                 <a:latin typeface="Arial"/>
+                <a:ea typeface="DejaVu Sans"/>
               </a:rPr>
               <a:t>Check Customer Locations</a:t>
             </a:r>
@@ -8255,7 +8108,7 @@
         <p:spPr>
           <a:xfrm>
             <a:off x="640080" y="2286000"/>
-            <a:ext cx="8777880" cy="759960"/>
+            <a:ext cx="8777520" cy="759960"/>
           </a:xfrm>
           <a:prstGeom prst="rect">
             <a:avLst/>
@@ -8265,7 +8118,7 @@
             <a:noFill/>
           </a:ln>
           <a:effectLst>
-            <a:outerShdw dist="50911" dir="8100000" blurRad="101520" rotWithShape="0">
+            <a:outerShdw blurRad="101520" dir="8100000" dist="50402" rotWithShape="0">
               <a:srgbClr val="666666">
                 <a:alpha val="65000"/>
               </a:srgbClr>
@@ -8294,17 +8147,9 @@
                   <a:srgbClr val="ffffff"/>
                 </a:solidFill>
                 <a:latin typeface="Arial"/>
+                <a:ea typeface="DejaVu Sans"/>
               </a:rPr>
-              <a:t>- The map shows that each of the four warehouses ship to all </a:t>
-            </a:r>
-            <a:r>
-              <a:rPr b="0" lang="en-CA" sz="2200" spc="-1" strike="noStrike">
-                <a:solidFill>
-                  <a:srgbClr val="ffffff"/>
-                </a:solidFill>
-                <a:latin typeface="Arial"/>
-              </a:rPr>
-              <a:t>customer regions.</a:t>
+              <a:t>- The map shows that each of the four warehouses ship to all customer regions.</a:t>
             </a:r>
             <a:endParaRPr b="0" lang="en-CA" sz="2200" spc="-1" strike="noStrike">
               <a:solidFill>
@@ -8328,7 +8173,7 @@
         <p:spPr>
           <a:xfrm>
             <a:off x="1410840" y="3225600"/>
-            <a:ext cx="7196400" cy="3060000"/>
+            <a:ext cx="7196040" cy="3059640"/>
           </a:xfrm>
           <a:prstGeom prst="rect">
             <a:avLst/>
@@ -8337,7 +8182,7 @@
             <a:noFill/>
           </a:ln>
           <a:effectLst>
-            <a:outerShdw dist="80498" dir="9206096" blurRad="101520" rotWithShape="0">
+            <a:outerShdw blurRad="101520" dir="9206096" dist="80498" rotWithShape="0">
               <a:srgbClr val="333333">
                 <a:alpha val="65000"/>
               </a:srgbClr>
@@ -8384,7 +8229,7 @@
         <p:spPr>
           <a:xfrm>
             <a:off x="640080" y="685800"/>
-            <a:ext cx="8777880" cy="1371240"/>
+            <a:ext cx="8777520" cy="1370880"/>
           </a:xfrm>
           <a:prstGeom prst="rect">
             <a:avLst/>
@@ -8398,7 +8243,7 @@
             </a:solidFill>
           </a:ln>
           <a:effectLst>
-            <a:outerShdw dist="50911" dir="8100000" blurRad="101520" rotWithShape="0">
+            <a:outerShdw blurRad="101520" dir="8100000" dist="50402" rotWithShape="0">
               <a:srgbClr val="666666">
                 <a:alpha val="65000"/>
               </a:srgbClr>
@@ -8446,7 +8291,7 @@
         <p:spPr>
           <a:xfrm>
             <a:off x="640080" y="2286000"/>
-            <a:ext cx="8777880" cy="4114440"/>
+            <a:ext cx="8777520" cy="4114080"/>
           </a:xfrm>
           <a:prstGeom prst="rect">
             <a:avLst/>
@@ -8460,7 +8305,7 @@
             </a:solidFill>
           </a:ln>
           <a:effectLst>
-            <a:outerShdw dist="50911" dir="8100000" blurRad="101520" rotWithShape="0">
+            <a:outerShdw blurRad="101520" dir="8100000" dist="50402" rotWithShape="0">
               <a:srgbClr val="666666">
                 <a:alpha val="65000"/>
               </a:srgbClr>
@@ -8508,7 +8353,7 @@
         <p:spPr>
           <a:xfrm>
             <a:off x="640080" y="685800"/>
-            <a:ext cx="8777880" cy="1369800"/>
+            <a:ext cx="8777520" cy="1369800"/>
           </a:xfrm>
           <a:prstGeom prst="rect">
             <a:avLst/>
@@ -8518,7 +8363,7 @@
             <a:noFill/>
           </a:ln>
           <a:effectLst>
-            <a:outerShdw dist="50911" dir="8100000" blurRad="101520" rotWithShape="0">
+            <a:outerShdw blurRad="101520" dir="8100000" dist="50402" rotWithShape="0">
               <a:srgbClr val="666666">
                 <a:alpha val="65000"/>
               </a:srgbClr>
@@ -8547,6 +8392,7 @@
                   <a:srgbClr val="ffffff"/>
                 </a:solidFill>
                 <a:latin typeface="Arial"/>
+                <a:ea typeface="DejaVu Sans"/>
               </a:rPr>
               <a:t>Check Warehouse Sales &amp; Overhead</a:t>
             </a:r>
@@ -8568,7 +8414,7 @@
         <p:spPr>
           <a:xfrm>
             <a:off x="640080" y="2286000"/>
-            <a:ext cx="8777880" cy="852120"/>
+            <a:ext cx="8777520" cy="851400"/>
           </a:xfrm>
           <a:prstGeom prst="rect">
             <a:avLst/>
@@ -8578,7 +8424,7 @@
             <a:noFill/>
           </a:ln>
           <a:effectLst>
-            <a:outerShdw dist="50911" dir="8100000" blurRad="101520" rotWithShape="0">
+            <a:outerShdw blurRad="101520" dir="8100000" dist="50402" rotWithShape="0">
               <a:srgbClr val="666666">
                 <a:alpha val="65000"/>
               </a:srgbClr>
@@ -8607,6 +8453,7 @@
                   <a:srgbClr val="ffffff"/>
                 </a:solidFill>
                 <a:latin typeface="Arial"/>
+                <a:ea typeface="DejaVu Sans"/>
               </a:rPr>
               <a:t>- What does the overall product overhead look like?</a:t>
             </a:r>
@@ -8642,6 +8489,7 @@
                   <a:srgbClr val="ffffff"/>
                 </a:solidFill>
                 <a:latin typeface="Arial"/>
+                <a:ea typeface="DejaVu Sans"/>
               </a:rPr>
               <a:t>- How much overhead investment cost is in each warehouse?</a:t>
             </a:r>
@@ -8667,7 +8515,7 @@
         <p:spPr>
           <a:xfrm>
             <a:off x="1373040" y="3225240"/>
-            <a:ext cx="7310880" cy="2880000"/>
+            <a:ext cx="7310520" cy="2879640"/>
           </a:xfrm>
           <a:prstGeom prst="rect">
             <a:avLst/>
@@ -8676,7 +8524,7 @@
             <a:noFill/>
           </a:ln>
           <a:effectLst>
-            <a:outerShdw dist="80498" dir="9206096" blurRad="101520" rotWithShape="0">
+            <a:outerShdw blurRad="101520" dir="9206096" dist="80498" rotWithShape="0">
               <a:srgbClr val="333333">
                 <a:alpha val="65000"/>
               </a:srgbClr>
@@ -8723,7 +8571,7 @@
         <p:spPr>
           <a:xfrm>
             <a:off x="640080" y="685800"/>
-            <a:ext cx="8777880" cy="1371240"/>
+            <a:ext cx="8777520" cy="1370880"/>
           </a:xfrm>
           <a:prstGeom prst="rect">
             <a:avLst/>
@@ -8737,7 +8585,7 @@
             </a:solidFill>
           </a:ln>
           <a:effectLst>
-            <a:outerShdw dist="50911" dir="8100000" blurRad="101520" rotWithShape="0">
+            <a:outerShdw blurRad="101520" dir="8100000" dist="50402" rotWithShape="0">
               <a:srgbClr val="666666">
                 <a:alpha val="65000"/>
               </a:srgbClr>
@@ -8761,6 +8609,11 @@
             <a:noAutofit/>
           </a:bodyPr>
           <a:p>
+            <a:pPr>
+              <a:lnSpc>
+                <a:spcPct val="100000"/>
+              </a:lnSpc>
+            </a:pPr>
             <a:endParaRPr b="0" lang="en-CA" sz="1800" spc="-1" strike="noStrike">
               <a:solidFill>
                 <a:schemeClr val="lt1"/>
@@ -8780,7 +8633,7 @@
         <p:spPr>
           <a:xfrm>
             <a:off x="640080" y="2286000"/>
-            <a:ext cx="8777880" cy="4114440"/>
+            <a:ext cx="8777520" cy="4114080"/>
           </a:xfrm>
           <a:prstGeom prst="rect">
             <a:avLst/>
@@ -8794,7 +8647,7 @@
             </a:solidFill>
           </a:ln>
           <a:effectLst>
-            <a:outerShdw dist="50911" dir="8100000" blurRad="101520" rotWithShape="0">
+            <a:outerShdw blurRad="101520" dir="8100000" dist="50402" rotWithShape="0">
               <a:srgbClr val="666666">
                 <a:alpha val="65000"/>
               </a:srgbClr>
@@ -8818,6 +8671,11 @@
             <a:noAutofit/>
           </a:bodyPr>
           <a:p>
+            <a:pPr>
+              <a:lnSpc>
+                <a:spcPct val="100000"/>
+              </a:lnSpc>
+            </a:pPr>
             <a:endParaRPr b="0" lang="en-CA" sz="1800" spc="-1" strike="noStrike">
               <a:solidFill>
                 <a:schemeClr val="lt1"/>
@@ -8837,7 +8695,7 @@
         <p:spPr>
           <a:xfrm>
             <a:off x="640080" y="685800"/>
-            <a:ext cx="8777880" cy="1369800"/>
+            <a:ext cx="8777520" cy="1369800"/>
           </a:xfrm>
           <a:prstGeom prst="rect">
             <a:avLst/>
@@ -8847,7 +8705,7 @@
             <a:noFill/>
           </a:ln>
           <a:effectLst>
-            <a:outerShdw dist="50911" dir="8100000" blurRad="101520" rotWithShape="0">
+            <a:outerShdw blurRad="101520" dir="8100000" dist="50402" rotWithShape="0">
               <a:srgbClr val="666666">
                 <a:alpha val="65000"/>
               </a:srgbClr>
@@ -8876,6 +8734,7 @@
                   <a:srgbClr val="ffffff"/>
                 </a:solidFill>
                 <a:latin typeface="Arial"/>
+                <a:ea typeface="DejaVu Sans"/>
               </a:rPr>
               <a:t>Check Warehouse Sales &amp; Overhead</a:t>
             </a:r>
@@ -8897,7 +8756,7 @@
         <p:spPr>
           <a:xfrm>
             <a:off x="640080" y="2286000"/>
-            <a:ext cx="8777880" cy="1553400"/>
+            <a:ext cx="8777520" cy="1552680"/>
           </a:xfrm>
           <a:prstGeom prst="rect">
             <a:avLst/>
@@ -8907,7 +8766,7 @@
             <a:noFill/>
           </a:ln>
           <a:effectLst>
-            <a:outerShdw dist="50911" dir="8100000" blurRad="101520" rotWithShape="0">
+            <a:outerShdw blurRad="101520" dir="8100000" dist="50402" rotWithShape="0">
               <a:srgbClr val="666666">
                 <a:alpha val="65000"/>
               </a:srgbClr>
@@ -8936,6 +8795,7 @@
                   <a:srgbClr val="ffffff"/>
                 </a:solidFill>
                 <a:latin typeface="Arial"/>
+                <a:ea typeface="DejaVu Sans"/>
               </a:rPr>
               <a:t>- Overall, sales look reasonable across all product codes with no serious problems in terms of extreme poor sales performance.</a:t>
             </a:r>
@@ -8971,6 +8831,7 @@
                   <a:srgbClr val="ffffff"/>
                 </a:solidFill>
                 <a:latin typeface="Arial"/>
+                <a:ea typeface="DejaVu Sans"/>
               </a:rPr>
               <a:t>- The amount of inventory for each product code is fairly inconsistent.</a:t>
             </a:r>
@@ -9006,6 +8867,7 @@
                   <a:srgbClr val="ffffff"/>
                 </a:solidFill>
                 <a:latin typeface="Arial"/>
+                <a:ea typeface="DejaVu Sans"/>
               </a:rPr>
               <a:t>- Several products show extremely low inventory on hand.</a:t>
             </a:r>
@@ -9031,7 +8893,7 @@
         <p:spPr>
           <a:xfrm>
             <a:off x="2038680" y="3960000"/>
-            <a:ext cx="5940000" cy="2340000"/>
+            <a:ext cx="5939640" cy="2339640"/>
           </a:xfrm>
           <a:prstGeom prst="rect">
             <a:avLst/>
@@ -9040,7 +8902,7 @@
             <a:noFill/>
           </a:ln>
           <a:effectLst>
-            <a:outerShdw dist="80498" dir="9206096" blurRad="101520" rotWithShape="0">
+            <a:outerShdw blurRad="101520" dir="9206096" dist="80498" rotWithShape="0">
               <a:srgbClr val="333333">
                 <a:alpha val="65000"/>
               </a:srgbClr>
@@ -9087,7 +8949,7 @@
         <p:spPr>
           <a:xfrm>
             <a:off x="640080" y="685800"/>
-            <a:ext cx="8777880" cy="1371240"/>
+            <a:ext cx="8777520" cy="1370880"/>
           </a:xfrm>
           <a:prstGeom prst="rect">
             <a:avLst/>
@@ -9101,7 +8963,7 @@
             </a:solidFill>
           </a:ln>
           <a:effectLst>
-            <a:outerShdw dist="50911" dir="8100000" blurRad="101520" rotWithShape="0">
+            <a:outerShdw blurRad="101520" dir="8100000" dist="50402" rotWithShape="0">
               <a:srgbClr val="666666">
                 <a:alpha val="65000"/>
               </a:srgbClr>
@@ -9149,7 +9011,7 @@
         <p:spPr>
           <a:xfrm>
             <a:off x="640080" y="2286000"/>
-            <a:ext cx="8777880" cy="4114440"/>
+            <a:ext cx="8777520" cy="4114080"/>
           </a:xfrm>
           <a:prstGeom prst="rect">
             <a:avLst/>
@@ -9163,7 +9025,7 @@
             </a:solidFill>
           </a:ln>
           <a:effectLst>
-            <a:outerShdw dist="50911" dir="8100000" blurRad="101520" rotWithShape="0">
+            <a:outerShdw blurRad="101520" dir="8100000" dist="50402" rotWithShape="0">
               <a:srgbClr val="666666">
                 <a:alpha val="65000"/>
               </a:srgbClr>
@@ -9211,7 +9073,7 @@
         <p:spPr>
           <a:xfrm>
             <a:off x="581760" y="964080"/>
-            <a:ext cx="8777880" cy="821160"/>
+            <a:ext cx="8777520" cy="821160"/>
           </a:xfrm>
           <a:prstGeom prst="rect">
             <a:avLst/>
@@ -9221,7 +9083,7 @@
             <a:noFill/>
           </a:ln>
           <a:effectLst>
-            <a:outerShdw dist="50911" dir="8100000" blurRad="101520" rotWithShape="0">
+            <a:outerShdw blurRad="101520" dir="8100000" dist="50402" rotWithShape="0">
               <a:srgbClr val="666666">
                 <a:alpha val="65000"/>
               </a:srgbClr>
@@ -9250,6 +9112,7 @@
                   <a:srgbClr val="ffffff"/>
                 </a:solidFill>
                 <a:latin typeface="Arial"/>
+                <a:ea typeface="DejaVu Sans"/>
               </a:rPr>
               <a:t>Sort Products by Warehouse</a:t>
             </a:r>
@@ -9271,7 +9134,7 @@
         <p:spPr>
           <a:xfrm>
             <a:off x="640080" y="2286000"/>
-            <a:ext cx="8777880" cy="439920"/>
+            <a:ext cx="8777520" cy="439920"/>
           </a:xfrm>
           <a:prstGeom prst="rect">
             <a:avLst/>
@@ -9281,7 +9144,7 @@
             <a:noFill/>
           </a:ln>
           <a:effectLst>
-            <a:outerShdw dist="50911" dir="8100000" blurRad="101520" rotWithShape="0">
+            <a:outerShdw blurRad="101520" dir="8100000" dist="50402" rotWithShape="0">
               <a:srgbClr val="666666">
                 <a:alpha val="65000"/>
               </a:srgbClr>
@@ -9310,10 +9173,11 @@
                   <a:srgbClr val="ffffff"/>
                 </a:solidFill>
                 <a:latin typeface="Arial"/>
+                <a:ea typeface="DejaVu Sans"/>
               </a:rPr>
               <a:t>Notice that there have been ZERO sales for product S18_3233</a:t>
             </a:r>
-            <a:endParaRPr b="1" lang="en-CA" sz="2300" spc="-1" strike="noStrike">
+            <a:endParaRPr b="0" lang="en-CA" sz="2300" spc="-1" strike="noStrike">
               <a:solidFill>
                 <a:srgbClr val="000000"/>
               </a:solidFill>
@@ -9331,7 +9195,7 @@
         <p:spPr>
           <a:xfrm>
             <a:off x="1014480" y="4562640"/>
-            <a:ext cx="8179920" cy="1187280"/>
+            <a:ext cx="8179560" cy="1186560"/>
           </a:xfrm>
           <a:prstGeom prst="rect">
             <a:avLst/>
@@ -9341,7 +9205,7 @@
             <a:noFill/>
           </a:ln>
           <a:effectLst>
-            <a:outerShdw dist="50911" dir="8100000" blurRad="101520" rotWithShape="0">
+            <a:outerShdw blurRad="101520" dir="8100000" dist="50402" rotWithShape="0">
               <a:srgbClr val="666666">
                 <a:alpha val="65000"/>
               </a:srgbClr>
@@ -9370,8 +9234,9 @@
                   <a:srgbClr val="ffffff"/>
                 </a:solidFill>
                 <a:latin typeface="Arial"/>
+                <a:ea typeface="DejaVu Sans"/>
               </a:rPr>
-              <a:t>- Product S18_3233 is a 1885 Toyota Supra by Highway 66 Mini Classics.</a:t>
+              <a:t>- Product S18_3233 is a 1985 Toyota Supra by Highway 66 Mini Classics.</a:t>
             </a:r>
             <a:endParaRPr b="0" lang="en-CA" sz="2200" spc="-1" strike="noStrike">
               <a:solidFill>
@@ -9405,8 +9270,9 @@
                   <a:srgbClr val="ffffff"/>
                 </a:solidFill>
                 <a:latin typeface="Arial"/>
+                <a:ea typeface="DejaVu Sans"/>
               </a:rPr>
-              <a:t>- This SKU should definitely be considered for discontinuation.</a:t>
+              <a:t>- This SKU should possibly be considered for discontinuation.</a:t>
             </a:r>
             <a:endParaRPr b="0" lang="en-CA" sz="2200" spc="-1" strike="noStrike">
               <a:solidFill>
@@ -9431,7 +9297,7 @@
         <p:spPr>
           <a:xfrm>
             <a:off x="1440000" y="2880000"/>
-            <a:ext cx="7022160" cy="1400760"/>
+            <a:ext cx="7021800" cy="1400400"/>
           </a:xfrm>
           <a:prstGeom prst="rect">
             <a:avLst/>
@@ -9440,7 +9306,7 @@
             <a:noFill/>
           </a:ln>
           <a:effectLst>
-            <a:outerShdw dist="80498" dir="9206096" blurRad="101520" rotWithShape="0">
+            <a:outerShdw blurRad="101520" dir="9206096" dist="80498" rotWithShape="0">
               <a:srgbClr val="333333">
                 <a:alpha val="65000"/>
               </a:srgbClr>
@@ -9457,7 +9323,7 @@
         <p:spPr>
           <a:xfrm>
             <a:off x="3269520" y="3103920"/>
-            <a:ext cx="5580000" cy="360000"/>
+            <a:ext cx="5579640" cy="359640"/>
           </a:xfrm>
           <a:prstGeom prst="ellipse">
             <a:avLst/>
@@ -9470,7 +9336,7 @@
             <a:round/>
           </a:ln>
           <a:effectLst>
-            <a:outerShdw dist="50911" dir="8100000" blurRad="101520" rotWithShape="0">
+            <a:outerShdw blurRad="101520" dir="8100000" dist="50402" rotWithShape="0">
               <a:srgbClr val="666666">
                 <a:alpha val="65000"/>
               </a:srgbClr>
@@ -9488,11 +9354,17 @@
             <a:noAutofit/>
           </a:bodyPr>
           <a:p>
+            <a:pPr>
+              <a:lnSpc>
+                <a:spcPct val="100000"/>
+              </a:lnSpc>
+            </a:pPr>
             <a:endParaRPr b="0" lang="en-CA" sz="1800" spc="-1" strike="noStrike">
               <a:solidFill>
                 <a:srgbClr val="000000"/>
               </a:solidFill>
               <a:latin typeface="Arial"/>
+              <a:ea typeface="DejaVu Sans"/>
             </a:endParaRPr>
           </a:p>
         </p:txBody>
@@ -9536,7 +9408,7 @@
         <p:spPr>
           <a:xfrm>
             <a:off x="640080" y="685800"/>
-            <a:ext cx="8777880" cy="1371240"/>
+            <a:ext cx="8777520" cy="1370880"/>
           </a:xfrm>
           <a:prstGeom prst="rect">
             <a:avLst/>
@@ -9550,7 +9422,7 @@
             </a:solidFill>
           </a:ln>
           <a:effectLst>
-            <a:outerShdw dist="50911" dir="8100000" blurRad="101520" rotWithShape="0">
+            <a:outerShdw blurRad="101520" dir="8100000" dist="50402" rotWithShape="0">
               <a:srgbClr val="666666">
                 <a:alpha val="65000"/>
               </a:srgbClr>
@@ -9574,6 +9446,11 @@
             <a:noAutofit/>
           </a:bodyPr>
           <a:p>
+            <a:pPr>
+              <a:lnSpc>
+                <a:spcPct val="100000"/>
+              </a:lnSpc>
+            </a:pPr>
             <a:endParaRPr b="0" lang="en-CA" sz="1800" spc="-1" strike="noStrike">
               <a:solidFill>
                 <a:schemeClr val="lt1"/>
@@ -9593,7 +9470,7 @@
         <p:spPr>
           <a:xfrm>
             <a:off x="640080" y="2286000"/>
-            <a:ext cx="8777880" cy="4114440"/>
+            <a:ext cx="8777520" cy="4114080"/>
           </a:xfrm>
           <a:prstGeom prst="rect">
             <a:avLst/>
@@ -9607,7 +9484,7 @@
             </a:solidFill>
           </a:ln>
           <a:effectLst>
-            <a:outerShdw dist="50911" dir="8100000" blurRad="101520" rotWithShape="0">
+            <a:outerShdw blurRad="101520" dir="8100000" dist="50402" rotWithShape="0">
               <a:srgbClr val="666666">
                 <a:alpha val="65000"/>
               </a:srgbClr>
@@ -9631,6 +9508,11 @@
             <a:noAutofit/>
           </a:bodyPr>
           <a:p>
+            <a:pPr>
+              <a:lnSpc>
+                <a:spcPct val="100000"/>
+              </a:lnSpc>
+            </a:pPr>
             <a:endParaRPr b="0" lang="en-CA" sz="1800" spc="-1" strike="noStrike">
               <a:solidFill>
                 <a:schemeClr val="lt1"/>
@@ -9650,7 +9532,7 @@
         <p:spPr>
           <a:xfrm>
             <a:off x="581760" y="964080"/>
-            <a:ext cx="8777880" cy="821160"/>
+            <a:ext cx="8777520" cy="821160"/>
           </a:xfrm>
           <a:prstGeom prst="rect">
             <a:avLst/>
@@ -9660,7 +9542,7 @@
             <a:noFill/>
           </a:ln>
           <a:effectLst>
-            <a:outerShdw dist="50911" dir="8100000" blurRad="101520" rotWithShape="0">
+            <a:outerShdw blurRad="101520" dir="8100000" dist="50402" rotWithShape="0">
               <a:srgbClr val="666666">
                 <a:alpha val="65000"/>
               </a:srgbClr>
@@ -9689,6 +9571,7 @@
                   <a:srgbClr val="ffffff"/>
                 </a:solidFill>
                 <a:latin typeface="Arial"/>
+                <a:ea typeface="DejaVu Sans"/>
               </a:rPr>
               <a:t>Sort Products by Warehouse</a:t>
             </a:r>
@@ -9710,7 +9593,7 @@
         <p:spPr>
           <a:xfrm>
             <a:off x="604080" y="2322000"/>
-            <a:ext cx="8777880" cy="1797840"/>
+            <a:ext cx="8777520" cy="1797120"/>
           </a:xfrm>
           <a:prstGeom prst="rect">
             <a:avLst/>
@@ -9720,7 +9603,7 @@
             <a:noFill/>
           </a:ln>
           <a:effectLst>
-            <a:outerShdw dist="50911" dir="8100000" blurRad="101520" rotWithShape="0">
+            <a:outerShdw blurRad="101520" dir="8100000" dist="50402" rotWithShape="0">
               <a:srgbClr val="666666">
                 <a:alpha val="65000"/>
               </a:srgbClr>
@@ -9749,6 +9632,7 @@
                   <a:srgbClr val="ffffff"/>
                 </a:solidFill>
                 <a:latin typeface="Arial"/>
+                <a:ea typeface="DejaVu Sans"/>
               </a:rPr>
               <a:t>- All warehouses are selling inventory with reasonable distributions.</a:t>
             </a:r>
@@ -9784,6 +9668,7 @@
                   <a:srgbClr val="ffffff"/>
                 </a:solidFill>
                 <a:latin typeface="Arial"/>
+                <a:ea typeface="DejaVu Sans"/>
               </a:rPr>
               <a:t>- All warehouses contain some products which appear to contain insufficient stock levels based on previous sales.</a:t>
             </a:r>
@@ -9819,6 +9704,7 @@
                   <a:srgbClr val="ffffff"/>
                 </a:solidFill>
                 <a:latin typeface="Arial"/>
+                <a:ea typeface="DejaVu Sans"/>
               </a:rPr>
               <a:t>- Depending on the reasons behind the low inventory of certain products it may be advisable to discontinue those particular products.</a:t>
             </a:r>
@@ -9844,7 +9730,7 @@
         <p:spPr>
           <a:xfrm>
             <a:off x="1944000" y="4153680"/>
-            <a:ext cx="6120000" cy="2109600"/>
+            <a:ext cx="6119640" cy="2109240"/>
           </a:xfrm>
           <a:prstGeom prst="rect">
             <a:avLst/>
@@ -9853,7 +9739,7 @@
             <a:noFill/>
           </a:ln>
           <a:effectLst>
-            <a:outerShdw dist="80498" dir="9206096" blurRad="101520" rotWithShape="0">
+            <a:outerShdw blurRad="101520" dir="9206096" dist="80498" rotWithShape="0">
               <a:srgbClr val="333333">
                 <a:alpha val="65000"/>
               </a:srgbClr>
